--- a/Ride_ETA_Prediction_Presentation.pptx
+++ b/Ride_ETA_Prediction_Presentation.pptx
@@ -5,16 +5,17 @@
     <p:sldMasterId id="2147483660" r:id="rId1"/>
   </p:sldMasterIdLst>
   <p:notesMasterIdLst>
-    <p:notesMasterId r:id="rId9"/>
+    <p:notesMasterId r:id="rId10"/>
   </p:notesMasterIdLst>
   <p:sldIdLst>
-    <p:sldId id="256" r:id="rId2"/>
-    <p:sldId id="257" r:id="rId3"/>
-    <p:sldId id="258" r:id="rId4"/>
-    <p:sldId id="259" r:id="rId5"/>
-    <p:sldId id="260" r:id="rId6"/>
-    <p:sldId id="261" r:id="rId7"/>
-    <p:sldId id="262" r:id="rId8"/>
+    <p:sldId id="263" r:id="rId2"/>
+    <p:sldId id="256" r:id="rId3"/>
+    <p:sldId id="257" r:id="rId4"/>
+    <p:sldId id="258" r:id="rId5"/>
+    <p:sldId id="259" r:id="rId6"/>
+    <p:sldId id="260" r:id="rId7"/>
+    <p:sldId id="261" r:id="rId8"/>
+    <p:sldId id="262" r:id="rId9"/>
   </p:sldIdLst>
   <p:sldSz cx="12192000" cy="6858000"/>
   <p:notesSz cx="6858000" cy="9144000"/>
@@ -302,12 +303,38 @@
           <a:lstStyle/>
           <a:p>
             <a:r>
+              <a:rPr dirty="0"/>
               <a:t>SPEAKER SCRIPT:</a:t>
             </a:r>
           </a:p>
           <a:p>
             <a:r>
-              <a:t>Good morning/afternoon, everyone. Today I am presenting our end-to-end Machine Learning Engineering pipeline built to predict NYC taxi trip durations and ride ETAs. The core objective of this project goes far beyond simply training a model; it is about engineering a production-grade system that manages the complete ML lifecycle. As you can see on the architecture diagram, our system ingests raw trip logs, enforces strict data quality contracts via pandera, tracks data and pipeline dependencies using Data Version Control (DVC), evaluates baseline and ensemble models with MLflow experiment tracking, packages the best model inside a Docker container serving a FastAPI REST endpoint with interactive Swagger documentation, runs end-to-end browser tests using Playwright, and continuously monitors production data for distribution drift.</a:t>
+              <a:rPr dirty="0"/>
+              <a:t>Good morning/afternoon, everyone. Today I am presenting our end-to-end Machine Learning Engineering pipeline built to predict NYC taxi trip durations and ride ETAs. The core objective of this project goes far beyond simply training a model; it is about engineering a production-grade system that manages the complete ML lifecycle. As you can see on the architecture diagram, our system ingests raw trip logs, enforces strict data quality contracts via </a:t>
+            </a:r>
+            <a:r>
+              <a:rPr dirty="0" err="1"/>
+              <a:t>pandera</a:t>
+            </a:r>
+            <a:r>
+              <a:rPr dirty="0"/>
+              <a:t>, tracks data and pipeline dependencies using Data Version Control (DVC), evaluates baseline and ensemble models with </a:t>
+            </a:r>
+            <a:r>
+              <a:rPr dirty="0" err="1"/>
+              <a:t>MLflow</a:t>
+            </a:r>
+            <a:r>
+              <a:rPr dirty="0"/>
+              <a:t> experiment tracking, packages the best model inside a Docker container serving a </a:t>
+            </a:r>
+            <a:r>
+              <a:rPr dirty="0" err="1"/>
+              <a:t>FastAPI</a:t>
+            </a:r>
+            <a:r>
+              <a:rPr dirty="0"/>
+              <a:t> REST endpoint with interactive Swagger documentation, runs end-to-end browser tests using Playwright, and continuously monitors production data for distribution drift.</a:t>
             </a:r>
           </a:p>
         </p:txBody>
@@ -382,12 +409,30 @@
           <a:lstStyle/>
           <a:p>
             <a:r>
+              <a:rPr dirty="0"/>
               <a:t>SPEAKER SCRIPT:</a:t>
             </a:r>
           </a:p>
           <a:p>
             <a:r>
-              <a:t>High-performing models require clean, reliable data. We begin our pipeline with strict data contract validation using pandera. Before any data reaches model training, it must pass schema rules: GPS coordinates must fall within valid geographic boundaries, categorical flags must match expected values, and numerical fields like passenger count and trip duration cannot be negative. If invalid data is ingested, pandera raises a schema error immediately to protect downstream pipelines. During Exploratory Data Analysis, we parsed timestamps and analyzed spatial distributions. Our analysis revealed clear hourly and weekly patterns—with demand spiking during weekday morning and evening rush hours. Mapping the pickup coordinates also confirmed concentrated trip boundaries, allowing us to safely isolate valid NYC trips and filter out spatial anomalies.</a:t>
+              <a:rPr dirty="0"/>
+              <a:t>High-performing models require clean, reliable data. We begin our pipeline with strict data contract validation using </a:t>
+            </a:r>
+            <a:r>
+              <a:rPr dirty="0" err="1"/>
+              <a:t>pandera</a:t>
+            </a:r>
+            <a:r>
+              <a:rPr dirty="0"/>
+              <a:t>. Before any data reaches model training, it must pass schema rules: GPS coordinates must fall within valid geographic boundaries, categorical flags must match expected values, and numerical fields like passenger count and trip duration cannot be negative. If invalid data is ingested, </a:t>
+            </a:r>
+            <a:r>
+              <a:rPr dirty="0" err="1"/>
+              <a:t>pandera</a:t>
+            </a:r>
+            <a:r>
+              <a:rPr dirty="0"/>
+              <a:t> raises a schema error immediately to protect downstream pipelines. During Exploratory Data Analysis, we parsed timestamps and analyzed spatial distributions. Our analysis revealed clear hourly and weekly patterns—with demand spiking during weekday morning and evening rush hours. Mapping the pickup coordinates also confirmed concentrated trip boundaries, allowing us to safely isolate valid NYC trips and filter out spatial anomalies.</a:t>
             </a:r>
           </a:p>
         </p:txBody>
@@ -6542,8 +6587,8 @@
         </p:nvSpPr>
         <p:spPr>
           <a:xfrm>
-            <a:off x="731520" y="457200"/>
-            <a:ext cx="10698480" cy="731520"/>
+            <a:off x="3117273" y="1667102"/>
+            <a:ext cx="6352309" cy="954107"/>
           </a:xfrm>
           <a:prstGeom prst="rect">
             <a:avLst/>
@@ -6551,21 +6596,20 @@
           <a:noFill/>
         </p:spPr>
         <p:txBody>
-          <a:bodyPr wrap="square">
+          <a:bodyPr wrap="square" rtlCol="0">
             <a:spAutoFit/>
           </a:bodyPr>
           <a:lstStyle/>
           <a:p>
-            <a:pPr>
-              <a:defRPr sz="2800" b="1">
-                <a:solidFill>
-                  <a:srgbClr val="1A365D"/>
-                </a:solidFill>
-              </a:defRPr>
-            </a:pPr>
-            <a:r>
-              <a:t>Slide 1: End-to-End Ride-Hailing ETA Prediction Pipeline Architecture</a:t>
-            </a:r>
+            <a:r>
+              <a:rPr lang="en-US" sz="2800" b="1" dirty="0" smtClean="0">
+                <a:latin typeface="Arial Black" panose="020B0A04020102020204" pitchFamily="34" charset="0"/>
+              </a:rPr>
+              <a:t>End-to-End Ride-Hailing ETA Prediction</a:t>
+            </a:r>
+            <a:endParaRPr lang="en-US" sz="2800" b="1" dirty="0">
+              <a:latin typeface="Arial Black" panose="020B0A04020102020204" pitchFamily="34" charset="0"/>
+            </a:endParaRPr>
           </a:p>
         </p:txBody>
       </p:sp>
@@ -6577,8 +6621,8 @@
         </p:nvSpPr>
         <p:spPr>
           <a:xfrm>
-            <a:off x="731520" y="1371600"/>
-            <a:ext cx="10698480" cy="4754880"/>
+            <a:off x="3532909" y="3345873"/>
+            <a:ext cx="3581400" cy="369332"/>
           </a:xfrm>
           <a:prstGeom prst="rect">
             <a:avLst/>
@@ -6586,77 +6630,48 @@
           <a:noFill/>
         </p:spPr>
         <p:txBody>
-          <a:bodyPr wrap="square">
+          <a:bodyPr wrap="square" rtlCol="0">
             <a:spAutoFit/>
           </a:bodyPr>
           <a:lstStyle/>
           <a:p>
-            <a:pPr>
-              <a:spcAft>
-                <a:spcPts val="1400"/>
-              </a:spcAft>
-              <a:defRPr sz="1800">
-                <a:solidFill>
-                  <a:srgbClr val="2D3748"/>
-                </a:solidFill>
-              </a:defRPr>
-            </a:pPr>
-            <a:r>
-              <a:t>• Objective: Predict NYC Taxi trip duration and ETA using spatial, temporal, and vendor attributes.</a:t>
-            </a:r>
-          </a:p>
-          <a:p>
-            <a:pPr>
-              <a:spcAft>
-                <a:spcPts val="1400"/>
-              </a:spcAft>
-              <a:defRPr sz="1800">
-                <a:solidFill>
-                  <a:srgbClr val="2D3748"/>
-                </a:solidFill>
-              </a:defRPr>
-            </a:pPr>
-            <a:r>
-              <a:t>• System Focus: Schema validation, DVC pipeline tracking, containerized serving, automated testing, and statistical drift detection.</a:t>
-            </a:r>
-          </a:p>
-          <a:p>
-            <a:pPr>
-              <a:spcAft>
-                <a:spcPts val="1400"/>
-              </a:spcAft>
-              <a:defRPr sz="1800">
-                <a:solidFill>
-                  <a:srgbClr val="2D3748"/>
-                </a:solidFill>
-              </a:defRPr>
-            </a:pPr>
-            <a:r>
-              <a:t>• Core Tech Stack: Python, Pandera, DVC, Scikit-Learn, XGBoost, MLflow, FastAPI, Docker, Pytest, Playwright.</a:t>
-            </a:r>
-          </a:p>
-          <a:p>
-            <a:pPr>
-              <a:spcAft>
-                <a:spcPts val="1400"/>
-              </a:spcAft>
-              <a:defRPr sz="1800">
-                <a:solidFill>
-                  <a:srgbClr val="2D3748"/>
-                </a:solidFill>
-              </a:defRPr>
-            </a:pPr>
-            <a:r>
-              <a:t>• Data Flow: Raw Data (NYC.csv) → Pandera Validation → DVC Feature Store → MLflow Engine → Docker/FastAPI Container → Playwright Tests → Drift Monitor.</a:t>
-            </a:r>
+            <a:r>
+              <a:rPr lang="en-US" dirty="0" smtClean="0"/>
+              <a:t>BY – </a:t>
+            </a:r>
+            <a:r>
+              <a:rPr lang="en-US" dirty="0" err="1" smtClean="0"/>
+              <a:t>Abhijith</a:t>
+            </a:r>
+            <a:r>
+              <a:rPr lang="en-US" dirty="0" smtClean="0"/>
+              <a:t> and </a:t>
+            </a:r>
+            <a:r>
+              <a:rPr lang="en-US" dirty="0" err="1" smtClean="0"/>
+              <a:t>Shubhra</a:t>
+            </a:r>
+            <a:endParaRPr lang="en-US" dirty="0"/>
           </a:p>
         </p:txBody>
       </p:sp>
     </p:spTree>
+    <p:extLst>
+      <p:ext uri="{BB962C8B-B14F-4D97-AF65-F5344CB8AC3E}">
+        <p14:creationId xmlns:p14="http://schemas.microsoft.com/office/powerpoint/2010/main" val="1253379057"/>
+      </p:ext>
+    </p:extLst>
   </p:cSld>
   <p:clrMapOvr>
     <a:masterClrMapping/>
   </p:clrMapOvr>
+  <p:timing>
+    <p:tnLst>
+      <p:par>
+        <p:cTn id="1" dur="indefinite" restart="never" nodeType="tmRoot"/>
+      </p:par>
+    </p:tnLst>
+  </p:timing>
 </p:sld>
 </file>
 
@@ -6707,7 +6722,7 @@
               </a:defRPr>
             </a:pPr>
             <a:r>
-              <a:t>Slide 2: Data Ingestion, Schema Contracts &amp; EDA Insights</a:t>
+              <a:t>Slide 1: End-to-End Ride-Hailing ETA Prediction Pipeline Architecture</a:t>
             </a:r>
           </a:p>
         </p:txBody>
@@ -6720,7 +6735,7 @@
         </p:nvSpPr>
         <p:spPr>
           <a:xfrm>
-            <a:off x="731520" y="1371600"/>
+            <a:off x="731520" y="1382550"/>
             <a:ext cx="10698480" cy="4754880"/>
           </a:xfrm>
           <a:prstGeom prst="rect">
@@ -6745,7 +6760,8 @@
               </a:defRPr>
             </a:pPr>
             <a:r>
-              <a:t>• Data Ingestion: Ingests raw trip logs (NYC.csv) containing timestamps, GPS coordinates, and trip context.</a:t>
+              <a:rPr dirty="0"/>
+              <a:t>• Objective: Predict NYC Taxi trip duration and ETA using spatial, temporal, and vendor attributes.</a:t>
             </a:r>
           </a:p>
           <a:p>
@@ -6760,7 +6776,8 @@
               </a:defRPr>
             </a:pPr>
             <a:r>
-              <a:t>• Schema Validation (pandera): Enforces latitude [-90, 90] / longitude [-180, 180] limits, vendor_id in {1,2}, and non-negative passenger counts &amp; durations.</a:t>
+              <a:rPr dirty="0"/>
+              <a:t>• System Focus: Schema validation, DVC pipeline tracking, containerized serving, automated testing, and statistical drift detection.</a:t>
             </a:r>
           </a:p>
           <a:p>
@@ -6775,7 +6792,56 @@
               </a:defRPr>
             </a:pPr>
             <a:r>
-              <a:t>• EDA Takeaways: Identified distinct demand spikes during weekday morning and evening rush hours.</a:t>
+              <a:rPr dirty="0"/>
+              <a:t>• Core Tech Stack: Python, </a:t>
+            </a:r>
+            <a:r>
+              <a:rPr dirty="0" err="1"/>
+              <a:t>Pandera</a:t>
+            </a:r>
+            <a:r>
+              <a:rPr dirty="0"/>
+              <a:t>, DVC, </a:t>
+            </a:r>
+            <a:r>
+              <a:rPr dirty="0" err="1"/>
+              <a:t>Scikit</a:t>
+            </a:r>
+            <a:r>
+              <a:rPr dirty="0"/>
+              <a:t>-Learn, </a:t>
+            </a:r>
+            <a:r>
+              <a:rPr dirty="0" err="1"/>
+              <a:t>XGBoost</a:t>
+            </a:r>
+            <a:r>
+              <a:rPr dirty="0"/>
+              <a:t>, </a:t>
+            </a:r>
+            <a:r>
+              <a:rPr dirty="0" err="1"/>
+              <a:t>MLflow</a:t>
+            </a:r>
+            <a:r>
+              <a:rPr dirty="0"/>
+              <a:t>, </a:t>
+            </a:r>
+            <a:r>
+              <a:rPr dirty="0" err="1"/>
+              <a:t>FastAPI</a:t>
+            </a:r>
+            <a:r>
+              <a:rPr dirty="0"/>
+              <a:t>, Docker, </a:t>
+            </a:r>
+            <a:r>
+              <a:rPr dirty="0" err="1"/>
+              <a:t>Pytest</a:t>
+            </a:r>
+            <a:r>
+              <a:rPr dirty="0"/>
+              <a:t>, Playwright.</a:t>
             </a:r>
           </a:p>
           <a:p>
@@ -6790,7 +6856,32 @@
               </a:defRPr>
             </a:pPr>
             <a:r>
-              <a:t>• Spatial Boundary Analysis: Filtered out invalid coordinate pings and anomalies to isolate valid NYC trips.</a:t>
+              <a:rPr dirty="0"/>
+              <a:t>• Data Flow: Raw Data (NYC.csv) → </a:t>
+            </a:r>
+            <a:r>
+              <a:rPr dirty="0" err="1"/>
+              <a:t>Pandera</a:t>
+            </a:r>
+            <a:r>
+              <a:rPr dirty="0"/>
+              <a:t> Validation → DVC Feature Store → </a:t>
+            </a:r>
+            <a:r>
+              <a:rPr dirty="0" err="1"/>
+              <a:t>MLflow</a:t>
+            </a:r>
+            <a:r>
+              <a:rPr dirty="0"/>
+              <a:t> Engine → Docker/</a:t>
+            </a:r>
+            <a:r>
+              <a:rPr dirty="0" err="1"/>
+              <a:t>FastAPI</a:t>
+            </a:r>
+            <a:r>
+              <a:rPr dirty="0"/>
+              <a:t> Container → Playwright Tests → Drift Monitor.</a:t>
             </a:r>
           </a:p>
         </p:txBody>
@@ -6800,6 +6891,13 @@
   <p:clrMapOvr>
     <a:masterClrMapping/>
   </p:clrMapOvr>
+  <p:timing>
+    <p:tnLst>
+      <p:par>
+        <p:cTn id="1" dur="indefinite" restart="never" nodeType="tmRoot"/>
+      </p:par>
+    </p:tnLst>
+  </p:timing>
 </p:sld>
 </file>
 
@@ -6850,7 +6948,7 @@
               </a:defRPr>
             </a:pPr>
             <a:r>
-              <a:t>Slide 3: Modular Preprocessing &amp; Feature Engineering</a:t>
+              <a:t>Slide 2: Data Ingestion, Schema Contracts &amp; EDA Insights</a:t>
             </a:r>
           </a:p>
         </p:txBody>
@@ -6888,7 +6986,7 @@
               </a:defRPr>
             </a:pPr>
             <a:r>
-              <a:t>• Spatial Features: Computes distance_km from pickup and dropoff coordinates using the Haversine formula.</a:t>
+              <a:t>• Data Ingestion: Ingests raw trip logs (NYC.csv) containing timestamps, GPS coordinates, and trip context.</a:t>
             </a:r>
           </a:p>
           <a:p>
@@ -6903,7 +7001,7 @@
               </a:defRPr>
             </a:pPr>
             <a:r>
-              <a:t>• Temporal Features: Derives pickup_hour, pickup_day, pickup_month, pickup_weekday, is_weekend, and rush_hour flags (7–10 AM &amp; 4–8 PM).</a:t>
+              <a:t>• Schema Validation (pandera): Enforces latitude [-90, 90] / longitude [-180, 180] limits, vendor_id in {1,2}, and non-negative passenger counts &amp; durations.</a:t>
             </a:r>
           </a:p>
           <a:p>
@@ -6918,7 +7016,7 @@
               </a:defRPr>
             </a:pPr>
             <a:r>
-              <a:t>• Outlier Quality Control: Applies IQR filtering (Q1 - 1.5*IQR to Q3 + 1.5*IQR) to clean extreme distance, passenger, and duration outliers.</a:t>
+              <a:t>• EDA Takeaways: Identified distinct demand spikes during weekday morning and evening rush hours.</a:t>
             </a:r>
           </a:p>
           <a:p>
@@ -6933,7 +7031,7 @@
               </a:defRPr>
             </a:pPr>
             <a:r>
-              <a:t>• Artifact Serialization: Packages imputation, standard scaling, and one-hot encoding into ColumnTransformer saved as preprocessor.pkl.</a:t>
+              <a:t>• Spatial Boundary Analysis: Filtered out invalid coordinate pings and anomalies to isolate valid NYC trips.</a:t>
             </a:r>
           </a:p>
         </p:txBody>
@@ -6943,6 +7041,13 @@
   <p:clrMapOvr>
     <a:masterClrMapping/>
   </p:clrMapOvr>
+  <p:timing>
+    <p:tnLst>
+      <p:par>
+        <p:cTn id="1" dur="indefinite" restart="never" nodeType="tmRoot"/>
+      </p:par>
+    </p:tnLst>
+  </p:timing>
 </p:sld>
 </file>
 
@@ -6993,7 +7098,7 @@
               </a:defRPr>
             </a:pPr>
             <a:r>
-              <a:t>Slide 4: Experimentation, MLflow Tracking &amp; Model Selection</a:t>
+              <a:t>Slide 3: Modular Preprocessing &amp; Feature Engineering</a:t>
             </a:r>
           </a:p>
         </p:txBody>
@@ -7031,7 +7136,7 @@
               </a:defRPr>
             </a:pPr>
             <a:r>
-              <a:t>• Model Exploration: Evaluated Linear Regression baseline against Random Forest Regressor and Tuned XGBoost Regressor.</a:t>
+              <a:t>• Spatial Features: Computes distance_km from pickup and dropoff coordinates using the Haversine formula.</a:t>
             </a:r>
           </a:p>
           <a:p>
@@ -7046,7 +7151,7 @@
               </a:defRPr>
             </a:pPr>
             <a:r>
-              <a:t>• Hyperparameter Search: Tuned XGBoost (n_estimators, max_depth, learning_rate, subsample) via RandomizedSearchCV.</a:t>
+              <a:t>• Temporal Features: Derives pickup_hour, pickup_day, pickup_month, pickup_weekday, is_weekend, and rush_hour flags (7–10 AM &amp; 4–8 PM).</a:t>
             </a:r>
           </a:p>
           <a:p>
@@ -7061,7 +7166,7 @@
               </a:defRPr>
             </a:pPr>
             <a:r>
-              <a:t>• MLflow Tracking: Logs parameters, metrics (RMSE, MAE, R²), feature importances, and error reports (top_1000_prediction_errors.csv).</a:t>
+              <a:t>• Outlier Quality Control: Applies IQR filtering (Q1 - 1.5*IQR to Q3 + 1.5*IQR) to clean extreme distance, passenger, and duration outliers.</a:t>
             </a:r>
           </a:p>
           <a:p>
@@ -7076,7 +7181,7 @@
               </a:defRPr>
             </a:pPr>
             <a:r>
-              <a:t>• Automated Selection: Evaluates candidate artifacts on unseen test data and registers the top performer as best_model.pkl.</a:t>
+              <a:t>• Artifact Serialization: Packages imputation, standard scaling, and one-hot encoding into ColumnTransformer saved as preprocessor.pkl.</a:t>
             </a:r>
           </a:p>
         </p:txBody>
@@ -7086,6 +7191,13 @@
   <p:clrMapOvr>
     <a:masterClrMapping/>
   </p:clrMapOvr>
+  <p:timing>
+    <p:tnLst>
+      <p:par>
+        <p:cTn id="1" dur="indefinite" restart="never" nodeType="tmRoot"/>
+      </p:par>
+    </p:tnLst>
+  </p:timing>
 </p:sld>
 </file>
 
@@ -7136,7 +7248,7 @@
               </a:defRPr>
             </a:pPr>
             <a:r>
-              <a:t>Slide 5: Version Control (DVC), Container Packaging &amp; REST Serving</a:t>
+              <a:t>Slide 4: Experimentation, MLflow Tracking &amp; Model Selection</a:t>
             </a:r>
           </a:p>
         </p:txBody>
@@ -7174,7 +7286,7 @@
               </a:defRPr>
             </a:pPr>
             <a:r>
-              <a:t>• DVC Pipeline (dvc.yaml): Tracks stage dependencies; enables incremental pipeline execution via dvc repro and remote tracking via dvc push.</a:t>
+              <a:t>• Model Exploration: Evaluated Linear Regression baseline against Random Forest Regressor and Tuned XGBoost Regressor.</a:t>
             </a:r>
           </a:p>
           <a:p>
@@ -7189,7 +7301,7 @@
               </a:defRPr>
             </a:pPr>
             <a:r>
-              <a:t>• Docker Packaging: Containers isolate FastAPI serving code, dependencies, and best_model.pkl via docker compose up --build.</a:t>
+              <a:t>• Hyperparameter Search: Tuned XGBoost (n_estimators, max_depth, learning_rate, subsample) via RandomizedSearchCV.</a:t>
             </a:r>
           </a:p>
           <a:p>
@@ -7204,7 +7316,7 @@
               </a:defRPr>
             </a:pPr>
             <a:r>
-              <a:t>• FastAPI Endpoints: Exposes GET /health for readiness probes and POST /predict returning predicted trip duration in seconds and minutes.</a:t>
+              <a:t>• MLflow Tracking: Logs parameters, metrics (RMSE, MAE, R²), feature importances, and error reports (top_1000_prediction_errors.csv).</a:t>
             </a:r>
           </a:p>
           <a:p>
@@ -7219,7 +7331,7 @@
               </a:defRPr>
             </a:pPr>
             <a:r>
-              <a:t>• Interactive Swagger UI: Automatically generates interactive documentation accessible at http://localhost:8000/docs.</a:t>
+              <a:t>• Automated Selection: Evaluates candidate artifacts on unseen test data and registers the top performer as best_model.pkl.</a:t>
             </a:r>
           </a:p>
         </p:txBody>
@@ -7229,6 +7341,13 @@
   <p:clrMapOvr>
     <a:masterClrMapping/>
   </p:clrMapOvr>
+  <p:timing>
+    <p:tnLst>
+      <p:par>
+        <p:cTn id="1" dur="indefinite" restart="never" nodeType="tmRoot"/>
+      </p:par>
+    </p:tnLst>
+  </p:timing>
 </p:sld>
 </file>
 
@@ -7279,7 +7398,7 @@
               </a:defRPr>
             </a:pPr>
             <a:r>
-              <a:t>Slide 6: Quality Assurance: Automated Testing Suite</a:t>
+              <a:t>Slide 5: Version Control (DVC), Container Packaging &amp; REST Serving</a:t>
             </a:r>
           </a:p>
         </p:txBody>
@@ -7317,7 +7436,7 @@
               </a:defRPr>
             </a:pPr>
             <a:r>
-              <a:t>• Test Suite Division: Leverages custom pytest markers (-m e2e) to separate fast local unit tests from integration tests.</a:t>
+              <a:t>• DVC Pipeline (dvc.yaml): Tracks stage dependencies; enables incremental pipeline execution via dvc repro and remote tracking via dvc push.</a:t>
             </a:r>
           </a:p>
           <a:p>
@@ -7332,7 +7451,7 @@
               </a:defRPr>
             </a:pPr>
             <a:r>
-              <a:t>• Fast Contract Tests: Executes unit logic and data contract checks without launching Docker containers or models.</a:t>
+              <a:t>• Docker Packaging: Containers isolate FastAPI serving code, dependencies, and best_model.pkl via docker compose up --build.</a:t>
             </a:r>
           </a:p>
           <a:p>
@@ -7347,7 +7466,7 @@
               </a:defRPr>
             </a:pPr>
             <a:r>
-              <a:t>• Playwright E2E Driver: Launches a headless Chromium browser instance against live container (pytest -m e2e --browser chromium).</a:t>
+              <a:t>• FastAPI Endpoints: Exposes GET /health for readiness probes and POST /predict returning predicted trip duration in seconds and minutes.</a:t>
             </a:r>
           </a:p>
           <a:p>
@@ -7362,7 +7481,7 @@
               </a:defRPr>
             </a:pPr>
             <a:r>
-              <a:t>• Visual UI Assertion: Programmatically verifies that Swagger UI loads at http://127.0.0.1:8000/docs and endpoints render properly.</a:t>
+              <a:t>• Interactive Swagger UI: Automatically generates interactive documentation accessible at http://localhost:8000/docs.</a:t>
             </a:r>
           </a:p>
         </p:txBody>
@@ -7372,6 +7491,13 @@
   <p:clrMapOvr>
     <a:masterClrMapping/>
   </p:clrMapOvr>
+  <p:timing>
+    <p:tnLst>
+      <p:par>
+        <p:cTn id="1" dur="indefinite" restart="never" nodeType="tmRoot"/>
+      </p:par>
+    </p:tnLst>
+  </p:timing>
 </p:sld>
 </file>
 
@@ -7422,7 +7548,7 @@
               </a:defRPr>
             </a:pPr>
             <a:r>
-              <a:t>Slide 7: Continuous Drift Monitoring &amp; Automated Retraining</a:t>
+              <a:t>Slide 6: Quality Assurance: Automated Testing Suite</a:t>
             </a:r>
           </a:p>
         </p:txBody>
@@ -7460,7 +7586,7 @@
               </a:defRPr>
             </a:pPr>
             <a:r>
-              <a:t>• Production Challenge: Real-world seasonal shifts, weather variations, and holiday rush hours degrade static models over time.</a:t>
+              <a:t>• Test Suite Division: Leverages custom pytest markers (-m e2e) to separate fast local unit tests from integration tests.</a:t>
             </a:r>
           </a:p>
           <a:p>
@@ -7475,7 +7601,7 @@
               </a:defRPr>
             </a:pPr>
             <a:r>
-              <a:t>• Drift Simulation: Simulates traffic congestion surges and distance detours on incoming live feature payloads.</a:t>
+              <a:t>• Fast Contract Tests: Executes unit logic and data contract checks without launching Docker containers or models.</a:t>
             </a:r>
           </a:p>
           <a:p>
@@ -7490,7 +7616,7 @@
               </a:defRPr>
             </a:pPr>
             <a:r>
-              <a:t>• Statistical Testing: Applies Kolmogorov-Smirnov (KS) two-sample tests across numeric features to flag distribution shifts (p &lt; 0.05).</a:t>
+              <a:t>• Playwright E2E Driver: Launches a headless Chromium browser instance against live container (pytest -m e2e --browser chromium).</a:t>
             </a:r>
           </a:p>
           <a:p>
@@ -7505,7 +7631,7 @@
               </a:defRPr>
             </a:pPr>
             <a:r>
-              <a:t>• Retraining Loop: Automated trigger executes retraining (dvc repro), re-fits preprocessors, updates hyperparameters, and deploys new best_model.pkl.</a:t>
+              <a:t>• Visual UI Assertion: Programmatically verifies that Swagger UI loads at http://127.0.0.1:8000/docs and endpoints render properly.</a:t>
             </a:r>
           </a:p>
         </p:txBody>
@@ -7515,6 +7641,163 @@
   <p:clrMapOvr>
     <a:masterClrMapping/>
   </p:clrMapOvr>
+  <p:timing>
+    <p:tnLst>
+      <p:par>
+        <p:cTn id="1" dur="indefinite" restart="never" nodeType="tmRoot"/>
+      </p:par>
+    </p:tnLst>
+  </p:timing>
+</p:sld>
+</file>
+
+<file path=ppt/slides/slide8.xml><?xml version="1.0" encoding="utf-8"?>
+<p:sld xmlns:a="http://schemas.openxmlformats.org/drawingml/2006/main" xmlns:r="http://schemas.openxmlformats.org/officeDocument/2006/relationships" xmlns:p="http://schemas.openxmlformats.org/presentationml/2006/main">
+  <p:cSld>
+    <p:spTree>
+      <p:nvGrpSpPr>
+        <p:cNvPr id="1" name=""/>
+        <p:cNvGrpSpPr/>
+        <p:nvPr/>
+      </p:nvGrpSpPr>
+      <p:grpSpPr>
+        <a:xfrm>
+          <a:off x="0" y="0"/>
+          <a:ext cx="0" cy="0"/>
+          <a:chOff x="0" y="0"/>
+          <a:chExt cx="0" cy="0"/>
+        </a:xfrm>
+      </p:grpSpPr>
+      <p:sp>
+        <p:nvSpPr>
+          <p:cNvPr id="2" name="TextBox 1"/>
+          <p:cNvSpPr txBox="1"/>
+          <p:nvPr/>
+        </p:nvSpPr>
+        <p:spPr>
+          <a:xfrm>
+            <a:off x="731520" y="457200"/>
+            <a:ext cx="10698480" cy="731520"/>
+          </a:xfrm>
+          <a:prstGeom prst="rect">
+            <a:avLst/>
+          </a:prstGeom>
+          <a:noFill/>
+        </p:spPr>
+        <p:txBody>
+          <a:bodyPr wrap="square">
+            <a:spAutoFit/>
+          </a:bodyPr>
+          <a:lstStyle/>
+          <a:p>
+            <a:pPr>
+              <a:defRPr sz="2800" b="1">
+                <a:solidFill>
+                  <a:srgbClr val="1A365D"/>
+                </a:solidFill>
+              </a:defRPr>
+            </a:pPr>
+            <a:r>
+              <a:t>Slide 7: Continuous Drift Monitoring &amp; Automated Retraining</a:t>
+            </a:r>
+          </a:p>
+        </p:txBody>
+      </p:sp>
+      <p:sp>
+        <p:nvSpPr>
+          <p:cNvPr id="3" name="TextBox 2"/>
+          <p:cNvSpPr txBox="1"/>
+          <p:nvPr/>
+        </p:nvSpPr>
+        <p:spPr>
+          <a:xfrm>
+            <a:off x="731520" y="1371600"/>
+            <a:ext cx="10698480" cy="4754880"/>
+          </a:xfrm>
+          <a:prstGeom prst="rect">
+            <a:avLst/>
+          </a:prstGeom>
+          <a:noFill/>
+        </p:spPr>
+        <p:txBody>
+          <a:bodyPr wrap="square">
+            <a:spAutoFit/>
+          </a:bodyPr>
+          <a:lstStyle/>
+          <a:p>
+            <a:pPr>
+              <a:spcAft>
+                <a:spcPts val="1400"/>
+              </a:spcAft>
+              <a:defRPr sz="1800">
+                <a:solidFill>
+                  <a:srgbClr val="2D3748"/>
+                </a:solidFill>
+              </a:defRPr>
+            </a:pPr>
+            <a:r>
+              <a:t>• Production Challenge: Real-world seasonal shifts, weather variations, and holiday rush hours degrade static models over time.</a:t>
+            </a:r>
+          </a:p>
+          <a:p>
+            <a:pPr>
+              <a:spcAft>
+                <a:spcPts val="1400"/>
+              </a:spcAft>
+              <a:defRPr sz="1800">
+                <a:solidFill>
+                  <a:srgbClr val="2D3748"/>
+                </a:solidFill>
+              </a:defRPr>
+            </a:pPr>
+            <a:r>
+              <a:t>• Drift Simulation: Simulates traffic congestion surges and distance detours on incoming live feature payloads.</a:t>
+            </a:r>
+          </a:p>
+          <a:p>
+            <a:pPr>
+              <a:spcAft>
+                <a:spcPts val="1400"/>
+              </a:spcAft>
+              <a:defRPr sz="1800">
+                <a:solidFill>
+                  <a:srgbClr val="2D3748"/>
+                </a:solidFill>
+              </a:defRPr>
+            </a:pPr>
+            <a:r>
+              <a:t>• Statistical Testing: Applies Kolmogorov-Smirnov (KS) two-sample tests across numeric features to flag distribution shifts (p &lt; 0.05).</a:t>
+            </a:r>
+          </a:p>
+          <a:p>
+            <a:pPr>
+              <a:spcAft>
+                <a:spcPts val="1400"/>
+              </a:spcAft>
+              <a:defRPr sz="1800">
+                <a:solidFill>
+                  <a:srgbClr val="2D3748"/>
+                </a:solidFill>
+              </a:defRPr>
+            </a:pPr>
+            <a:r>
+              <a:t>• Retraining Loop: Automated trigger executes retraining (dvc repro), re-fits preprocessors, updates hyperparameters, and deploys new best_model.pkl.</a:t>
+            </a:r>
+          </a:p>
+        </p:txBody>
+      </p:sp>
+    </p:spTree>
+  </p:cSld>
+  <p:clrMapOvr>
+    <a:masterClrMapping/>
+  </p:clrMapOvr>
+  <p:timing>
+    <p:tnLst>
+      <p:par>
+        <p:cTn id="1" dur="indefinite" restart="never" nodeType="tmRoot"/>
+      </p:par>
+    </p:tnLst>
+  </p:timing>
 </p:sld>
 </file>
 

--- a/Ride_ETA_Prediction_Presentation.pptx
+++ b/Ride_ETA_Prediction_Presentation.pptx
@@ -2,22 +2,18 @@
 <file path=ppt/presentation.xml><?xml version="1.0" encoding="utf-8"?>
 <p:presentation xmlns:a="http://schemas.openxmlformats.org/drawingml/2006/main" xmlns:r="http://schemas.openxmlformats.org/officeDocument/2006/relationships" xmlns:p="http://schemas.openxmlformats.org/presentationml/2006/main" saveSubsetFonts="1" autoCompressPictures="0">
   <p:sldMasterIdLst>
-    <p:sldMasterId id="2147483660" r:id="rId1"/>
+    <p:sldMasterId id="2147483648" r:id="rId1"/>
   </p:sldMasterIdLst>
-  <p:notesMasterIdLst>
-    <p:notesMasterId r:id="rId10"/>
-  </p:notesMasterIdLst>
   <p:sldIdLst>
-    <p:sldId id="263" r:id="rId2"/>
-    <p:sldId id="256" r:id="rId3"/>
-    <p:sldId id="257" r:id="rId4"/>
-    <p:sldId id="258" r:id="rId5"/>
-    <p:sldId id="259" r:id="rId6"/>
-    <p:sldId id="260" r:id="rId7"/>
-    <p:sldId id="261" r:id="rId8"/>
-    <p:sldId id="262" r:id="rId9"/>
+    <p:sldId id="256" r:id="rId7"/>
+    <p:sldId id="257" r:id="rId9"/>
+    <p:sldId id="258" r:id="rId10"/>
+    <p:sldId id="259" r:id="rId11"/>
+    <p:sldId id="260" r:id="rId12"/>
+    <p:sldId id="261" r:id="rId13"/>
+    <p:sldId id="262" r:id="rId14"/>
   </p:sldIdLst>
-  <p:sldSz cx="12192000" cy="6858000"/>
+  <p:sldSz cx="12191695" cy="6858000" type="screen4x3"/>
   <p:notesSz cx="6858000" cy="9144000"/>
   <p:defaultTextStyle>
     <a:defPPr>
@@ -114,27 +110,11 @@
       </a:defRPr>
     </a:lvl9pPr>
   </p:defaultTextStyle>
-  <p:extLst>
-    <p:ext uri="{EFAFB233-063F-42B5-8137-9DF3F51BA10A}">
-      <p15:sldGuideLst xmlns:p15="http://schemas.microsoft.com/office/powerpoint/2012/main">
-        <p15:guide id="1" orient="horz" pos="2160">
-          <p15:clr>
-            <a:srgbClr val="A4A3A4"/>
-          </p15:clr>
-        </p15:guide>
-        <p15:guide id="2" pos="2880">
-          <p15:clr>
-            <a:srgbClr val="A4A3A4"/>
-          </p15:clr>
-        </p15:guide>
-      </p15:sldGuideLst>
-    </p:ext>
-  </p:extLst>
 </p:presentation>
 </file>
 
 <file path=ppt/notesMasters/notesMaster1.xml><?xml version="1.0" encoding="utf-8"?>
-<p:notesMaster xmlns:a="http://schemas.openxmlformats.org/drawingml/2006/main" xmlns:r="http://schemas.openxmlformats.org/officeDocument/2006/relationships" xmlns:p="http://schemas.openxmlformats.org/presentationml/2006/main">
+<p:notesMaster xmlns:a="http://schemas.openxmlformats.org/drawingml/2006/main" xmlns:p="http://schemas.openxmlformats.org/presentationml/2006/main" xmlns:r="http://schemas.openxmlformats.org/officeDocument/2006/relationships">
   <p:cSld>
     <p:bg>
       <p:bgRef idx="1001">
@@ -155,16 +135,241 @@
           <a:chExt cx="0" cy="0"/>
         </a:xfrm>
       </p:grpSpPr>
+      <p:sp>
+        <p:nvSpPr>
+          <p:cNvPr id="2" name="Header Placeholder 1"/>
+          <p:cNvSpPr>
+            <a:spLocks noGrp="1"/>
+          </p:cNvSpPr>
+          <p:nvPr>
+            <p:ph type="hdr" sz="quarter"/>
+          </p:nvPr>
+        </p:nvSpPr>
+        <p:spPr>
+          <a:xfrm>
+            <a:off x="0" y="0"/>
+            <a:ext cx="2971800" cy="457200"/>
+          </a:xfrm>
+          <a:prstGeom prst="rect">
+            <a:avLst/>
+          </a:prstGeom>
+        </p:spPr>
+        <p:txBody>
+          <a:bodyPr vert="horz" lIns="91440" tIns="45720" rIns="91440" bIns="45720" rtlCol="0"/>
+          <a:lstStyle>
+            <a:lvl1pPr algn="l">
+              <a:defRPr sz="1200"/>
+            </a:lvl1pPr>
+          </a:lstStyle>
+          <a:p>
+            <a:endParaRPr lang="en-US"/>
+          </a:p>
+        </p:txBody>
+      </p:sp>
+      <p:sp>
+        <p:nvSpPr>
+          <p:cNvPr id="3" name="Date Placeholder 2"/>
+          <p:cNvSpPr>
+            <a:spLocks noGrp="1"/>
+          </p:cNvSpPr>
+          <p:nvPr>
+            <p:ph type="dt" idx="1"/>
+          </p:nvPr>
+        </p:nvSpPr>
+        <p:spPr>
+          <a:xfrm>
+            <a:off x="3884613" y="0"/>
+            <a:ext cx="2971800" cy="457200"/>
+          </a:xfrm>
+          <a:prstGeom prst="rect">
+            <a:avLst/>
+          </a:prstGeom>
+        </p:spPr>
+        <p:txBody>
+          <a:bodyPr vert="horz" lIns="91440" tIns="45720" rIns="91440" bIns="45720" rtlCol="0"/>
+          <a:lstStyle>
+            <a:lvl1pPr algn="r">
+              <a:defRPr sz="1200"/>
+            </a:lvl1pPr>
+          </a:lstStyle>
+          <a:p>
+            <a:fld id="{0F89C1C7-3DCD-1040-A9CF-14679D8B5DDD}" type="datetimeFigureOut">
+              <a:rPr lang="en-US" smtClean="0"/>
+              <a:t>10/17/16</a:t>
+            </a:fld>
+            <a:endParaRPr lang="en-US"/>
+          </a:p>
+        </p:txBody>
+      </p:sp>
+      <p:sp>
+        <p:nvSpPr>
+          <p:cNvPr id="4" name="Slide Image Placeholder 3"/>
+          <p:cNvSpPr>
+            <a:spLocks noGrp="1" noRot="1" noChangeAspect="1"/>
+          </p:cNvSpPr>
+          <p:nvPr>
+            <p:ph type="sldImg" idx="2"/>
+          </p:nvPr>
+        </p:nvSpPr>
+        <p:spPr>
+          <a:xfrm>
+            <a:off x="1143000" y="685800"/>
+            <a:ext cx="4572000" cy="3429000"/>
+          </a:xfrm>
+          <a:prstGeom prst="rect">
+            <a:avLst/>
+          </a:prstGeom>
+          <a:noFill/>
+          <a:ln w="12700">
+            <a:solidFill>
+              <a:prstClr val="black"/>
+            </a:solidFill>
+          </a:ln>
+        </p:spPr>
+        <p:txBody>
+          <a:bodyPr vert="horz" lIns="91440" tIns="45720" rIns="91440" bIns="45720" rtlCol="0" anchor="ctr"/>
+          <a:lstStyle/>
+          <a:p>
+            <a:endParaRPr lang="en-US"/>
+          </a:p>
+        </p:txBody>
+      </p:sp>
+      <p:sp>
+        <p:nvSpPr>
+          <p:cNvPr id="5" name="Notes Placeholder 4"/>
+          <p:cNvSpPr>
+            <a:spLocks noGrp="1"/>
+          </p:cNvSpPr>
+          <p:nvPr>
+            <p:ph type="body" sz="quarter" idx="3"/>
+          </p:nvPr>
+        </p:nvSpPr>
+        <p:spPr>
+          <a:xfrm>
+            <a:off x="685800" y="4343400"/>
+            <a:ext cx="5486400" cy="4114800"/>
+          </a:xfrm>
+          <a:prstGeom prst="rect">
+            <a:avLst/>
+          </a:prstGeom>
+        </p:spPr>
+        <p:txBody>
+          <a:bodyPr vert="horz" lIns="91440" tIns="45720" rIns="91440" bIns="45720" rtlCol="0"/>
+          <a:lstStyle/>
+          <a:p>
+            <a:pPr lvl="0"/>
+            <a:r>
+              <a:rPr lang="en-US" smtClean="0"/>
+              <a:t>Click to edit Master text styles</a:t>
+            </a:r>
+          </a:p>
+          <a:p>
+            <a:pPr lvl="1"/>
+            <a:r>
+              <a:rPr lang="en-US" smtClean="0"/>
+              <a:t>Second level</a:t>
+            </a:r>
+          </a:p>
+          <a:p>
+            <a:pPr lvl="2"/>
+            <a:r>
+              <a:rPr lang="en-US" smtClean="0"/>
+              <a:t>Third level</a:t>
+            </a:r>
+          </a:p>
+          <a:p>
+            <a:pPr lvl="3"/>
+            <a:r>
+              <a:rPr lang="en-US" smtClean="0"/>
+              <a:t>Fourth level</a:t>
+            </a:r>
+          </a:p>
+          <a:p>
+            <a:pPr lvl="4"/>
+            <a:r>
+              <a:rPr lang="en-US" smtClean="0"/>
+              <a:t>Fifth level</a:t>
+            </a:r>
+            <a:endParaRPr lang="en-US"/>
+          </a:p>
+        </p:txBody>
+      </p:sp>
+      <p:sp>
+        <p:nvSpPr>
+          <p:cNvPr id="6" name="Footer Placeholder 5"/>
+          <p:cNvSpPr>
+            <a:spLocks noGrp="1"/>
+          </p:cNvSpPr>
+          <p:nvPr>
+            <p:ph type="ftr" sz="quarter" idx="4"/>
+          </p:nvPr>
+        </p:nvSpPr>
+        <p:spPr>
+          <a:xfrm>
+            <a:off x="0" y="8685213"/>
+            <a:ext cx="2971800" cy="457200"/>
+          </a:xfrm>
+          <a:prstGeom prst="rect">
+            <a:avLst/>
+          </a:prstGeom>
+        </p:spPr>
+        <p:txBody>
+          <a:bodyPr vert="horz" lIns="91440" tIns="45720" rIns="91440" bIns="45720" rtlCol="0" anchor="b"/>
+          <a:lstStyle>
+            <a:lvl1pPr algn="l">
+              <a:defRPr sz="1200"/>
+            </a:lvl1pPr>
+          </a:lstStyle>
+          <a:p>
+            <a:endParaRPr lang="en-US"/>
+          </a:p>
+        </p:txBody>
+      </p:sp>
+      <p:sp>
+        <p:nvSpPr>
+          <p:cNvPr id="7" name="Slide Number Placeholder 6"/>
+          <p:cNvSpPr>
+            <a:spLocks noGrp="1"/>
+          </p:cNvSpPr>
+          <p:nvPr>
+            <p:ph type="sldNum" sz="quarter" idx="5"/>
+          </p:nvPr>
+        </p:nvSpPr>
+        <p:spPr>
+          <a:xfrm>
+            <a:off x="3884613" y="8685213"/>
+            <a:ext cx="2971800" cy="457200"/>
+          </a:xfrm>
+          <a:prstGeom prst="rect">
+            <a:avLst/>
+          </a:prstGeom>
+        </p:spPr>
+        <p:txBody>
+          <a:bodyPr vert="horz" lIns="91440" tIns="45720" rIns="91440" bIns="45720" rtlCol="0" anchor="b"/>
+          <a:lstStyle>
+            <a:lvl1pPr algn="r">
+              <a:defRPr sz="1200"/>
+            </a:lvl1pPr>
+          </a:lstStyle>
+          <a:p>
+            <a:fld id="{BB5E49A5-4136-284D-997B-48E1D791AD67}" type="slidenum">
+              <a:rPr lang="en-US" smtClean="0"/>
+              <a:t>‹#›</a:t>
+            </a:fld>
+            <a:endParaRPr lang="en-US"/>
+          </a:p>
+        </p:txBody>
+      </p:sp>
     </p:spTree>
     <p:extLst>
       <p:ext uri="{BB962C8B-B14F-4D97-AF65-F5344CB8AC3E}">
-        <p14:creationId xmlns:p14="http://schemas.microsoft.com/office/powerpoint/2010/main" val="3660924993"/>
+        <p14:creationId xmlns:p14="http://schemas.microsoft.com/office/powerpoint/2010/main" val="2623252185"/>
       </p:ext>
     </p:extLst>
   </p:cSld>
   <p:clrMap bg1="lt1" tx1="dk1" bg2="lt2" tx2="dk2" accent1="accent1" accent2="accent2" accent3="accent3" accent4="accent4" accent5="accent5" accent6="accent6" hlink="hlink" folHlink="folHlink"/>
   <p:notesStyle>
-    <a:lvl1pPr marL="0" algn="l" defTabSz="914400" rtl="0" eaLnBrk="1" latinLnBrk="0" hangingPunct="1">
+    <a:lvl1pPr marL="0" algn="l" defTabSz="457200" rtl="0" eaLnBrk="1" latinLnBrk="0" hangingPunct="1">
       <a:defRPr sz="1200" kern="1200">
         <a:solidFill>
           <a:schemeClr val="tx1"/>
@@ -174,7 +379,7 @@
         <a:cs typeface="+mn-cs"/>
       </a:defRPr>
     </a:lvl1pPr>
-    <a:lvl2pPr marL="457200" algn="l" defTabSz="914400" rtl="0" eaLnBrk="1" latinLnBrk="0" hangingPunct="1">
+    <a:lvl2pPr marL="457200" algn="l" defTabSz="457200" rtl="0" eaLnBrk="1" latinLnBrk="0" hangingPunct="1">
       <a:defRPr sz="1200" kern="1200">
         <a:solidFill>
           <a:schemeClr val="tx1"/>
@@ -184,7 +389,7 @@
         <a:cs typeface="+mn-cs"/>
       </a:defRPr>
     </a:lvl2pPr>
-    <a:lvl3pPr marL="914400" algn="l" defTabSz="914400" rtl="0" eaLnBrk="1" latinLnBrk="0" hangingPunct="1">
+    <a:lvl3pPr marL="914400" algn="l" defTabSz="457200" rtl="0" eaLnBrk="1" latinLnBrk="0" hangingPunct="1">
       <a:defRPr sz="1200" kern="1200">
         <a:solidFill>
           <a:schemeClr val="tx1"/>
@@ -194,7 +399,7 @@
         <a:cs typeface="+mn-cs"/>
       </a:defRPr>
     </a:lvl3pPr>
-    <a:lvl4pPr marL="1371600" algn="l" defTabSz="914400" rtl="0" eaLnBrk="1" latinLnBrk="0" hangingPunct="1">
+    <a:lvl4pPr marL="1371600" algn="l" defTabSz="457200" rtl="0" eaLnBrk="1" latinLnBrk="0" hangingPunct="1">
       <a:defRPr sz="1200" kern="1200">
         <a:solidFill>
           <a:schemeClr val="tx1"/>
@@ -204,7 +409,7 @@
         <a:cs typeface="+mn-cs"/>
       </a:defRPr>
     </a:lvl4pPr>
-    <a:lvl5pPr marL="1828800" algn="l" defTabSz="914400" rtl="0" eaLnBrk="1" latinLnBrk="0" hangingPunct="1">
+    <a:lvl5pPr marL="1828800" algn="l" defTabSz="457200" rtl="0" eaLnBrk="1" latinLnBrk="0" hangingPunct="1">
       <a:defRPr sz="1200" kern="1200">
         <a:solidFill>
           <a:schemeClr val="tx1"/>
@@ -214,7 +419,7 @@
         <a:cs typeface="+mn-cs"/>
       </a:defRPr>
     </a:lvl5pPr>
-    <a:lvl6pPr marL="2286000" algn="l" defTabSz="914400" rtl="0" eaLnBrk="1" latinLnBrk="0" hangingPunct="1">
+    <a:lvl6pPr marL="2286000" algn="l" defTabSz="457200" rtl="0" eaLnBrk="1" latinLnBrk="0" hangingPunct="1">
       <a:defRPr sz="1200" kern="1200">
         <a:solidFill>
           <a:schemeClr val="tx1"/>
@@ -224,7 +429,7 @@
         <a:cs typeface="+mn-cs"/>
       </a:defRPr>
     </a:lvl6pPr>
-    <a:lvl7pPr marL="2743200" algn="l" defTabSz="914400" rtl="0" eaLnBrk="1" latinLnBrk="0" hangingPunct="1">
+    <a:lvl7pPr marL="2743200" algn="l" defTabSz="457200" rtl="0" eaLnBrk="1" latinLnBrk="0" hangingPunct="1">
       <a:defRPr sz="1200" kern="1200">
         <a:solidFill>
           <a:schemeClr val="tx1"/>
@@ -234,7 +439,7 @@
         <a:cs typeface="+mn-cs"/>
       </a:defRPr>
     </a:lvl7pPr>
-    <a:lvl8pPr marL="3200400" algn="l" defTabSz="914400" rtl="0" eaLnBrk="1" latinLnBrk="0" hangingPunct="1">
+    <a:lvl8pPr marL="3200400" algn="l" defTabSz="457200" rtl="0" eaLnBrk="1" latinLnBrk="0" hangingPunct="1">
       <a:defRPr sz="1200" kern="1200">
         <a:solidFill>
           <a:schemeClr val="tx1"/>
@@ -244,7 +449,7 @@
         <a:cs typeface="+mn-cs"/>
       </a:defRPr>
     </a:lvl8pPr>
-    <a:lvl9pPr marL="3657600" algn="l" defTabSz="914400" rtl="0" eaLnBrk="1" latinLnBrk="0" hangingPunct="1">
+    <a:lvl9pPr marL="3657600" algn="l" defTabSz="457200" rtl="0" eaLnBrk="1" latinLnBrk="0" hangingPunct="1">
       <a:defRPr sz="1200" kern="1200">
         <a:solidFill>
           <a:schemeClr val="tx1"/>
@@ -259,7 +464,7 @@
 </file>
 
 <file path=ppt/notesSlides/notesSlide1.xml><?xml version="1.0" encoding="utf-8"?>
-<p:notes xmlns:a="http://schemas.openxmlformats.org/drawingml/2006/main" xmlns:r="http://schemas.openxmlformats.org/officeDocument/2006/relationships" xmlns:p="http://schemas.openxmlformats.org/presentationml/2006/main">
+<p:notes xmlns:a="http://schemas.openxmlformats.org/drawingml/2006/main" xmlns:p="http://schemas.openxmlformats.org/presentationml/2006/main" xmlns:r="http://schemas.openxmlformats.org/officeDocument/2006/relationships">
   <p:cSld>
     <p:spTree>
       <p:nvGrpSpPr>
@@ -279,7 +484,7 @@
         <p:nvSpPr>
           <p:cNvPr id="2" name="Slide Image Placeholder 1"/>
           <p:cNvSpPr>
-            <a:spLocks noGrp="1" noRot="1" noChangeAspect="1"/>
+            <a:spLocks noGrp="1"/>
           </p:cNvSpPr>
           <p:nvPr>
             <p:ph type="sldImg" idx="2"/>
@@ -294,7 +499,7 @@
             <a:spLocks noGrp="1"/>
           </p:cNvSpPr>
           <p:nvPr>
-            <p:ph type="body" sz="quarter" idx="3"/>
+            <p:ph type="body" idx="3" sz="quarter"/>
           </p:nvPr>
         </p:nvSpPr>
         <p:spPr/>
@@ -303,38 +508,12 @@
           <a:lstStyle/>
           <a:p>
             <a:r>
-              <a:rPr dirty="0"/>
               <a:t>SPEAKER SCRIPT:</a:t>
             </a:r>
           </a:p>
           <a:p>
             <a:r>
-              <a:rPr dirty="0"/>
-              <a:t>Good morning/afternoon, everyone. Today I am presenting our end-to-end Machine Learning Engineering pipeline built to predict NYC taxi trip durations and ride ETAs. The core objective of this project goes far beyond simply training a model; it is about engineering a production-grade system that manages the complete ML lifecycle. As you can see on the architecture diagram, our system ingests raw trip logs, enforces strict data quality contracts via </a:t>
-            </a:r>
-            <a:r>
-              <a:rPr dirty="0" err="1"/>
-              <a:t>pandera</a:t>
-            </a:r>
-            <a:r>
-              <a:rPr dirty="0"/>
-              <a:t>, tracks data and pipeline dependencies using Data Version Control (DVC), evaluates baseline and ensemble models with </a:t>
-            </a:r>
-            <a:r>
-              <a:rPr dirty="0" err="1"/>
-              <a:t>MLflow</a:t>
-            </a:r>
-            <a:r>
-              <a:rPr dirty="0"/>
-              <a:t> experiment tracking, packages the best model inside a Docker container serving a </a:t>
-            </a:r>
-            <a:r>
-              <a:rPr dirty="0" err="1"/>
-              <a:t>FastAPI</a:t>
-            </a:r>
-            <a:r>
-              <a:rPr dirty="0"/>
-              <a:t> REST endpoint with interactive Swagger documentation, runs end-to-end browser tests using Playwright, and continuously monitors production data for distribution drift.</a:t>
+              <a:t>Good morning/afternoon, everyone. Today I am presenting our end-to-end Machine Learning Engineering pipeline built to predict NYC taxi trip durations and ride ETAs. The core objective of this project goes far beyond simply training a model; it is about engineering a production-grade system that manages the complete ML lifecycle. As you can see on the architecture diagram, our system ingests raw trip logs, enforces strict data quality contracts via pandera, tracks data and pipeline dependencies using Data Version Control (DVC), evaluates baseline and ensemble models with MLflow experiment tracking, packages the best model inside a Docker container serving a FastAPI REST endpoint with interactive Swagger documentation, runs end-to-end browser tests using Playwright, and continuously monitors production data for distribution drift.</a:t>
             </a:r>
           </a:p>
         </p:txBody>
@@ -346,17 +525,12 @@
             <a:spLocks noGrp="1"/>
           </p:cNvSpPr>
           <p:nvPr>
-            <p:ph type="sldNum" sz="quarter" idx="5"/>
+            <p:ph type="sldNum" idx="5" sz="quarter"/>
           </p:nvPr>
         </p:nvSpPr>
         <p:spPr/>
       </p:sp>
     </p:spTree>
-    <p:extLst>
-      <p:ext uri="{BB962C8B-B14F-4D97-AF65-F5344CB8AC3E}">
-        <p14:creationId xmlns:p14="http://schemas.microsoft.com/office/powerpoint/2010/main" val="1796221891"/>
-      </p:ext>
-    </p:extLst>
   </p:cSld>
   <p:clrMapOvr>
     <a:masterClrMapping/>
@@ -365,7 +539,7 @@
 </file>
 
 <file path=ppt/notesSlides/notesSlide2.xml><?xml version="1.0" encoding="utf-8"?>
-<p:notes xmlns:a="http://schemas.openxmlformats.org/drawingml/2006/main" xmlns:r="http://schemas.openxmlformats.org/officeDocument/2006/relationships" xmlns:p="http://schemas.openxmlformats.org/presentationml/2006/main">
+<p:notes xmlns:a="http://schemas.openxmlformats.org/drawingml/2006/main" xmlns:p="http://schemas.openxmlformats.org/presentationml/2006/main" xmlns:r="http://schemas.openxmlformats.org/officeDocument/2006/relationships">
   <p:cSld>
     <p:spTree>
       <p:nvGrpSpPr>
@@ -385,7 +559,7 @@
         <p:nvSpPr>
           <p:cNvPr id="2" name="Slide Image Placeholder 1"/>
           <p:cNvSpPr>
-            <a:spLocks noGrp="1" noRot="1" noChangeAspect="1"/>
+            <a:spLocks noGrp="1"/>
           </p:cNvSpPr>
           <p:nvPr>
             <p:ph type="sldImg" idx="2"/>
@@ -400,7 +574,7 @@
             <a:spLocks noGrp="1"/>
           </p:cNvSpPr>
           <p:nvPr>
-            <p:ph type="body" sz="quarter" idx="3"/>
+            <p:ph type="body" idx="3" sz="quarter"/>
           </p:nvPr>
         </p:nvSpPr>
         <p:spPr/>
@@ -409,30 +583,12 @@
           <a:lstStyle/>
           <a:p>
             <a:r>
-              <a:rPr dirty="0"/>
               <a:t>SPEAKER SCRIPT:</a:t>
             </a:r>
           </a:p>
           <a:p>
             <a:r>
-              <a:rPr dirty="0"/>
-              <a:t>High-performing models require clean, reliable data. We begin our pipeline with strict data contract validation using </a:t>
-            </a:r>
-            <a:r>
-              <a:rPr dirty="0" err="1"/>
-              <a:t>pandera</a:t>
-            </a:r>
-            <a:r>
-              <a:rPr dirty="0"/>
-              <a:t>. Before any data reaches model training, it must pass schema rules: GPS coordinates must fall within valid geographic boundaries, categorical flags must match expected values, and numerical fields like passenger count and trip duration cannot be negative. If invalid data is ingested, </a:t>
-            </a:r>
-            <a:r>
-              <a:rPr dirty="0" err="1"/>
-              <a:t>pandera</a:t>
-            </a:r>
-            <a:r>
-              <a:rPr dirty="0"/>
-              <a:t> raises a schema error immediately to protect downstream pipelines. During Exploratory Data Analysis, we parsed timestamps and analyzed spatial distributions. Our analysis revealed clear hourly and weekly patterns—with demand spiking during weekday morning and evening rush hours. Mapping the pickup coordinates also confirmed concentrated trip boundaries, allowing us to safely isolate valid NYC trips and filter out spatial anomalies.</a:t>
+              <a:t>High-performing models require clean, reliable data. We begin our pipeline with strict data contract validation using pandera. Before any data reaches model training, it must pass schema rules: GPS coordinates must fall within valid geographic boundaries, categorical flags must match expected values, and numerical fields like passenger count and trip duration cannot be negative. If invalid data is ingested, pandera raises a schema error immediately to protect downstream pipelines. During Exploratory Data Analysis, we parsed timestamps and analyzed spatial distributions. Our analysis revealed clear hourly and weekly patterns—with demand spiking during weekday morning and evening rush hours. Mapping the pickup coordinates also confirmed concentrated trip boundaries, allowing us to safely isolate valid NYC trips and filter out spatial anomalies.</a:t>
             </a:r>
           </a:p>
         </p:txBody>
@@ -444,17 +600,12 @@
             <a:spLocks noGrp="1"/>
           </p:cNvSpPr>
           <p:nvPr>
-            <p:ph type="sldNum" sz="quarter" idx="5"/>
+            <p:ph type="sldNum" idx="5" sz="quarter"/>
           </p:nvPr>
         </p:nvSpPr>
         <p:spPr/>
       </p:sp>
     </p:spTree>
-    <p:extLst>
-      <p:ext uri="{BB962C8B-B14F-4D97-AF65-F5344CB8AC3E}">
-        <p14:creationId xmlns:p14="http://schemas.microsoft.com/office/powerpoint/2010/main" val="2907195211"/>
-      </p:ext>
-    </p:extLst>
   </p:cSld>
   <p:clrMapOvr>
     <a:masterClrMapping/>
@@ -463,7 +614,7 @@
 </file>
 
 <file path=ppt/notesSlides/notesSlide3.xml><?xml version="1.0" encoding="utf-8"?>
-<p:notes xmlns:a="http://schemas.openxmlformats.org/drawingml/2006/main" xmlns:r="http://schemas.openxmlformats.org/officeDocument/2006/relationships" xmlns:p="http://schemas.openxmlformats.org/presentationml/2006/main">
+<p:notes xmlns:a="http://schemas.openxmlformats.org/drawingml/2006/main" xmlns:p="http://schemas.openxmlformats.org/presentationml/2006/main" xmlns:r="http://schemas.openxmlformats.org/officeDocument/2006/relationships">
   <p:cSld>
     <p:spTree>
       <p:nvGrpSpPr>
@@ -483,7 +634,7 @@
         <p:nvSpPr>
           <p:cNvPr id="2" name="Slide Image Placeholder 1"/>
           <p:cNvSpPr>
-            <a:spLocks noGrp="1" noRot="1" noChangeAspect="1"/>
+            <a:spLocks noGrp="1"/>
           </p:cNvSpPr>
           <p:nvPr>
             <p:ph type="sldImg" idx="2"/>
@@ -498,7 +649,7 @@
             <a:spLocks noGrp="1"/>
           </p:cNvSpPr>
           <p:nvPr>
-            <p:ph type="body" sz="quarter" idx="3"/>
+            <p:ph type="body" idx="3" sz="quarter"/>
           </p:nvPr>
         </p:nvSpPr>
         <p:spPr/>
@@ -524,17 +675,12 @@
             <a:spLocks noGrp="1"/>
           </p:cNvSpPr>
           <p:nvPr>
-            <p:ph type="sldNum" sz="quarter" idx="5"/>
+            <p:ph type="sldNum" idx="5" sz="quarter"/>
           </p:nvPr>
         </p:nvSpPr>
         <p:spPr/>
       </p:sp>
     </p:spTree>
-    <p:extLst>
-      <p:ext uri="{BB962C8B-B14F-4D97-AF65-F5344CB8AC3E}">
-        <p14:creationId xmlns:p14="http://schemas.microsoft.com/office/powerpoint/2010/main" val="644661809"/>
-      </p:ext>
-    </p:extLst>
   </p:cSld>
   <p:clrMapOvr>
     <a:masterClrMapping/>
@@ -543,7 +689,7 @@
 </file>
 
 <file path=ppt/notesSlides/notesSlide4.xml><?xml version="1.0" encoding="utf-8"?>
-<p:notes xmlns:a="http://schemas.openxmlformats.org/drawingml/2006/main" xmlns:r="http://schemas.openxmlformats.org/officeDocument/2006/relationships" xmlns:p="http://schemas.openxmlformats.org/presentationml/2006/main">
+<p:notes xmlns:a="http://schemas.openxmlformats.org/drawingml/2006/main" xmlns:p="http://schemas.openxmlformats.org/presentationml/2006/main" xmlns:r="http://schemas.openxmlformats.org/officeDocument/2006/relationships">
   <p:cSld>
     <p:spTree>
       <p:nvGrpSpPr>
@@ -563,7 +709,7 @@
         <p:nvSpPr>
           <p:cNvPr id="2" name="Slide Image Placeholder 1"/>
           <p:cNvSpPr>
-            <a:spLocks noGrp="1" noRot="1" noChangeAspect="1"/>
+            <a:spLocks noGrp="1"/>
           </p:cNvSpPr>
           <p:nvPr>
             <p:ph type="sldImg" idx="2"/>
@@ -578,7 +724,7 @@
             <a:spLocks noGrp="1"/>
           </p:cNvSpPr>
           <p:nvPr>
-            <p:ph type="body" sz="quarter" idx="3"/>
+            <p:ph type="body" idx="3" sz="quarter"/>
           </p:nvPr>
         </p:nvSpPr>
         <p:spPr/>
@@ -604,17 +750,12 @@
             <a:spLocks noGrp="1"/>
           </p:cNvSpPr>
           <p:nvPr>
-            <p:ph type="sldNum" sz="quarter" idx="5"/>
+            <p:ph type="sldNum" idx="5" sz="quarter"/>
           </p:nvPr>
         </p:nvSpPr>
         <p:spPr/>
       </p:sp>
     </p:spTree>
-    <p:extLst>
-      <p:ext uri="{BB962C8B-B14F-4D97-AF65-F5344CB8AC3E}">
-        <p14:creationId xmlns:p14="http://schemas.microsoft.com/office/powerpoint/2010/main" val="1037881504"/>
-      </p:ext>
-    </p:extLst>
   </p:cSld>
   <p:clrMapOvr>
     <a:masterClrMapping/>
@@ -623,7 +764,7 @@
 </file>
 
 <file path=ppt/notesSlides/notesSlide5.xml><?xml version="1.0" encoding="utf-8"?>
-<p:notes xmlns:a="http://schemas.openxmlformats.org/drawingml/2006/main" xmlns:r="http://schemas.openxmlformats.org/officeDocument/2006/relationships" xmlns:p="http://schemas.openxmlformats.org/presentationml/2006/main">
+<p:notes xmlns:a="http://schemas.openxmlformats.org/drawingml/2006/main" xmlns:p="http://schemas.openxmlformats.org/presentationml/2006/main" xmlns:r="http://schemas.openxmlformats.org/officeDocument/2006/relationships">
   <p:cSld>
     <p:spTree>
       <p:nvGrpSpPr>
@@ -643,7 +784,7 @@
         <p:nvSpPr>
           <p:cNvPr id="2" name="Slide Image Placeholder 1"/>
           <p:cNvSpPr>
-            <a:spLocks noGrp="1" noRot="1" noChangeAspect="1"/>
+            <a:spLocks noGrp="1"/>
           </p:cNvSpPr>
           <p:nvPr>
             <p:ph type="sldImg" idx="2"/>
@@ -658,7 +799,7 @@
             <a:spLocks noGrp="1"/>
           </p:cNvSpPr>
           <p:nvPr>
-            <p:ph type="body" sz="quarter" idx="3"/>
+            <p:ph type="body" idx="3" sz="quarter"/>
           </p:nvPr>
         </p:nvSpPr>
         <p:spPr/>
@@ -684,17 +825,12 @@
             <a:spLocks noGrp="1"/>
           </p:cNvSpPr>
           <p:nvPr>
-            <p:ph type="sldNum" sz="quarter" idx="5"/>
+            <p:ph type="sldNum" idx="5" sz="quarter"/>
           </p:nvPr>
         </p:nvSpPr>
         <p:spPr/>
       </p:sp>
     </p:spTree>
-    <p:extLst>
-      <p:ext uri="{BB962C8B-B14F-4D97-AF65-F5344CB8AC3E}">
-        <p14:creationId xmlns:p14="http://schemas.microsoft.com/office/powerpoint/2010/main" val="326676294"/>
-      </p:ext>
-    </p:extLst>
   </p:cSld>
   <p:clrMapOvr>
     <a:masterClrMapping/>
@@ -703,7 +839,7 @@
 </file>
 
 <file path=ppt/notesSlides/notesSlide6.xml><?xml version="1.0" encoding="utf-8"?>
-<p:notes xmlns:a="http://schemas.openxmlformats.org/drawingml/2006/main" xmlns:r="http://schemas.openxmlformats.org/officeDocument/2006/relationships" xmlns:p="http://schemas.openxmlformats.org/presentationml/2006/main">
+<p:notes xmlns:a="http://schemas.openxmlformats.org/drawingml/2006/main" xmlns:p="http://schemas.openxmlformats.org/presentationml/2006/main" xmlns:r="http://schemas.openxmlformats.org/officeDocument/2006/relationships">
   <p:cSld>
     <p:spTree>
       <p:nvGrpSpPr>
@@ -723,7 +859,7 @@
         <p:nvSpPr>
           <p:cNvPr id="2" name="Slide Image Placeholder 1"/>
           <p:cNvSpPr>
-            <a:spLocks noGrp="1" noRot="1" noChangeAspect="1"/>
+            <a:spLocks noGrp="1"/>
           </p:cNvSpPr>
           <p:nvPr>
             <p:ph type="sldImg" idx="2"/>
@@ -738,7 +874,7 @@
             <a:spLocks noGrp="1"/>
           </p:cNvSpPr>
           <p:nvPr>
-            <p:ph type="body" sz="quarter" idx="3"/>
+            <p:ph type="body" idx="3" sz="quarter"/>
           </p:nvPr>
         </p:nvSpPr>
         <p:spPr/>
@@ -764,17 +900,12 @@
             <a:spLocks noGrp="1"/>
           </p:cNvSpPr>
           <p:nvPr>
-            <p:ph type="sldNum" sz="quarter" idx="5"/>
+            <p:ph type="sldNum" idx="5" sz="quarter"/>
           </p:nvPr>
         </p:nvSpPr>
         <p:spPr/>
       </p:sp>
     </p:spTree>
-    <p:extLst>
-      <p:ext uri="{BB962C8B-B14F-4D97-AF65-F5344CB8AC3E}">
-        <p14:creationId xmlns:p14="http://schemas.microsoft.com/office/powerpoint/2010/main" val="1719891277"/>
-      </p:ext>
-    </p:extLst>
   </p:cSld>
   <p:clrMapOvr>
     <a:masterClrMapping/>
@@ -783,7 +914,7 @@
 </file>
 
 <file path=ppt/notesSlides/notesSlide7.xml><?xml version="1.0" encoding="utf-8"?>
-<p:notes xmlns:a="http://schemas.openxmlformats.org/drawingml/2006/main" xmlns:r="http://schemas.openxmlformats.org/officeDocument/2006/relationships" xmlns:p="http://schemas.openxmlformats.org/presentationml/2006/main">
+<p:notes xmlns:a="http://schemas.openxmlformats.org/drawingml/2006/main" xmlns:p="http://schemas.openxmlformats.org/presentationml/2006/main" xmlns:r="http://schemas.openxmlformats.org/officeDocument/2006/relationships">
   <p:cSld>
     <p:spTree>
       <p:nvGrpSpPr>
@@ -803,7 +934,7 @@
         <p:nvSpPr>
           <p:cNvPr id="2" name="Slide Image Placeholder 1"/>
           <p:cNvSpPr>
-            <a:spLocks noGrp="1" noRot="1" noChangeAspect="1"/>
+            <a:spLocks noGrp="1"/>
           </p:cNvSpPr>
           <p:nvPr>
             <p:ph type="sldImg" idx="2"/>
@@ -818,7 +949,7 @@
             <a:spLocks noGrp="1"/>
           </p:cNvSpPr>
           <p:nvPr>
-            <p:ph type="body" sz="quarter" idx="3"/>
+            <p:ph type="body" idx="3" sz="quarter"/>
           </p:nvPr>
         </p:nvSpPr>
         <p:spPr/>
@@ -844,17 +975,12 @@
             <a:spLocks noGrp="1"/>
           </p:cNvSpPr>
           <p:nvPr>
-            <p:ph type="sldNum" sz="quarter" idx="5"/>
+            <p:ph type="sldNum" idx="5" sz="quarter"/>
           </p:nvPr>
         </p:nvSpPr>
         <p:spPr/>
       </p:sp>
     </p:spTree>
-    <p:extLst>
-      <p:ext uri="{BB962C8B-B14F-4D97-AF65-F5344CB8AC3E}">
-        <p14:creationId xmlns:p14="http://schemas.microsoft.com/office/powerpoint/2010/main" val="1956224312"/>
-      </p:ext>
-    </p:extLst>
   </p:cSld>
   <p:clrMapOvr>
     <a:masterClrMapping/>
@@ -863,7 +989,7 @@
 </file>
 
 <file path=ppt/slideLayouts/slideLayout1.xml><?xml version="1.0" encoding="utf-8"?>
-<p:sldLayout xmlns:a="http://schemas.openxmlformats.org/drawingml/2006/main" xmlns:r="http://schemas.openxmlformats.org/officeDocument/2006/relationships" xmlns:p="http://schemas.openxmlformats.org/presentationml/2006/main" showMasterSp="0" type="title" preserve="1">
+<p:sldLayout xmlns:a="http://schemas.openxmlformats.org/drawingml/2006/main" xmlns:r="http://schemas.openxmlformats.org/officeDocument/2006/relationships" xmlns:p="http://schemas.openxmlformats.org/presentationml/2006/main" type="title" preserve="1">
   <p:cSld name="Title Slide">
     <p:spTree>
       <p:nvGrpSpPr>
@@ -879,536 +1005,6 @@
           <a:chExt cx="0" cy="0"/>
         </a:xfrm>
       </p:grpSpPr>
-      <p:grpSp>
-        <p:nvGrpSpPr>
-          <p:cNvPr id="7" name="Group 6"/>
-          <p:cNvGrpSpPr/>
-          <p:nvPr/>
-        </p:nvGrpSpPr>
-        <p:grpSpPr>
-          <a:xfrm>
-            <a:off x="0" y="-8467"/>
-            <a:ext cx="12192000" cy="6866467"/>
-            <a:chOff x="0" y="-8467"/>
-            <a:chExt cx="12192000" cy="6866467"/>
-          </a:xfrm>
-        </p:grpSpPr>
-        <p:cxnSp>
-          <p:nvCxnSpPr>
-            <p:cNvPr id="32" name="Straight Connector 31"/>
-            <p:cNvCxnSpPr/>
-            <p:nvPr/>
-          </p:nvCxnSpPr>
-          <p:spPr>
-            <a:xfrm>
-              <a:off x="9371012" y="0"/>
-              <a:ext cx="1219200" cy="6858000"/>
-            </a:xfrm>
-            <a:prstGeom prst="line">
-              <a:avLst/>
-            </a:prstGeom>
-            <a:ln w="9525">
-              <a:solidFill>
-                <a:schemeClr val="bg1">
-                  <a:lumMod val="75000"/>
-                </a:schemeClr>
-              </a:solidFill>
-            </a:ln>
-          </p:spPr>
-          <p:style>
-            <a:lnRef idx="2">
-              <a:schemeClr val="accent1"/>
-            </a:lnRef>
-            <a:fillRef idx="0">
-              <a:schemeClr val="accent1"/>
-            </a:fillRef>
-            <a:effectRef idx="1">
-              <a:schemeClr val="accent1"/>
-            </a:effectRef>
-            <a:fontRef idx="minor">
-              <a:schemeClr val="tx1"/>
-            </a:fontRef>
-          </p:style>
-        </p:cxnSp>
-        <p:cxnSp>
-          <p:nvCxnSpPr>
-            <p:cNvPr id="21" name="Straight Connector 20"/>
-            <p:cNvCxnSpPr/>
-            <p:nvPr/>
-          </p:nvCxnSpPr>
-          <p:spPr>
-            <a:xfrm flipH="1">
-              <a:off x="7425267" y="3681413"/>
-              <a:ext cx="4763558" cy="3176587"/>
-            </a:xfrm>
-            <a:prstGeom prst="line">
-              <a:avLst/>
-            </a:prstGeom>
-            <a:ln w="9525">
-              <a:solidFill>
-                <a:schemeClr val="bg1">
-                  <a:lumMod val="85000"/>
-                </a:schemeClr>
-              </a:solidFill>
-            </a:ln>
-          </p:spPr>
-          <p:style>
-            <a:lnRef idx="2">
-              <a:schemeClr val="accent1"/>
-            </a:lnRef>
-            <a:fillRef idx="0">
-              <a:schemeClr val="accent1"/>
-            </a:fillRef>
-            <a:effectRef idx="1">
-              <a:schemeClr val="accent1"/>
-            </a:effectRef>
-            <a:fontRef idx="minor">
-              <a:schemeClr val="tx1"/>
-            </a:fontRef>
-          </p:style>
-        </p:cxnSp>
-        <p:sp>
-          <p:nvSpPr>
-            <p:cNvPr id="24" name="Rectangle 23"/>
-            <p:cNvSpPr/>
-            <p:nvPr/>
-          </p:nvSpPr>
-          <p:spPr>
-            <a:xfrm>
-              <a:off x="9181476" y="-8467"/>
-              <a:ext cx="3007349" cy="6866467"/>
-            </a:xfrm>
-            <a:custGeom>
-              <a:avLst/>
-              <a:gdLst/>
-              <a:ahLst/>
-              <a:cxnLst/>
-              <a:rect l="l" t="t" r="r" b="b"/>
-              <a:pathLst>
-                <a:path w="3007349" h="6866467">
-                  <a:moveTo>
-                    <a:pt x="2045532" y="0"/>
-                  </a:moveTo>
-                  <a:lnTo>
-                    <a:pt x="3007349" y="0"/>
-                  </a:lnTo>
-                  <a:lnTo>
-                    <a:pt x="3007349" y="6866467"/>
-                  </a:lnTo>
-                  <a:lnTo>
-                    <a:pt x="0" y="6866467"/>
-                  </a:lnTo>
-                  <a:lnTo>
-                    <a:pt x="2045532" y="0"/>
-                  </a:lnTo>
-                  <a:close/>
-                </a:path>
-              </a:pathLst>
-            </a:custGeom>
-            <a:solidFill>
-              <a:schemeClr val="accent1">
-                <a:alpha val="30000"/>
-              </a:schemeClr>
-            </a:solidFill>
-            <a:ln>
-              <a:noFill/>
-            </a:ln>
-            <a:effectLst/>
-          </p:spPr>
-          <p:style>
-            <a:lnRef idx="1">
-              <a:schemeClr val="accent1"/>
-            </a:lnRef>
-            <a:fillRef idx="3">
-              <a:schemeClr val="accent1"/>
-            </a:fillRef>
-            <a:effectRef idx="2">
-              <a:schemeClr val="accent1"/>
-            </a:effectRef>
-            <a:fontRef idx="minor">
-              <a:schemeClr val="lt1"/>
-            </a:fontRef>
-          </p:style>
-        </p:sp>
-        <p:sp>
-          <p:nvSpPr>
-            <p:cNvPr id="26" name="Rectangle 25"/>
-            <p:cNvSpPr/>
-            <p:nvPr/>
-          </p:nvSpPr>
-          <p:spPr>
-            <a:xfrm>
-              <a:off x="9603442" y="-8467"/>
-              <a:ext cx="2588558" cy="6866467"/>
-            </a:xfrm>
-            <a:custGeom>
-              <a:avLst/>
-              <a:gdLst/>
-              <a:ahLst/>
-              <a:cxnLst/>
-              <a:rect l="l" t="t" r="r" b="b"/>
-              <a:pathLst>
-                <a:path w="2573311" h="6866467">
-                  <a:moveTo>
-                    <a:pt x="0" y="0"/>
-                  </a:moveTo>
-                  <a:lnTo>
-                    <a:pt x="2573311" y="0"/>
-                  </a:lnTo>
-                  <a:lnTo>
-                    <a:pt x="2573311" y="6866467"/>
-                  </a:lnTo>
-                  <a:lnTo>
-                    <a:pt x="1202336" y="6866467"/>
-                  </a:lnTo>
-                  <a:lnTo>
-                    <a:pt x="0" y="0"/>
-                  </a:lnTo>
-                  <a:close/>
-                </a:path>
-              </a:pathLst>
-            </a:custGeom>
-            <a:solidFill>
-              <a:schemeClr val="accent1">
-                <a:alpha val="20000"/>
-              </a:schemeClr>
-            </a:solidFill>
-            <a:ln>
-              <a:noFill/>
-            </a:ln>
-            <a:effectLst/>
-          </p:spPr>
-          <p:style>
-            <a:lnRef idx="1">
-              <a:schemeClr val="accent1"/>
-            </a:lnRef>
-            <a:fillRef idx="3">
-              <a:schemeClr val="accent1"/>
-            </a:fillRef>
-            <a:effectRef idx="2">
-              <a:schemeClr val="accent1"/>
-            </a:effectRef>
-            <a:fontRef idx="minor">
-              <a:schemeClr val="lt1"/>
-            </a:fontRef>
-          </p:style>
-        </p:sp>
-        <p:sp>
-          <p:nvSpPr>
-            <p:cNvPr id="27" name="Isosceles Triangle 26"/>
-            <p:cNvSpPr/>
-            <p:nvPr/>
-          </p:nvSpPr>
-          <p:spPr>
-            <a:xfrm>
-              <a:off x="8932333" y="3048000"/>
-              <a:ext cx="3259667" cy="3810000"/>
-            </a:xfrm>
-            <a:prstGeom prst="triangle">
-              <a:avLst>
-                <a:gd name="adj" fmla="val 100000"/>
-              </a:avLst>
-            </a:prstGeom>
-            <a:solidFill>
-              <a:schemeClr val="accent2">
-                <a:alpha val="72000"/>
-              </a:schemeClr>
-            </a:solidFill>
-            <a:ln>
-              <a:noFill/>
-            </a:ln>
-            <a:effectLst/>
-          </p:spPr>
-          <p:style>
-            <a:lnRef idx="1">
-              <a:schemeClr val="accent1"/>
-            </a:lnRef>
-            <a:fillRef idx="3">
-              <a:schemeClr val="accent1"/>
-            </a:fillRef>
-            <a:effectRef idx="2">
-              <a:schemeClr val="accent1"/>
-            </a:effectRef>
-            <a:fontRef idx="minor">
-              <a:schemeClr val="lt1"/>
-            </a:fontRef>
-          </p:style>
-        </p:sp>
-        <p:sp>
-          <p:nvSpPr>
-            <p:cNvPr id="28" name="Rectangle 27"/>
-            <p:cNvSpPr/>
-            <p:nvPr/>
-          </p:nvSpPr>
-          <p:spPr>
-            <a:xfrm>
-              <a:off x="9334500" y="-8467"/>
-              <a:ext cx="2854326" cy="6866467"/>
-            </a:xfrm>
-            <a:custGeom>
-              <a:avLst/>
-              <a:gdLst/>
-              <a:ahLst/>
-              <a:cxnLst/>
-              <a:rect l="l" t="t" r="r" b="b"/>
-              <a:pathLst>
-                <a:path w="2858013" h="6866467">
-                  <a:moveTo>
-                    <a:pt x="0" y="0"/>
-                  </a:moveTo>
-                  <a:lnTo>
-                    <a:pt x="2858013" y="0"/>
-                  </a:lnTo>
-                  <a:lnTo>
-                    <a:pt x="2858013" y="6866467"/>
-                  </a:lnTo>
-                  <a:lnTo>
-                    <a:pt x="2473942" y="6866467"/>
-                  </a:lnTo>
-                  <a:lnTo>
-                    <a:pt x="0" y="0"/>
-                  </a:lnTo>
-                  <a:close/>
-                </a:path>
-              </a:pathLst>
-            </a:custGeom>
-            <a:solidFill>
-              <a:schemeClr val="accent2">
-                <a:lumMod val="75000"/>
-                <a:alpha val="70000"/>
-              </a:schemeClr>
-            </a:solidFill>
-            <a:ln>
-              <a:noFill/>
-            </a:ln>
-            <a:effectLst/>
-          </p:spPr>
-          <p:style>
-            <a:lnRef idx="1">
-              <a:schemeClr val="accent1"/>
-            </a:lnRef>
-            <a:fillRef idx="3">
-              <a:schemeClr val="accent1"/>
-            </a:fillRef>
-            <a:effectRef idx="2">
-              <a:schemeClr val="accent1"/>
-            </a:effectRef>
-            <a:fontRef idx="minor">
-              <a:schemeClr val="lt1"/>
-            </a:fontRef>
-          </p:style>
-        </p:sp>
-        <p:sp>
-          <p:nvSpPr>
-            <p:cNvPr id="29" name="Rectangle 28"/>
-            <p:cNvSpPr/>
-            <p:nvPr/>
-          </p:nvSpPr>
-          <p:spPr>
-            <a:xfrm>
-              <a:off x="10898730" y="-8467"/>
-              <a:ext cx="1290094" cy="6866467"/>
-            </a:xfrm>
-            <a:custGeom>
-              <a:avLst/>
-              <a:gdLst/>
-              <a:ahLst/>
-              <a:cxnLst/>
-              <a:rect l="l" t="t" r="r" b="b"/>
-              <a:pathLst>
-                <a:path w="1290094" h="6858000">
-                  <a:moveTo>
-                    <a:pt x="1019735" y="0"/>
-                  </a:moveTo>
-                  <a:lnTo>
-                    <a:pt x="1290094" y="0"/>
-                  </a:lnTo>
-                  <a:lnTo>
-                    <a:pt x="1290094" y="6858000"/>
-                  </a:lnTo>
-                  <a:lnTo>
-                    <a:pt x="0" y="6858000"/>
-                  </a:lnTo>
-                  <a:lnTo>
-                    <a:pt x="1019735" y="0"/>
-                  </a:lnTo>
-                  <a:close/>
-                </a:path>
-              </a:pathLst>
-            </a:custGeom>
-            <a:solidFill>
-              <a:schemeClr val="accent1">
-                <a:lumMod val="60000"/>
-                <a:lumOff val="40000"/>
-                <a:alpha val="70000"/>
-              </a:schemeClr>
-            </a:solidFill>
-            <a:ln>
-              <a:noFill/>
-            </a:ln>
-            <a:effectLst/>
-          </p:spPr>
-          <p:style>
-            <a:lnRef idx="1">
-              <a:schemeClr val="accent1"/>
-            </a:lnRef>
-            <a:fillRef idx="3">
-              <a:schemeClr val="accent1"/>
-            </a:fillRef>
-            <a:effectRef idx="2">
-              <a:schemeClr val="accent1"/>
-            </a:effectRef>
-            <a:fontRef idx="minor">
-              <a:schemeClr val="lt1"/>
-            </a:fontRef>
-          </p:style>
-        </p:sp>
-        <p:sp>
-          <p:nvSpPr>
-            <p:cNvPr id="30" name="Rectangle 29"/>
-            <p:cNvSpPr/>
-            <p:nvPr/>
-          </p:nvSpPr>
-          <p:spPr>
-            <a:xfrm>
-              <a:off x="10938999" y="-8467"/>
-              <a:ext cx="1249825" cy="6866467"/>
-            </a:xfrm>
-            <a:custGeom>
-              <a:avLst/>
-              <a:gdLst/>
-              <a:ahLst/>
-              <a:cxnLst/>
-              <a:rect l="l" t="t" r="r" b="b"/>
-              <a:pathLst>
-                <a:path w="1249825" h="6858000">
-                  <a:moveTo>
-                    <a:pt x="0" y="0"/>
-                  </a:moveTo>
-                  <a:lnTo>
-                    <a:pt x="1249825" y="0"/>
-                  </a:lnTo>
-                  <a:lnTo>
-                    <a:pt x="1249825" y="6858000"/>
-                  </a:lnTo>
-                  <a:lnTo>
-                    <a:pt x="1109382" y="6858000"/>
-                  </a:lnTo>
-                  <a:lnTo>
-                    <a:pt x="0" y="0"/>
-                  </a:lnTo>
-                  <a:close/>
-                </a:path>
-              </a:pathLst>
-            </a:custGeom>
-            <a:solidFill>
-              <a:schemeClr val="accent1">
-                <a:alpha val="65000"/>
-              </a:schemeClr>
-            </a:solidFill>
-            <a:ln>
-              <a:noFill/>
-            </a:ln>
-            <a:effectLst/>
-          </p:spPr>
-          <p:style>
-            <a:lnRef idx="1">
-              <a:schemeClr val="accent1"/>
-            </a:lnRef>
-            <a:fillRef idx="3">
-              <a:schemeClr val="accent1"/>
-            </a:fillRef>
-            <a:effectRef idx="2">
-              <a:schemeClr val="accent1"/>
-            </a:effectRef>
-            <a:fontRef idx="minor">
-              <a:schemeClr val="lt1"/>
-            </a:fontRef>
-          </p:style>
-        </p:sp>
-        <p:sp>
-          <p:nvSpPr>
-            <p:cNvPr id="31" name="Isosceles Triangle 30"/>
-            <p:cNvSpPr/>
-            <p:nvPr/>
-          </p:nvSpPr>
-          <p:spPr>
-            <a:xfrm>
-              <a:off x="10371666" y="3589867"/>
-              <a:ext cx="1817159" cy="3268133"/>
-            </a:xfrm>
-            <a:prstGeom prst="triangle">
-              <a:avLst>
-                <a:gd name="adj" fmla="val 100000"/>
-              </a:avLst>
-            </a:prstGeom>
-            <a:solidFill>
-              <a:schemeClr val="accent1">
-                <a:alpha val="80000"/>
-              </a:schemeClr>
-            </a:solidFill>
-            <a:ln>
-              <a:noFill/>
-            </a:ln>
-            <a:effectLst/>
-          </p:spPr>
-          <p:style>
-            <a:lnRef idx="1">
-              <a:schemeClr val="accent1"/>
-            </a:lnRef>
-            <a:fillRef idx="3">
-              <a:schemeClr val="accent1"/>
-            </a:fillRef>
-            <a:effectRef idx="2">
-              <a:schemeClr val="accent1"/>
-            </a:effectRef>
-            <a:fontRef idx="minor">
-              <a:schemeClr val="lt1"/>
-            </a:fontRef>
-          </p:style>
-        </p:sp>
-        <p:sp>
-          <p:nvSpPr>
-            <p:cNvPr id="19" name="Isosceles Triangle 18"/>
-            <p:cNvSpPr/>
-            <p:nvPr/>
-          </p:nvSpPr>
-          <p:spPr>
-            <a:xfrm rot="10800000">
-              <a:off x="0" y="0"/>
-              <a:ext cx="842596" cy="5666154"/>
-            </a:xfrm>
-            <a:prstGeom prst="triangle">
-              <a:avLst>
-                <a:gd name="adj" fmla="val 100000"/>
-              </a:avLst>
-            </a:prstGeom>
-            <a:solidFill>
-              <a:schemeClr val="accent1">
-                <a:alpha val="85000"/>
-              </a:schemeClr>
-            </a:solidFill>
-            <a:ln>
-              <a:noFill/>
-            </a:ln>
-            <a:effectLst/>
-          </p:spPr>
-          <p:style>
-            <a:lnRef idx="1">
-              <a:schemeClr val="accent1"/>
-            </a:lnRef>
-            <a:fillRef idx="3">
-              <a:schemeClr val="accent1"/>
-            </a:fillRef>
-            <a:effectRef idx="2">
-              <a:schemeClr val="accent1"/>
-            </a:effectRef>
-            <a:fontRef idx="minor">
-              <a:schemeClr val="lt1"/>
-            </a:fontRef>
-          </p:style>
-        </p:sp>
-      </p:grpSp>
       <p:sp>
         <p:nvSpPr>
           <p:cNvPr id="2" name="Title 1"/>
@@ -1421,29 +1017,19 @@
         </p:nvSpPr>
         <p:spPr>
           <a:xfrm>
-            <a:off x="1507067" y="2404534"/>
-            <a:ext cx="7766936" cy="1646302"/>
+            <a:off x="685800" y="2130425"/>
+            <a:ext cx="7772400" cy="1470025"/>
           </a:xfrm>
         </p:spPr>
         <p:txBody>
-          <a:bodyPr anchor="b">
-            <a:noAutofit/>
-          </a:bodyPr>
-          <a:lstStyle>
-            <a:lvl1pPr algn="r">
-              <a:defRPr sz="5400">
-                <a:solidFill>
-                  <a:schemeClr val="accent1"/>
-                </a:solidFill>
-              </a:defRPr>
-            </a:lvl1pPr>
-          </a:lstStyle>
+          <a:bodyPr/>
+          <a:lstStyle/>
           <a:p>
             <a:r>
               <a:rPr lang="en-US" smtClean="0"/>
               <a:t>Click to edit Master title style</a:t>
             </a:r>
-            <a:endParaRPr lang="en-US" dirty="0"/>
+            <a:endParaRPr lang="en-US"/>
           </a:p>
         </p:txBody>
       </p:sp>
@@ -1459,20 +1045,19 @@
         </p:nvSpPr>
         <p:spPr>
           <a:xfrm>
-            <a:off x="1507067" y="4050833"/>
-            <a:ext cx="7766936" cy="1096899"/>
+            <a:off x="1371600" y="3886200"/>
+            <a:ext cx="6400800" cy="1752600"/>
           </a:xfrm>
         </p:spPr>
         <p:txBody>
-          <a:bodyPr anchor="t"/>
+          <a:bodyPr/>
           <a:lstStyle>
-            <a:lvl1pPr marL="0" indent="0" algn="r">
+            <a:lvl1pPr marL="0" indent="0" algn="ctr">
               <a:buNone/>
               <a:defRPr>
                 <a:solidFill>
                   <a:schemeClr val="tx1">
-                    <a:lumMod val="50000"/>
-                    <a:lumOff val="50000"/>
+                    <a:tint val="75000"/>
                   </a:schemeClr>
                 </a:solidFill>
               </a:defRPr>
@@ -1563,7 +1148,7 @@
               <a:rPr lang="en-US" smtClean="0"/>
               <a:t>Click to edit Master subtitle style</a:t>
             </a:r>
-            <a:endParaRPr lang="en-US" dirty="0"/>
+            <a:endParaRPr lang="en-US"/>
           </a:p>
         </p:txBody>
       </p:sp>
@@ -1584,7 +1169,7 @@
           <a:p>
             <a:fld id="{5BCAD085-E8A6-8845-BD4E-CB4CCA059FC4}" type="datetimeFigureOut">
               <a:rPr lang="en-US" smtClean="0"/>
-              <a:t>31-Aug-26</a:t>
+              <a:t>1/27/13</a:t>
             </a:fld>
             <a:endParaRPr lang="en-US"/>
           </a:p>
@@ -1635,7 +1220,7 @@
     </p:spTree>
     <p:extLst>
       <p:ext uri="{BB962C8B-B14F-4D97-AF65-F5344CB8AC3E}">
-        <p14:creationId xmlns:p14="http://schemas.microsoft.com/office/powerpoint/2010/main" val="2545777767"/>
+        <p14:creationId xmlns:p14="http://schemas.microsoft.com/office/powerpoint/2010/main" val="3168075583"/>
       </p:ext>
     </p:extLst>
   </p:cSld>
@@ -1646,1619 +1231,6 @@
 </file>
 
 <file path=ppt/slideLayouts/slideLayout10.xml><?xml version="1.0" encoding="utf-8"?>
-<p:sldLayout xmlns:a="http://schemas.openxmlformats.org/drawingml/2006/main" xmlns:r="http://schemas.openxmlformats.org/officeDocument/2006/relationships" xmlns:p="http://schemas.openxmlformats.org/presentationml/2006/main" preserve="1">
-  <p:cSld name="Title and Caption">
-    <p:spTree>
-      <p:nvGrpSpPr>
-        <p:cNvPr id="1" name=""/>
-        <p:cNvGrpSpPr/>
-        <p:nvPr/>
-      </p:nvGrpSpPr>
-      <p:grpSpPr>
-        <a:xfrm>
-          <a:off x="0" y="0"/>
-          <a:ext cx="0" cy="0"/>
-          <a:chOff x="0" y="0"/>
-          <a:chExt cx="0" cy="0"/>
-        </a:xfrm>
-      </p:grpSpPr>
-      <p:sp>
-        <p:nvSpPr>
-          <p:cNvPr id="2" name="Title 1"/>
-          <p:cNvSpPr>
-            <a:spLocks noGrp="1"/>
-          </p:cNvSpPr>
-          <p:nvPr>
-            <p:ph type="title"/>
-          </p:nvPr>
-        </p:nvSpPr>
-        <p:spPr>
-          <a:xfrm>
-            <a:off x="677335" y="609600"/>
-            <a:ext cx="8596668" cy="3403600"/>
-          </a:xfrm>
-        </p:spPr>
-        <p:txBody>
-          <a:bodyPr anchor="ctr">
-            <a:normAutofit/>
-          </a:bodyPr>
-          <a:lstStyle>
-            <a:lvl1pPr algn="l">
-              <a:defRPr sz="4400" b="0" cap="none"/>
-            </a:lvl1pPr>
-          </a:lstStyle>
-          <a:p>
-            <a:r>
-              <a:rPr lang="en-US" smtClean="0"/>
-              <a:t>Click to edit Master title style</a:t>
-            </a:r>
-            <a:endParaRPr lang="en-US" dirty="0"/>
-          </a:p>
-        </p:txBody>
-      </p:sp>
-      <p:sp>
-        <p:nvSpPr>
-          <p:cNvPr id="3" name="Text Placeholder 2"/>
-          <p:cNvSpPr>
-            <a:spLocks noGrp="1"/>
-          </p:cNvSpPr>
-          <p:nvPr>
-            <p:ph type="body" idx="1"/>
-          </p:nvPr>
-        </p:nvSpPr>
-        <p:spPr>
-          <a:xfrm>
-            <a:off x="677335" y="4470400"/>
-            <a:ext cx="8596668" cy="1570962"/>
-          </a:xfrm>
-        </p:spPr>
-        <p:txBody>
-          <a:bodyPr anchor="ctr">
-            <a:normAutofit/>
-          </a:bodyPr>
-          <a:lstStyle>
-            <a:lvl1pPr marL="0" indent="0" algn="l">
-              <a:buNone/>
-              <a:defRPr sz="1800">
-                <a:solidFill>
-                  <a:schemeClr val="tx1">
-                    <a:lumMod val="75000"/>
-                    <a:lumOff val="25000"/>
-                  </a:schemeClr>
-                </a:solidFill>
-              </a:defRPr>
-            </a:lvl1pPr>
-            <a:lvl2pPr marL="457200" indent="0">
-              <a:buNone/>
-              <a:defRPr sz="1800">
-                <a:solidFill>
-                  <a:schemeClr val="tx1">
-                    <a:tint val="75000"/>
-                  </a:schemeClr>
-                </a:solidFill>
-              </a:defRPr>
-            </a:lvl2pPr>
-            <a:lvl3pPr marL="914400" indent="0">
-              <a:buNone/>
-              <a:defRPr sz="1600">
-                <a:solidFill>
-                  <a:schemeClr val="tx1">
-                    <a:tint val="75000"/>
-                  </a:schemeClr>
-                </a:solidFill>
-              </a:defRPr>
-            </a:lvl3pPr>
-            <a:lvl4pPr marL="1371600" indent="0">
-              <a:buNone/>
-              <a:defRPr sz="1400">
-                <a:solidFill>
-                  <a:schemeClr val="tx1">
-                    <a:tint val="75000"/>
-                  </a:schemeClr>
-                </a:solidFill>
-              </a:defRPr>
-            </a:lvl4pPr>
-            <a:lvl5pPr marL="1828800" indent="0">
-              <a:buNone/>
-              <a:defRPr sz="1400">
-                <a:solidFill>
-                  <a:schemeClr val="tx1">
-                    <a:tint val="75000"/>
-                  </a:schemeClr>
-                </a:solidFill>
-              </a:defRPr>
-            </a:lvl5pPr>
-            <a:lvl6pPr marL="2286000" indent="0">
-              <a:buNone/>
-              <a:defRPr sz="1400">
-                <a:solidFill>
-                  <a:schemeClr val="tx1">
-                    <a:tint val="75000"/>
-                  </a:schemeClr>
-                </a:solidFill>
-              </a:defRPr>
-            </a:lvl6pPr>
-            <a:lvl7pPr marL="2743200" indent="0">
-              <a:buNone/>
-              <a:defRPr sz="1400">
-                <a:solidFill>
-                  <a:schemeClr val="tx1">
-                    <a:tint val="75000"/>
-                  </a:schemeClr>
-                </a:solidFill>
-              </a:defRPr>
-            </a:lvl7pPr>
-            <a:lvl8pPr marL="3200400" indent="0">
-              <a:buNone/>
-              <a:defRPr sz="1400">
-                <a:solidFill>
-                  <a:schemeClr val="tx1">
-                    <a:tint val="75000"/>
-                  </a:schemeClr>
-                </a:solidFill>
-              </a:defRPr>
-            </a:lvl8pPr>
-            <a:lvl9pPr marL="3657600" indent="0">
-              <a:buNone/>
-              <a:defRPr sz="1400">
-                <a:solidFill>
-                  <a:schemeClr val="tx1">
-                    <a:tint val="75000"/>
-                  </a:schemeClr>
-                </a:solidFill>
-              </a:defRPr>
-            </a:lvl9pPr>
-          </a:lstStyle>
-          <a:p>
-            <a:pPr lvl="0"/>
-            <a:r>
-              <a:rPr lang="en-US" smtClean="0"/>
-              <a:t>Click to edit Master text styles</a:t>
-            </a:r>
-          </a:p>
-        </p:txBody>
-      </p:sp>
-      <p:sp>
-        <p:nvSpPr>
-          <p:cNvPr id="4" name="Date Placeholder 3"/>
-          <p:cNvSpPr>
-            <a:spLocks noGrp="1"/>
-          </p:cNvSpPr>
-          <p:nvPr>
-            <p:ph type="dt" sz="half" idx="10"/>
-          </p:nvPr>
-        </p:nvSpPr>
-        <p:spPr/>
-        <p:txBody>
-          <a:bodyPr/>
-          <a:lstStyle/>
-          <a:p>
-            <a:fld id="{5BCAD085-E8A6-8845-BD4E-CB4CCA059FC4}" type="datetimeFigureOut">
-              <a:rPr lang="en-US" smtClean="0"/>
-              <a:t>31-Aug-26</a:t>
-            </a:fld>
-            <a:endParaRPr lang="en-US"/>
-          </a:p>
-        </p:txBody>
-      </p:sp>
-      <p:sp>
-        <p:nvSpPr>
-          <p:cNvPr id="5" name="Footer Placeholder 4"/>
-          <p:cNvSpPr>
-            <a:spLocks noGrp="1"/>
-          </p:cNvSpPr>
-          <p:nvPr>
-            <p:ph type="ftr" sz="quarter" idx="11"/>
-          </p:nvPr>
-        </p:nvSpPr>
-        <p:spPr/>
-        <p:txBody>
-          <a:bodyPr/>
-          <a:lstStyle/>
-          <a:p>
-            <a:endParaRPr lang="en-US"/>
-          </a:p>
-        </p:txBody>
-      </p:sp>
-      <p:sp>
-        <p:nvSpPr>
-          <p:cNvPr id="6" name="Slide Number Placeholder 5"/>
-          <p:cNvSpPr>
-            <a:spLocks noGrp="1"/>
-          </p:cNvSpPr>
-          <p:nvPr>
-            <p:ph type="sldNum" sz="quarter" idx="12"/>
-          </p:nvPr>
-        </p:nvSpPr>
-        <p:spPr/>
-        <p:txBody>
-          <a:bodyPr/>
-          <a:lstStyle/>
-          <a:p>
-            <a:fld id="{C1FF6DA9-008F-8B48-92A6-B652298478BF}" type="slidenum">
-              <a:rPr lang="en-US" smtClean="0"/>
-              <a:t>‹#›</a:t>
-            </a:fld>
-            <a:endParaRPr lang="en-US"/>
-          </a:p>
-        </p:txBody>
-      </p:sp>
-    </p:spTree>
-    <p:extLst>
-      <p:ext uri="{BB962C8B-B14F-4D97-AF65-F5344CB8AC3E}">
-        <p14:creationId xmlns:p14="http://schemas.microsoft.com/office/powerpoint/2010/main" val="881156975"/>
-      </p:ext>
-    </p:extLst>
-  </p:cSld>
-  <p:clrMapOvr>
-    <a:masterClrMapping/>
-  </p:clrMapOvr>
-</p:sldLayout>
-</file>
-
-<file path=ppt/slideLayouts/slideLayout11.xml><?xml version="1.0" encoding="utf-8"?>
-<p:sldLayout xmlns:a="http://schemas.openxmlformats.org/drawingml/2006/main" xmlns:r="http://schemas.openxmlformats.org/officeDocument/2006/relationships" xmlns:p="http://schemas.openxmlformats.org/presentationml/2006/main" preserve="1">
-  <p:cSld name="Quote with Caption">
-    <p:spTree>
-      <p:nvGrpSpPr>
-        <p:cNvPr id="1" name=""/>
-        <p:cNvGrpSpPr/>
-        <p:nvPr/>
-      </p:nvGrpSpPr>
-      <p:grpSpPr>
-        <a:xfrm>
-          <a:off x="0" y="0"/>
-          <a:ext cx="0" cy="0"/>
-          <a:chOff x="0" y="0"/>
-          <a:chExt cx="0" cy="0"/>
-        </a:xfrm>
-      </p:grpSpPr>
-      <p:sp>
-        <p:nvSpPr>
-          <p:cNvPr id="2" name="Title 1"/>
-          <p:cNvSpPr>
-            <a:spLocks noGrp="1"/>
-          </p:cNvSpPr>
-          <p:nvPr>
-            <p:ph type="title"/>
-          </p:nvPr>
-        </p:nvSpPr>
-        <p:spPr>
-          <a:xfrm>
-            <a:off x="931334" y="609600"/>
-            <a:ext cx="8094134" cy="3022600"/>
-          </a:xfrm>
-        </p:spPr>
-        <p:txBody>
-          <a:bodyPr anchor="ctr">
-            <a:normAutofit/>
-          </a:bodyPr>
-          <a:lstStyle>
-            <a:lvl1pPr algn="l">
-              <a:defRPr sz="4400" b="0" cap="none"/>
-            </a:lvl1pPr>
-          </a:lstStyle>
-          <a:p>
-            <a:r>
-              <a:rPr lang="en-US" smtClean="0"/>
-              <a:t>Click to edit Master title style</a:t>
-            </a:r>
-            <a:endParaRPr lang="en-US" dirty="0"/>
-          </a:p>
-        </p:txBody>
-      </p:sp>
-      <p:sp>
-        <p:nvSpPr>
-          <p:cNvPr id="23" name="Text Placeholder 9"/>
-          <p:cNvSpPr>
-            <a:spLocks noGrp="1"/>
-          </p:cNvSpPr>
-          <p:nvPr>
-            <p:ph type="body" sz="quarter" idx="13"/>
-          </p:nvPr>
-        </p:nvSpPr>
-        <p:spPr>
-          <a:xfrm>
-            <a:off x="1366139" y="3632200"/>
-            <a:ext cx="7224524" cy="381000"/>
-          </a:xfrm>
-        </p:spPr>
-        <p:txBody>
-          <a:bodyPr anchor="ctr">
-            <a:noAutofit/>
-          </a:bodyPr>
-          <a:lstStyle>
-            <a:lvl1pPr marL="0" indent="0">
-              <a:buFontTx/>
-              <a:buNone/>
-              <a:defRPr sz="1600">
-                <a:solidFill>
-                  <a:schemeClr val="tx1">
-                    <a:lumMod val="50000"/>
-                    <a:lumOff val="50000"/>
-                  </a:schemeClr>
-                </a:solidFill>
-              </a:defRPr>
-            </a:lvl1pPr>
-            <a:lvl2pPr marL="457200" indent="0">
-              <a:buFontTx/>
-              <a:buNone/>
-              <a:defRPr/>
-            </a:lvl2pPr>
-            <a:lvl3pPr marL="914400" indent="0">
-              <a:buFontTx/>
-              <a:buNone/>
-              <a:defRPr/>
-            </a:lvl3pPr>
-            <a:lvl4pPr marL="1371600" indent="0">
-              <a:buFontTx/>
-              <a:buNone/>
-              <a:defRPr/>
-            </a:lvl4pPr>
-            <a:lvl5pPr marL="1828800" indent="0">
-              <a:buFontTx/>
-              <a:buNone/>
-              <a:defRPr/>
-            </a:lvl5pPr>
-          </a:lstStyle>
-          <a:p>
-            <a:pPr lvl="0"/>
-            <a:r>
-              <a:rPr lang="en-US" smtClean="0"/>
-              <a:t>Click to edit Master text styles</a:t>
-            </a:r>
-          </a:p>
-        </p:txBody>
-      </p:sp>
-      <p:sp>
-        <p:nvSpPr>
-          <p:cNvPr id="3" name="Text Placeholder 2"/>
-          <p:cNvSpPr>
-            <a:spLocks noGrp="1"/>
-          </p:cNvSpPr>
-          <p:nvPr>
-            <p:ph type="body" idx="1"/>
-          </p:nvPr>
-        </p:nvSpPr>
-        <p:spPr>
-          <a:xfrm>
-            <a:off x="677335" y="4470400"/>
-            <a:ext cx="8596668" cy="1570962"/>
-          </a:xfrm>
-        </p:spPr>
-        <p:txBody>
-          <a:bodyPr anchor="ctr">
-            <a:normAutofit/>
-          </a:bodyPr>
-          <a:lstStyle>
-            <a:lvl1pPr marL="0" indent="0" algn="l">
-              <a:buNone/>
-              <a:defRPr sz="1800">
-                <a:solidFill>
-                  <a:schemeClr val="tx1">
-                    <a:lumMod val="75000"/>
-                    <a:lumOff val="25000"/>
-                  </a:schemeClr>
-                </a:solidFill>
-              </a:defRPr>
-            </a:lvl1pPr>
-            <a:lvl2pPr marL="457200" indent="0">
-              <a:buNone/>
-              <a:defRPr sz="1800">
-                <a:solidFill>
-                  <a:schemeClr val="tx1">
-                    <a:tint val="75000"/>
-                  </a:schemeClr>
-                </a:solidFill>
-              </a:defRPr>
-            </a:lvl2pPr>
-            <a:lvl3pPr marL="914400" indent="0">
-              <a:buNone/>
-              <a:defRPr sz="1600">
-                <a:solidFill>
-                  <a:schemeClr val="tx1">
-                    <a:tint val="75000"/>
-                  </a:schemeClr>
-                </a:solidFill>
-              </a:defRPr>
-            </a:lvl3pPr>
-            <a:lvl4pPr marL="1371600" indent="0">
-              <a:buNone/>
-              <a:defRPr sz="1400">
-                <a:solidFill>
-                  <a:schemeClr val="tx1">
-                    <a:tint val="75000"/>
-                  </a:schemeClr>
-                </a:solidFill>
-              </a:defRPr>
-            </a:lvl4pPr>
-            <a:lvl5pPr marL="1828800" indent="0">
-              <a:buNone/>
-              <a:defRPr sz="1400">
-                <a:solidFill>
-                  <a:schemeClr val="tx1">
-                    <a:tint val="75000"/>
-                  </a:schemeClr>
-                </a:solidFill>
-              </a:defRPr>
-            </a:lvl5pPr>
-            <a:lvl6pPr marL="2286000" indent="0">
-              <a:buNone/>
-              <a:defRPr sz="1400">
-                <a:solidFill>
-                  <a:schemeClr val="tx1">
-                    <a:tint val="75000"/>
-                  </a:schemeClr>
-                </a:solidFill>
-              </a:defRPr>
-            </a:lvl6pPr>
-            <a:lvl7pPr marL="2743200" indent="0">
-              <a:buNone/>
-              <a:defRPr sz="1400">
-                <a:solidFill>
-                  <a:schemeClr val="tx1">
-                    <a:tint val="75000"/>
-                  </a:schemeClr>
-                </a:solidFill>
-              </a:defRPr>
-            </a:lvl7pPr>
-            <a:lvl8pPr marL="3200400" indent="0">
-              <a:buNone/>
-              <a:defRPr sz="1400">
-                <a:solidFill>
-                  <a:schemeClr val="tx1">
-                    <a:tint val="75000"/>
-                  </a:schemeClr>
-                </a:solidFill>
-              </a:defRPr>
-            </a:lvl8pPr>
-            <a:lvl9pPr marL="3657600" indent="0">
-              <a:buNone/>
-              <a:defRPr sz="1400">
-                <a:solidFill>
-                  <a:schemeClr val="tx1">
-                    <a:tint val="75000"/>
-                  </a:schemeClr>
-                </a:solidFill>
-              </a:defRPr>
-            </a:lvl9pPr>
-          </a:lstStyle>
-          <a:p>
-            <a:pPr lvl="0"/>
-            <a:r>
-              <a:rPr lang="en-US" smtClean="0"/>
-              <a:t>Click to edit Master text styles</a:t>
-            </a:r>
-          </a:p>
-        </p:txBody>
-      </p:sp>
-      <p:sp>
-        <p:nvSpPr>
-          <p:cNvPr id="4" name="Date Placeholder 3"/>
-          <p:cNvSpPr>
-            <a:spLocks noGrp="1"/>
-          </p:cNvSpPr>
-          <p:nvPr>
-            <p:ph type="dt" sz="half" idx="10"/>
-          </p:nvPr>
-        </p:nvSpPr>
-        <p:spPr/>
-        <p:txBody>
-          <a:bodyPr/>
-          <a:lstStyle/>
-          <a:p>
-            <a:fld id="{5BCAD085-E8A6-8845-BD4E-CB4CCA059FC4}" type="datetimeFigureOut">
-              <a:rPr lang="en-US" smtClean="0"/>
-              <a:t>31-Aug-26</a:t>
-            </a:fld>
-            <a:endParaRPr lang="en-US"/>
-          </a:p>
-        </p:txBody>
-      </p:sp>
-      <p:sp>
-        <p:nvSpPr>
-          <p:cNvPr id="5" name="Footer Placeholder 4"/>
-          <p:cNvSpPr>
-            <a:spLocks noGrp="1"/>
-          </p:cNvSpPr>
-          <p:nvPr>
-            <p:ph type="ftr" sz="quarter" idx="11"/>
-          </p:nvPr>
-        </p:nvSpPr>
-        <p:spPr/>
-        <p:txBody>
-          <a:bodyPr/>
-          <a:lstStyle/>
-          <a:p>
-            <a:endParaRPr lang="en-US"/>
-          </a:p>
-        </p:txBody>
-      </p:sp>
-      <p:sp>
-        <p:nvSpPr>
-          <p:cNvPr id="6" name="Slide Number Placeholder 5"/>
-          <p:cNvSpPr>
-            <a:spLocks noGrp="1"/>
-          </p:cNvSpPr>
-          <p:nvPr>
-            <p:ph type="sldNum" sz="quarter" idx="12"/>
-          </p:nvPr>
-        </p:nvSpPr>
-        <p:spPr/>
-        <p:txBody>
-          <a:bodyPr/>
-          <a:lstStyle/>
-          <a:p>
-            <a:fld id="{C1FF6DA9-008F-8B48-92A6-B652298478BF}" type="slidenum">
-              <a:rPr lang="en-US" smtClean="0"/>
-              <a:t>‹#›</a:t>
-            </a:fld>
-            <a:endParaRPr lang="en-US"/>
-          </a:p>
-        </p:txBody>
-      </p:sp>
-      <p:sp>
-        <p:nvSpPr>
-          <p:cNvPr id="20" name="TextBox 19"/>
-          <p:cNvSpPr txBox="1"/>
-          <p:nvPr/>
-        </p:nvSpPr>
-        <p:spPr>
-          <a:xfrm>
-            <a:off x="541870" y="790378"/>
-            <a:ext cx="609600" cy="584776"/>
-          </a:xfrm>
-          <a:prstGeom prst="rect">
-            <a:avLst/>
-          </a:prstGeom>
-        </p:spPr>
-        <p:txBody>
-          <a:bodyPr vert="horz" lIns="91440" tIns="45720" rIns="91440" bIns="45720" rtlCol="0" anchor="ctr">
-            <a:noAutofit/>
-          </a:bodyPr>
-          <a:lstStyle/>
-          <a:p>
-            <a:pPr lvl="0"/>
-            <a:r>
-              <a:rPr lang="en-US" sz="8000" baseline="0" dirty="0">
-                <a:ln w="3175" cmpd="sng">
-                  <a:noFill/>
-                </a:ln>
-                <a:solidFill>
-                  <a:schemeClr val="accent1">
-                    <a:lumMod val="60000"/>
-                    <a:lumOff val="40000"/>
-                  </a:schemeClr>
-                </a:solidFill>
-                <a:effectLst/>
-                <a:latin typeface="Arial"/>
-              </a:rPr>
-              <a:t>“</a:t>
-            </a:r>
-          </a:p>
-        </p:txBody>
-      </p:sp>
-      <p:sp>
-        <p:nvSpPr>
-          <p:cNvPr id="22" name="TextBox 21"/>
-          <p:cNvSpPr txBox="1"/>
-          <p:nvPr/>
-        </p:nvSpPr>
-        <p:spPr>
-          <a:xfrm>
-            <a:off x="8893011" y="2886556"/>
-            <a:ext cx="609600" cy="584776"/>
-          </a:xfrm>
-          <a:prstGeom prst="rect">
-            <a:avLst/>
-          </a:prstGeom>
-        </p:spPr>
-        <p:txBody>
-          <a:bodyPr vert="horz" lIns="91440" tIns="45720" rIns="91440" bIns="45720" rtlCol="0" anchor="ctr">
-            <a:noAutofit/>
-          </a:bodyPr>
-          <a:lstStyle/>
-          <a:p>
-            <a:pPr lvl="0"/>
-            <a:r>
-              <a:rPr lang="en-US" sz="8000" baseline="0" dirty="0">
-                <a:ln w="3175" cmpd="sng">
-                  <a:noFill/>
-                </a:ln>
-                <a:solidFill>
-                  <a:schemeClr val="accent1">
-                    <a:lumMod val="60000"/>
-                    <a:lumOff val="40000"/>
-                  </a:schemeClr>
-                </a:solidFill>
-                <a:latin typeface="Arial"/>
-              </a:rPr>
-              <a:t>”</a:t>
-            </a:r>
-            <a:endParaRPr lang="en-US" dirty="0">
-              <a:solidFill>
-                <a:schemeClr val="accent1">
-                  <a:lumMod val="60000"/>
-                  <a:lumOff val="40000"/>
-                </a:schemeClr>
-              </a:solidFill>
-              <a:latin typeface="Arial"/>
-            </a:endParaRPr>
-          </a:p>
-        </p:txBody>
-      </p:sp>
-    </p:spTree>
-    <p:extLst>
-      <p:ext uri="{BB962C8B-B14F-4D97-AF65-F5344CB8AC3E}">
-        <p14:creationId xmlns:p14="http://schemas.microsoft.com/office/powerpoint/2010/main" val="2298036154"/>
-      </p:ext>
-    </p:extLst>
-  </p:cSld>
-  <p:clrMapOvr>
-    <a:masterClrMapping/>
-  </p:clrMapOvr>
-</p:sldLayout>
-</file>
-
-<file path=ppt/slideLayouts/slideLayout12.xml><?xml version="1.0" encoding="utf-8"?>
-<p:sldLayout xmlns:a="http://schemas.openxmlformats.org/drawingml/2006/main" xmlns:r="http://schemas.openxmlformats.org/officeDocument/2006/relationships" xmlns:p="http://schemas.openxmlformats.org/presentationml/2006/main" preserve="1">
-  <p:cSld name="Name Card">
-    <p:spTree>
-      <p:nvGrpSpPr>
-        <p:cNvPr id="1" name=""/>
-        <p:cNvGrpSpPr/>
-        <p:nvPr/>
-      </p:nvGrpSpPr>
-      <p:grpSpPr>
-        <a:xfrm>
-          <a:off x="0" y="0"/>
-          <a:ext cx="0" cy="0"/>
-          <a:chOff x="0" y="0"/>
-          <a:chExt cx="0" cy="0"/>
-        </a:xfrm>
-      </p:grpSpPr>
-      <p:sp>
-        <p:nvSpPr>
-          <p:cNvPr id="2" name="Title 1"/>
-          <p:cNvSpPr>
-            <a:spLocks noGrp="1"/>
-          </p:cNvSpPr>
-          <p:nvPr>
-            <p:ph type="title"/>
-          </p:nvPr>
-        </p:nvSpPr>
-        <p:spPr>
-          <a:xfrm>
-            <a:off x="677335" y="1931988"/>
-            <a:ext cx="8596668" cy="2595460"/>
-          </a:xfrm>
-        </p:spPr>
-        <p:txBody>
-          <a:bodyPr anchor="b">
-            <a:normAutofit/>
-          </a:bodyPr>
-          <a:lstStyle>
-            <a:lvl1pPr algn="l">
-              <a:defRPr sz="4400" b="0" cap="none"/>
-            </a:lvl1pPr>
-          </a:lstStyle>
-          <a:p>
-            <a:r>
-              <a:rPr lang="en-US" smtClean="0"/>
-              <a:t>Click to edit Master title style</a:t>
-            </a:r>
-            <a:endParaRPr lang="en-US" dirty="0"/>
-          </a:p>
-        </p:txBody>
-      </p:sp>
-      <p:sp>
-        <p:nvSpPr>
-          <p:cNvPr id="3" name="Text Placeholder 2"/>
-          <p:cNvSpPr>
-            <a:spLocks noGrp="1"/>
-          </p:cNvSpPr>
-          <p:nvPr>
-            <p:ph type="body" idx="1"/>
-          </p:nvPr>
-        </p:nvSpPr>
-        <p:spPr>
-          <a:xfrm>
-            <a:off x="677335" y="4527448"/>
-            <a:ext cx="8596668" cy="1513914"/>
-          </a:xfrm>
-        </p:spPr>
-        <p:txBody>
-          <a:bodyPr anchor="t">
-            <a:normAutofit/>
-          </a:bodyPr>
-          <a:lstStyle>
-            <a:lvl1pPr marL="0" indent="0" algn="l">
-              <a:buNone/>
-              <a:defRPr sz="1800">
-                <a:solidFill>
-                  <a:schemeClr val="tx1">
-                    <a:lumMod val="75000"/>
-                    <a:lumOff val="25000"/>
-                  </a:schemeClr>
-                </a:solidFill>
-              </a:defRPr>
-            </a:lvl1pPr>
-            <a:lvl2pPr marL="457200" indent="0">
-              <a:buNone/>
-              <a:defRPr sz="1800">
-                <a:solidFill>
-                  <a:schemeClr val="tx1">
-                    <a:tint val="75000"/>
-                  </a:schemeClr>
-                </a:solidFill>
-              </a:defRPr>
-            </a:lvl2pPr>
-            <a:lvl3pPr marL="914400" indent="0">
-              <a:buNone/>
-              <a:defRPr sz="1600">
-                <a:solidFill>
-                  <a:schemeClr val="tx1">
-                    <a:tint val="75000"/>
-                  </a:schemeClr>
-                </a:solidFill>
-              </a:defRPr>
-            </a:lvl3pPr>
-            <a:lvl4pPr marL="1371600" indent="0">
-              <a:buNone/>
-              <a:defRPr sz="1400">
-                <a:solidFill>
-                  <a:schemeClr val="tx1">
-                    <a:tint val="75000"/>
-                  </a:schemeClr>
-                </a:solidFill>
-              </a:defRPr>
-            </a:lvl4pPr>
-            <a:lvl5pPr marL="1828800" indent="0">
-              <a:buNone/>
-              <a:defRPr sz="1400">
-                <a:solidFill>
-                  <a:schemeClr val="tx1">
-                    <a:tint val="75000"/>
-                  </a:schemeClr>
-                </a:solidFill>
-              </a:defRPr>
-            </a:lvl5pPr>
-            <a:lvl6pPr marL="2286000" indent="0">
-              <a:buNone/>
-              <a:defRPr sz="1400">
-                <a:solidFill>
-                  <a:schemeClr val="tx1">
-                    <a:tint val="75000"/>
-                  </a:schemeClr>
-                </a:solidFill>
-              </a:defRPr>
-            </a:lvl6pPr>
-            <a:lvl7pPr marL="2743200" indent="0">
-              <a:buNone/>
-              <a:defRPr sz="1400">
-                <a:solidFill>
-                  <a:schemeClr val="tx1">
-                    <a:tint val="75000"/>
-                  </a:schemeClr>
-                </a:solidFill>
-              </a:defRPr>
-            </a:lvl7pPr>
-            <a:lvl8pPr marL="3200400" indent="0">
-              <a:buNone/>
-              <a:defRPr sz="1400">
-                <a:solidFill>
-                  <a:schemeClr val="tx1">
-                    <a:tint val="75000"/>
-                  </a:schemeClr>
-                </a:solidFill>
-              </a:defRPr>
-            </a:lvl8pPr>
-            <a:lvl9pPr marL="3657600" indent="0">
-              <a:buNone/>
-              <a:defRPr sz="1400">
-                <a:solidFill>
-                  <a:schemeClr val="tx1">
-                    <a:tint val="75000"/>
-                  </a:schemeClr>
-                </a:solidFill>
-              </a:defRPr>
-            </a:lvl9pPr>
-          </a:lstStyle>
-          <a:p>
-            <a:pPr lvl="0"/>
-            <a:r>
-              <a:rPr lang="en-US" smtClean="0"/>
-              <a:t>Click to edit Master text styles</a:t>
-            </a:r>
-          </a:p>
-        </p:txBody>
-      </p:sp>
-      <p:sp>
-        <p:nvSpPr>
-          <p:cNvPr id="4" name="Date Placeholder 3"/>
-          <p:cNvSpPr>
-            <a:spLocks noGrp="1"/>
-          </p:cNvSpPr>
-          <p:nvPr>
-            <p:ph type="dt" sz="half" idx="10"/>
-          </p:nvPr>
-        </p:nvSpPr>
-        <p:spPr/>
-        <p:txBody>
-          <a:bodyPr/>
-          <a:lstStyle/>
-          <a:p>
-            <a:fld id="{5BCAD085-E8A6-8845-BD4E-CB4CCA059FC4}" type="datetimeFigureOut">
-              <a:rPr lang="en-US" smtClean="0"/>
-              <a:t>31-Aug-26</a:t>
-            </a:fld>
-            <a:endParaRPr lang="en-US"/>
-          </a:p>
-        </p:txBody>
-      </p:sp>
-      <p:sp>
-        <p:nvSpPr>
-          <p:cNvPr id="5" name="Footer Placeholder 4"/>
-          <p:cNvSpPr>
-            <a:spLocks noGrp="1"/>
-          </p:cNvSpPr>
-          <p:nvPr>
-            <p:ph type="ftr" sz="quarter" idx="11"/>
-          </p:nvPr>
-        </p:nvSpPr>
-        <p:spPr/>
-        <p:txBody>
-          <a:bodyPr/>
-          <a:lstStyle/>
-          <a:p>
-            <a:endParaRPr lang="en-US"/>
-          </a:p>
-        </p:txBody>
-      </p:sp>
-      <p:sp>
-        <p:nvSpPr>
-          <p:cNvPr id="6" name="Slide Number Placeholder 5"/>
-          <p:cNvSpPr>
-            <a:spLocks noGrp="1"/>
-          </p:cNvSpPr>
-          <p:nvPr>
-            <p:ph type="sldNum" sz="quarter" idx="12"/>
-          </p:nvPr>
-        </p:nvSpPr>
-        <p:spPr/>
-        <p:txBody>
-          <a:bodyPr/>
-          <a:lstStyle/>
-          <a:p>
-            <a:fld id="{C1FF6DA9-008F-8B48-92A6-B652298478BF}" type="slidenum">
-              <a:rPr lang="en-US" smtClean="0"/>
-              <a:t>‹#›</a:t>
-            </a:fld>
-            <a:endParaRPr lang="en-US"/>
-          </a:p>
-        </p:txBody>
-      </p:sp>
-    </p:spTree>
-    <p:extLst>
-      <p:ext uri="{BB962C8B-B14F-4D97-AF65-F5344CB8AC3E}">
-        <p14:creationId xmlns:p14="http://schemas.microsoft.com/office/powerpoint/2010/main" val="115701847"/>
-      </p:ext>
-    </p:extLst>
-  </p:cSld>
-  <p:clrMapOvr>
-    <a:masterClrMapping/>
-  </p:clrMapOvr>
-</p:sldLayout>
-</file>
-
-<file path=ppt/slideLayouts/slideLayout13.xml><?xml version="1.0" encoding="utf-8"?>
-<p:sldLayout xmlns:a="http://schemas.openxmlformats.org/drawingml/2006/main" xmlns:r="http://schemas.openxmlformats.org/officeDocument/2006/relationships" xmlns:p="http://schemas.openxmlformats.org/presentationml/2006/main" preserve="1">
-  <p:cSld name="Quote Name Card">
-    <p:spTree>
-      <p:nvGrpSpPr>
-        <p:cNvPr id="1" name=""/>
-        <p:cNvGrpSpPr/>
-        <p:nvPr/>
-      </p:nvGrpSpPr>
-      <p:grpSpPr>
-        <a:xfrm>
-          <a:off x="0" y="0"/>
-          <a:ext cx="0" cy="0"/>
-          <a:chOff x="0" y="0"/>
-          <a:chExt cx="0" cy="0"/>
-        </a:xfrm>
-      </p:grpSpPr>
-      <p:sp>
-        <p:nvSpPr>
-          <p:cNvPr id="2" name="Title 1"/>
-          <p:cNvSpPr>
-            <a:spLocks noGrp="1"/>
-          </p:cNvSpPr>
-          <p:nvPr>
-            <p:ph type="title"/>
-          </p:nvPr>
-        </p:nvSpPr>
-        <p:spPr>
-          <a:xfrm>
-            <a:off x="931334" y="609600"/>
-            <a:ext cx="8094134" cy="3022600"/>
-          </a:xfrm>
-        </p:spPr>
-        <p:txBody>
-          <a:bodyPr anchor="ctr">
-            <a:normAutofit/>
-          </a:bodyPr>
-          <a:lstStyle>
-            <a:lvl1pPr algn="l">
-              <a:defRPr sz="4400" b="0" cap="none"/>
-            </a:lvl1pPr>
-          </a:lstStyle>
-          <a:p>
-            <a:r>
-              <a:rPr lang="en-US" smtClean="0"/>
-              <a:t>Click to edit Master title style</a:t>
-            </a:r>
-            <a:endParaRPr lang="en-US" dirty="0"/>
-          </a:p>
-        </p:txBody>
-      </p:sp>
-      <p:sp>
-        <p:nvSpPr>
-          <p:cNvPr id="23" name="Text Placeholder 9"/>
-          <p:cNvSpPr>
-            <a:spLocks noGrp="1"/>
-          </p:cNvSpPr>
-          <p:nvPr>
-            <p:ph type="body" sz="quarter" idx="13"/>
-          </p:nvPr>
-        </p:nvSpPr>
-        <p:spPr>
-          <a:xfrm>
-            <a:off x="677332" y="4013200"/>
-            <a:ext cx="8596669" cy="514248"/>
-          </a:xfrm>
-        </p:spPr>
-        <p:txBody>
-          <a:bodyPr anchor="b">
-            <a:noAutofit/>
-          </a:bodyPr>
-          <a:lstStyle>
-            <a:lvl1pPr marL="0" indent="0">
-              <a:buFontTx/>
-              <a:buNone/>
-              <a:defRPr sz="2400">
-                <a:solidFill>
-                  <a:schemeClr val="tx1">
-                    <a:lumMod val="75000"/>
-                    <a:lumOff val="25000"/>
-                  </a:schemeClr>
-                </a:solidFill>
-              </a:defRPr>
-            </a:lvl1pPr>
-            <a:lvl2pPr marL="457200" indent="0">
-              <a:buFontTx/>
-              <a:buNone/>
-              <a:defRPr/>
-            </a:lvl2pPr>
-            <a:lvl3pPr marL="914400" indent="0">
-              <a:buFontTx/>
-              <a:buNone/>
-              <a:defRPr/>
-            </a:lvl3pPr>
-            <a:lvl4pPr marL="1371600" indent="0">
-              <a:buFontTx/>
-              <a:buNone/>
-              <a:defRPr/>
-            </a:lvl4pPr>
-            <a:lvl5pPr marL="1828800" indent="0">
-              <a:buFontTx/>
-              <a:buNone/>
-              <a:defRPr/>
-            </a:lvl5pPr>
-          </a:lstStyle>
-          <a:p>
-            <a:pPr lvl="0"/>
-            <a:r>
-              <a:rPr lang="en-US" smtClean="0"/>
-              <a:t>Click to edit Master text styles</a:t>
-            </a:r>
-          </a:p>
-        </p:txBody>
-      </p:sp>
-      <p:sp>
-        <p:nvSpPr>
-          <p:cNvPr id="3" name="Text Placeholder 2"/>
-          <p:cNvSpPr>
-            <a:spLocks noGrp="1"/>
-          </p:cNvSpPr>
-          <p:nvPr>
-            <p:ph type="body" idx="1"/>
-          </p:nvPr>
-        </p:nvSpPr>
-        <p:spPr>
-          <a:xfrm>
-            <a:off x="677335" y="4527448"/>
-            <a:ext cx="8596668" cy="1513914"/>
-          </a:xfrm>
-        </p:spPr>
-        <p:txBody>
-          <a:bodyPr anchor="t">
-            <a:normAutofit/>
-          </a:bodyPr>
-          <a:lstStyle>
-            <a:lvl1pPr marL="0" indent="0" algn="l">
-              <a:buNone/>
-              <a:defRPr sz="1800">
-                <a:solidFill>
-                  <a:schemeClr val="tx1">
-                    <a:lumMod val="50000"/>
-                    <a:lumOff val="50000"/>
-                  </a:schemeClr>
-                </a:solidFill>
-              </a:defRPr>
-            </a:lvl1pPr>
-            <a:lvl2pPr marL="457200" indent="0">
-              <a:buNone/>
-              <a:defRPr sz="1800">
-                <a:solidFill>
-                  <a:schemeClr val="tx1">
-                    <a:tint val="75000"/>
-                  </a:schemeClr>
-                </a:solidFill>
-              </a:defRPr>
-            </a:lvl2pPr>
-            <a:lvl3pPr marL="914400" indent="0">
-              <a:buNone/>
-              <a:defRPr sz="1600">
-                <a:solidFill>
-                  <a:schemeClr val="tx1">
-                    <a:tint val="75000"/>
-                  </a:schemeClr>
-                </a:solidFill>
-              </a:defRPr>
-            </a:lvl3pPr>
-            <a:lvl4pPr marL="1371600" indent="0">
-              <a:buNone/>
-              <a:defRPr sz="1400">
-                <a:solidFill>
-                  <a:schemeClr val="tx1">
-                    <a:tint val="75000"/>
-                  </a:schemeClr>
-                </a:solidFill>
-              </a:defRPr>
-            </a:lvl4pPr>
-            <a:lvl5pPr marL="1828800" indent="0">
-              <a:buNone/>
-              <a:defRPr sz="1400">
-                <a:solidFill>
-                  <a:schemeClr val="tx1">
-                    <a:tint val="75000"/>
-                  </a:schemeClr>
-                </a:solidFill>
-              </a:defRPr>
-            </a:lvl5pPr>
-            <a:lvl6pPr marL="2286000" indent="0">
-              <a:buNone/>
-              <a:defRPr sz="1400">
-                <a:solidFill>
-                  <a:schemeClr val="tx1">
-                    <a:tint val="75000"/>
-                  </a:schemeClr>
-                </a:solidFill>
-              </a:defRPr>
-            </a:lvl6pPr>
-            <a:lvl7pPr marL="2743200" indent="0">
-              <a:buNone/>
-              <a:defRPr sz="1400">
-                <a:solidFill>
-                  <a:schemeClr val="tx1">
-                    <a:tint val="75000"/>
-                  </a:schemeClr>
-                </a:solidFill>
-              </a:defRPr>
-            </a:lvl7pPr>
-            <a:lvl8pPr marL="3200400" indent="0">
-              <a:buNone/>
-              <a:defRPr sz="1400">
-                <a:solidFill>
-                  <a:schemeClr val="tx1">
-                    <a:tint val="75000"/>
-                  </a:schemeClr>
-                </a:solidFill>
-              </a:defRPr>
-            </a:lvl8pPr>
-            <a:lvl9pPr marL="3657600" indent="0">
-              <a:buNone/>
-              <a:defRPr sz="1400">
-                <a:solidFill>
-                  <a:schemeClr val="tx1">
-                    <a:tint val="75000"/>
-                  </a:schemeClr>
-                </a:solidFill>
-              </a:defRPr>
-            </a:lvl9pPr>
-          </a:lstStyle>
-          <a:p>
-            <a:pPr lvl="0"/>
-            <a:r>
-              <a:rPr lang="en-US" smtClean="0"/>
-              <a:t>Click to edit Master text styles</a:t>
-            </a:r>
-          </a:p>
-        </p:txBody>
-      </p:sp>
-      <p:sp>
-        <p:nvSpPr>
-          <p:cNvPr id="4" name="Date Placeholder 3"/>
-          <p:cNvSpPr>
-            <a:spLocks noGrp="1"/>
-          </p:cNvSpPr>
-          <p:nvPr>
-            <p:ph type="dt" sz="half" idx="10"/>
-          </p:nvPr>
-        </p:nvSpPr>
-        <p:spPr/>
-        <p:txBody>
-          <a:bodyPr/>
-          <a:lstStyle/>
-          <a:p>
-            <a:fld id="{5BCAD085-E8A6-8845-BD4E-CB4CCA059FC4}" type="datetimeFigureOut">
-              <a:rPr lang="en-US" smtClean="0"/>
-              <a:t>31-Aug-26</a:t>
-            </a:fld>
-            <a:endParaRPr lang="en-US"/>
-          </a:p>
-        </p:txBody>
-      </p:sp>
-      <p:sp>
-        <p:nvSpPr>
-          <p:cNvPr id="5" name="Footer Placeholder 4"/>
-          <p:cNvSpPr>
-            <a:spLocks noGrp="1"/>
-          </p:cNvSpPr>
-          <p:nvPr>
-            <p:ph type="ftr" sz="quarter" idx="11"/>
-          </p:nvPr>
-        </p:nvSpPr>
-        <p:spPr/>
-        <p:txBody>
-          <a:bodyPr/>
-          <a:lstStyle/>
-          <a:p>
-            <a:endParaRPr lang="en-US"/>
-          </a:p>
-        </p:txBody>
-      </p:sp>
-      <p:sp>
-        <p:nvSpPr>
-          <p:cNvPr id="6" name="Slide Number Placeholder 5"/>
-          <p:cNvSpPr>
-            <a:spLocks noGrp="1"/>
-          </p:cNvSpPr>
-          <p:nvPr>
-            <p:ph type="sldNum" sz="quarter" idx="12"/>
-          </p:nvPr>
-        </p:nvSpPr>
-        <p:spPr/>
-        <p:txBody>
-          <a:bodyPr/>
-          <a:lstStyle/>
-          <a:p>
-            <a:fld id="{C1FF6DA9-008F-8B48-92A6-B652298478BF}" type="slidenum">
-              <a:rPr lang="en-US" smtClean="0"/>
-              <a:t>‹#›</a:t>
-            </a:fld>
-            <a:endParaRPr lang="en-US"/>
-          </a:p>
-        </p:txBody>
-      </p:sp>
-      <p:sp>
-        <p:nvSpPr>
-          <p:cNvPr id="24" name="TextBox 23"/>
-          <p:cNvSpPr txBox="1"/>
-          <p:nvPr/>
-        </p:nvSpPr>
-        <p:spPr>
-          <a:xfrm>
-            <a:off x="541870" y="790378"/>
-            <a:ext cx="609600" cy="584776"/>
-          </a:xfrm>
-          <a:prstGeom prst="rect">
-            <a:avLst/>
-          </a:prstGeom>
-        </p:spPr>
-        <p:txBody>
-          <a:bodyPr vert="horz" lIns="91440" tIns="45720" rIns="91440" bIns="45720" rtlCol="0" anchor="ctr">
-            <a:noAutofit/>
-          </a:bodyPr>
-          <a:lstStyle/>
-          <a:p>
-            <a:pPr lvl="0"/>
-            <a:r>
-              <a:rPr lang="en-US" sz="8000" baseline="0" dirty="0">
-                <a:ln w="3175" cmpd="sng">
-                  <a:noFill/>
-                </a:ln>
-                <a:solidFill>
-                  <a:schemeClr val="accent1">
-                    <a:lumMod val="60000"/>
-                    <a:lumOff val="40000"/>
-                  </a:schemeClr>
-                </a:solidFill>
-                <a:effectLst/>
-                <a:latin typeface="Arial"/>
-              </a:rPr>
-              <a:t>“</a:t>
-            </a:r>
-          </a:p>
-        </p:txBody>
-      </p:sp>
-      <p:sp>
-        <p:nvSpPr>
-          <p:cNvPr id="25" name="TextBox 24"/>
-          <p:cNvSpPr txBox="1"/>
-          <p:nvPr/>
-        </p:nvSpPr>
-        <p:spPr>
-          <a:xfrm>
-            <a:off x="8893011" y="2886556"/>
-            <a:ext cx="609600" cy="584776"/>
-          </a:xfrm>
-          <a:prstGeom prst="rect">
-            <a:avLst/>
-          </a:prstGeom>
-        </p:spPr>
-        <p:txBody>
-          <a:bodyPr vert="horz" lIns="91440" tIns="45720" rIns="91440" bIns="45720" rtlCol="0" anchor="ctr">
-            <a:noAutofit/>
-          </a:bodyPr>
-          <a:lstStyle/>
-          <a:p>
-            <a:pPr lvl="0"/>
-            <a:r>
-              <a:rPr lang="en-US" sz="8000" baseline="0" dirty="0">
-                <a:ln w="3175" cmpd="sng">
-                  <a:noFill/>
-                </a:ln>
-                <a:solidFill>
-                  <a:schemeClr val="accent1">
-                    <a:lumMod val="60000"/>
-                    <a:lumOff val="40000"/>
-                  </a:schemeClr>
-                </a:solidFill>
-                <a:effectLst/>
-                <a:latin typeface="Arial"/>
-              </a:rPr>
-              <a:t>”</a:t>
-            </a:r>
-          </a:p>
-        </p:txBody>
-      </p:sp>
-    </p:spTree>
-    <p:extLst>
-      <p:ext uri="{BB962C8B-B14F-4D97-AF65-F5344CB8AC3E}">
-        <p14:creationId xmlns:p14="http://schemas.microsoft.com/office/powerpoint/2010/main" val="2156044861"/>
-      </p:ext>
-    </p:extLst>
-  </p:cSld>
-  <p:clrMapOvr>
-    <a:masterClrMapping/>
-  </p:clrMapOvr>
-</p:sldLayout>
-</file>
-
-<file path=ppt/slideLayouts/slideLayout14.xml><?xml version="1.0" encoding="utf-8"?>
-<p:sldLayout xmlns:a="http://schemas.openxmlformats.org/drawingml/2006/main" xmlns:r="http://schemas.openxmlformats.org/officeDocument/2006/relationships" xmlns:p="http://schemas.openxmlformats.org/presentationml/2006/main" preserve="1">
-  <p:cSld name="True or False">
-    <p:spTree>
-      <p:nvGrpSpPr>
-        <p:cNvPr id="1" name=""/>
-        <p:cNvGrpSpPr/>
-        <p:nvPr/>
-      </p:nvGrpSpPr>
-      <p:grpSpPr>
-        <a:xfrm>
-          <a:off x="0" y="0"/>
-          <a:ext cx="0" cy="0"/>
-          <a:chOff x="0" y="0"/>
-          <a:chExt cx="0" cy="0"/>
-        </a:xfrm>
-      </p:grpSpPr>
-      <p:sp>
-        <p:nvSpPr>
-          <p:cNvPr id="2" name="Title 1"/>
-          <p:cNvSpPr>
-            <a:spLocks noGrp="1"/>
-          </p:cNvSpPr>
-          <p:nvPr>
-            <p:ph type="title"/>
-          </p:nvPr>
-        </p:nvSpPr>
-        <p:spPr>
-          <a:xfrm>
-            <a:off x="685799" y="609600"/>
-            <a:ext cx="8588203" cy="3022600"/>
-          </a:xfrm>
-        </p:spPr>
-        <p:txBody>
-          <a:bodyPr anchor="ctr">
-            <a:normAutofit/>
-          </a:bodyPr>
-          <a:lstStyle>
-            <a:lvl1pPr algn="l">
-              <a:defRPr sz="4400" b="0" cap="none"/>
-            </a:lvl1pPr>
-          </a:lstStyle>
-          <a:p>
-            <a:r>
-              <a:rPr lang="en-US" smtClean="0"/>
-              <a:t>Click to edit Master title style</a:t>
-            </a:r>
-            <a:endParaRPr lang="en-US" dirty="0"/>
-          </a:p>
-        </p:txBody>
-      </p:sp>
-      <p:sp>
-        <p:nvSpPr>
-          <p:cNvPr id="23" name="Text Placeholder 9"/>
-          <p:cNvSpPr>
-            <a:spLocks noGrp="1"/>
-          </p:cNvSpPr>
-          <p:nvPr>
-            <p:ph type="body" sz="quarter" idx="13"/>
-          </p:nvPr>
-        </p:nvSpPr>
-        <p:spPr>
-          <a:xfrm>
-            <a:off x="677332" y="4013200"/>
-            <a:ext cx="8596669" cy="514248"/>
-          </a:xfrm>
-        </p:spPr>
-        <p:txBody>
-          <a:bodyPr anchor="b">
-            <a:noAutofit/>
-          </a:bodyPr>
-          <a:lstStyle>
-            <a:lvl1pPr marL="0" indent="0">
-              <a:buFontTx/>
-              <a:buNone/>
-              <a:defRPr sz="2400">
-                <a:solidFill>
-                  <a:schemeClr val="accent1"/>
-                </a:solidFill>
-              </a:defRPr>
-            </a:lvl1pPr>
-            <a:lvl2pPr marL="457200" indent="0">
-              <a:buFontTx/>
-              <a:buNone/>
-              <a:defRPr/>
-            </a:lvl2pPr>
-            <a:lvl3pPr marL="914400" indent="0">
-              <a:buFontTx/>
-              <a:buNone/>
-              <a:defRPr/>
-            </a:lvl3pPr>
-            <a:lvl4pPr marL="1371600" indent="0">
-              <a:buFontTx/>
-              <a:buNone/>
-              <a:defRPr/>
-            </a:lvl4pPr>
-            <a:lvl5pPr marL="1828800" indent="0">
-              <a:buFontTx/>
-              <a:buNone/>
-              <a:defRPr/>
-            </a:lvl5pPr>
-          </a:lstStyle>
-          <a:p>
-            <a:pPr lvl="0"/>
-            <a:r>
-              <a:rPr lang="en-US" smtClean="0"/>
-              <a:t>Click to edit Master text styles</a:t>
-            </a:r>
-          </a:p>
-        </p:txBody>
-      </p:sp>
-      <p:sp>
-        <p:nvSpPr>
-          <p:cNvPr id="3" name="Text Placeholder 2"/>
-          <p:cNvSpPr>
-            <a:spLocks noGrp="1"/>
-          </p:cNvSpPr>
-          <p:nvPr>
-            <p:ph type="body" idx="1"/>
-          </p:nvPr>
-        </p:nvSpPr>
-        <p:spPr>
-          <a:xfrm>
-            <a:off x="677335" y="4527448"/>
-            <a:ext cx="8596668" cy="1513914"/>
-          </a:xfrm>
-        </p:spPr>
-        <p:txBody>
-          <a:bodyPr anchor="t">
-            <a:normAutofit/>
-          </a:bodyPr>
-          <a:lstStyle>
-            <a:lvl1pPr marL="0" indent="0" algn="l">
-              <a:buNone/>
-              <a:defRPr sz="1800">
-                <a:solidFill>
-                  <a:schemeClr val="tx1">
-                    <a:lumMod val="50000"/>
-                    <a:lumOff val="50000"/>
-                  </a:schemeClr>
-                </a:solidFill>
-              </a:defRPr>
-            </a:lvl1pPr>
-            <a:lvl2pPr marL="457200" indent="0">
-              <a:buNone/>
-              <a:defRPr sz="1800">
-                <a:solidFill>
-                  <a:schemeClr val="tx1">
-                    <a:tint val="75000"/>
-                  </a:schemeClr>
-                </a:solidFill>
-              </a:defRPr>
-            </a:lvl2pPr>
-            <a:lvl3pPr marL="914400" indent="0">
-              <a:buNone/>
-              <a:defRPr sz="1600">
-                <a:solidFill>
-                  <a:schemeClr val="tx1">
-                    <a:tint val="75000"/>
-                  </a:schemeClr>
-                </a:solidFill>
-              </a:defRPr>
-            </a:lvl3pPr>
-            <a:lvl4pPr marL="1371600" indent="0">
-              <a:buNone/>
-              <a:defRPr sz="1400">
-                <a:solidFill>
-                  <a:schemeClr val="tx1">
-                    <a:tint val="75000"/>
-                  </a:schemeClr>
-                </a:solidFill>
-              </a:defRPr>
-            </a:lvl4pPr>
-            <a:lvl5pPr marL="1828800" indent="0">
-              <a:buNone/>
-              <a:defRPr sz="1400">
-                <a:solidFill>
-                  <a:schemeClr val="tx1">
-                    <a:tint val="75000"/>
-                  </a:schemeClr>
-                </a:solidFill>
-              </a:defRPr>
-            </a:lvl5pPr>
-            <a:lvl6pPr marL="2286000" indent="0">
-              <a:buNone/>
-              <a:defRPr sz="1400">
-                <a:solidFill>
-                  <a:schemeClr val="tx1">
-                    <a:tint val="75000"/>
-                  </a:schemeClr>
-                </a:solidFill>
-              </a:defRPr>
-            </a:lvl6pPr>
-            <a:lvl7pPr marL="2743200" indent="0">
-              <a:buNone/>
-              <a:defRPr sz="1400">
-                <a:solidFill>
-                  <a:schemeClr val="tx1">
-                    <a:tint val="75000"/>
-                  </a:schemeClr>
-                </a:solidFill>
-              </a:defRPr>
-            </a:lvl7pPr>
-            <a:lvl8pPr marL="3200400" indent="0">
-              <a:buNone/>
-              <a:defRPr sz="1400">
-                <a:solidFill>
-                  <a:schemeClr val="tx1">
-                    <a:tint val="75000"/>
-                  </a:schemeClr>
-                </a:solidFill>
-              </a:defRPr>
-            </a:lvl8pPr>
-            <a:lvl9pPr marL="3657600" indent="0">
-              <a:buNone/>
-              <a:defRPr sz="1400">
-                <a:solidFill>
-                  <a:schemeClr val="tx1">
-                    <a:tint val="75000"/>
-                  </a:schemeClr>
-                </a:solidFill>
-              </a:defRPr>
-            </a:lvl9pPr>
-          </a:lstStyle>
-          <a:p>
-            <a:pPr lvl="0"/>
-            <a:r>
-              <a:rPr lang="en-US" smtClean="0"/>
-              <a:t>Click to edit Master text styles</a:t>
-            </a:r>
-          </a:p>
-        </p:txBody>
-      </p:sp>
-      <p:sp>
-        <p:nvSpPr>
-          <p:cNvPr id="4" name="Date Placeholder 3"/>
-          <p:cNvSpPr>
-            <a:spLocks noGrp="1"/>
-          </p:cNvSpPr>
-          <p:nvPr>
-            <p:ph type="dt" sz="half" idx="10"/>
-          </p:nvPr>
-        </p:nvSpPr>
-        <p:spPr/>
-        <p:txBody>
-          <a:bodyPr/>
-          <a:lstStyle/>
-          <a:p>
-            <a:fld id="{5BCAD085-E8A6-8845-BD4E-CB4CCA059FC4}" type="datetimeFigureOut">
-              <a:rPr lang="en-US" smtClean="0"/>
-              <a:t>31-Aug-26</a:t>
-            </a:fld>
-            <a:endParaRPr lang="en-US"/>
-          </a:p>
-        </p:txBody>
-      </p:sp>
-      <p:sp>
-        <p:nvSpPr>
-          <p:cNvPr id="5" name="Footer Placeholder 4"/>
-          <p:cNvSpPr>
-            <a:spLocks noGrp="1"/>
-          </p:cNvSpPr>
-          <p:nvPr>
-            <p:ph type="ftr" sz="quarter" idx="11"/>
-          </p:nvPr>
-        </p:nvSpPr>
-        <p:spPr/>
-        <p:txBody>
-          <a:bodyPr/>
-          <a:lstStyle/>
-          <a:p>
-            <a:endParaRPr lang="en-US"/>
-          </a:p>
-        </p:txBody>
-      </p:sp>
-      <p:sp>
-        <p:nvSpPr>
-          <p:cNvPr id="6" name="Slide Number Placeholder 5"/>
-          <p:cNvSpPr>
-            <a:spLocks noGrp="1"/>
-          </p:cNvSpPr>
-          <p:nvPr>
-            <p:ph type="sldNum" sz="quarter" idx="12"/>
-          </p:nvPr>
-        </p:nvSpPr>
-        <p:spPr/>
-        <p:txBody>
-          <a:bodyPr/>
-          <a:lstStyle/>
-          <a:p>
-            <a:fld id="{C1FF6DA9-008F-8B48-92A6-B652298478BF}" type="slidenum">
-              <a:rPr lang="en-US" smtClean="0"/>
-              <a:t>‹#›</a:t>
-            </a:fld>
-            <a:endParaRPr lang="en-US"/>
-          </a:p>
-        </p:txBody>
-      </p:sp>
-    </p:spTree>
-    <p:extLst>
-      <p:ext uri="{BB962C8B-B14F-4D97-AF65-F5344CB8AC3E}">
-        <p14:creationId xmlns:p14="http://schemas.microsoft.com/office/powerpoint/2010/main" val="3493171609"/>
-      </p:ext>
-    </p:extLst>
-  </p:cSld>
-  <p:clrMapOvr>
-    <a:masterClrMapping/>
-  </p:clrMapOvr>
-</p:sldLayout>
-</file>
-
-<file path=ppt/slideLayouts/slideLayout15.xml><?xml version="1.0" encoding="utf-8"?>
 <p:sldLayout xmlns:a="http://schemas.openxmlformats.org/drawingml/2006/main" xmlns:r="http://schemas.openxmlformats.org/officeDocument/2006/relationships" xmlns:p="http://schemas.openxmlformats.org/presentationml/2006/main" type="vertTx" preserve="1">
   <p:cSld name="Title and Vertical Text">
     <p:spTree>
@@ -3294,7 +1266,7 @@
               <a:rPr lang="en-US" smtClean="0"/>
               <a:t>Click to edit Master title style</a:t>
             </a:r>
-            <a:endParaRPr lang="en-US" dirty="0"/>
+            <a:endParaRPr lang="en-US"/>
           </a:p>
         </p:txBody>
       </p:sp>
@@ -3346,7 +1318,7 @@
               <a:rPr lang="en-US" smtClean="0"/>
               <a:t>Fifth level</a:t>
             </a:r>
-            <a:endParaRPr lang="en-US" dirty="0"/>
+            <a:endParaRPr lang="en-US"/>
           </a:p>
         </p:txBody>
       </p:sp>
@@ -3367,7 +1339,7 @@
           <a:p>
             <a:fld id="{5BCAD085-E8A6-8845-BD4E-CB4CCA059FC4}" type="datetimeFigureOut">
               <a:rPr lang="en-US" smtClean="0"/>
-              <a:t>31-Aug-26</a:t>
+              <a:t>1/27/13</a:t>
             </a:fld>
             <a:endParaRPr lang="en-US"/>
           </a:p>
@@ -3418,7 +1390,7 @@
     </p:spTree>
     <p:extLst>
       <p:ext uri="{BB962C8B-B14F-4D97-AF65-F5344CB8AC3E}">
-        <p14:creationId xmlns:p14="http://schemas.microsoft.com/office/powerpoint/2010/main" val="2536158971"/>
+        <p14:creationId xmlns:p14="http://schemas.microsoft.com/office/powerpoint/2010/main" val="2910927964"/>
       </p:ext>
     </p:extLst>
   </p:cSld>
@@ -3428,7 +1400,7 @@
 </p:sldLayout>
 </file>
 
-<file path=ppt/slideLayouts/slideLayout16.xml><?xml version="1.0" encoding="utf-8"?>
+<file path=ppt/slideLayouts/slideLayout11.xml><?xml version="1.0" encoding="utf-8"?>
 <p:sldLayout xmlns:a="http://schemas.openxmlformats.org/drawingml/2006/main" xmlns:r="http://schemas.openxmlformats.org/officeDocument/2006/relationships" xmlns:p="http://schemas.openxmlformats.org/presentationml/2006/main" type="vertTitleAndTx" preserve="1">
   <p:cSld name="Vertical Title and Text">
     <p:spTree>
@@ -3457,19 +1429,19 @@
         </p:nvSpPr>
         <p:spPr>
           <a:xfrm>
-            <a:off x="7967673" y="609599"/>
-            <a:ext cx="1304743" cy="5251451"/>
+            <a:off x="6629400" y="274638"/>
+            <a:ext cx="2057400" cy="5851525"/>
           </a:xfrm>
         </p:spPr>
         <p:txBody>
-          <a:bodyPr vert="eaVert" anchor="ctr"/>
+          <a:bodyPr vert="eaVert"/>
           <a:lstStyle/>
           <a:p>
             <a:r>
               <a:rPr lang="en-US" smtClean="0"/>
               <a:t>Click to edit Master title style</a:t>
             </a:r>
-            <a:endParaRPr lang="en-US" dirty="0"/>
+            <a:endParaRPr lang="en-US"/>
           </a:p>
         </p:txBody>
       </p:sp>
@@ -3485,8 +1457,8 @@
         </p:nvSpPr>
         <p:spPr>
           <a:xfrm>
-            <a:off x="677335" y="609600"/>
-            <a:ext cx="7060150" cy="5251450"/>
+            <a:off x="457200" y="274638"/>
+            <a:ext cx="6019800" cy="5851525"/>
           </a:xfrm>
         </p:spPr>
         <p:txBody>
@@ -3526,7 +1498,7 @@
               <a:rPr lang="en-US" smtClean="0"/>
               <a:t>Fifth level</a:t>
             </a:r>
-            <a:endParaRPr lang="en-US" dirty="0"/>
+            <a:endParaRPr lang="en-US"/>
           </a:p>
         </p:txBody>
       </p:sp>
@@ -3547,7 +1519,7 @@
           <a:p>
             <a:fld id="{5BCAD085-E8A6-8845-BD4E-CB4CCA059FC4}" type="datetimeFigureOut">
               <a:rPr lang="en-US" smtClean="0"/>
-              <a:t>31-Aug-26</a:t>
+              <a:t>1/27/13</a:t>
             </a:fld>
             <a:endParaRPr lang="en-US"/>
           </a:p>
@@ -3598,7 +1570,7 @@
     </p:spTree>
     <p:extLst>
       <p:ext uri="{BB962C8B-B14F-4D97-AF65-F5344CB8AC3E}">
-        <p14:creationId xmlns:p14="http://schemas.microsoft.com/office/powerpoint/2010/main" val="1315298747"/>
+        <p14:creationId xmlns:p14="http://schemas.microsoft.com/office/powerpoint/2010/main" val="3612223792"/>
       </p:ext>
     </p:extLst>
   </p:cSld>
@@ -3637,20 +1609,14 @@
         </p:nvSpPr>
         <p:spPr/>
         <p:txBody>
-          <a:bodyPr>
-            <a:normAutofit/>
-          </a:bodyPr>
-          <a:lstStyle>
-            <a:lvl1pPr>
-              <a:defRPr sz="3600"/>
-            </a:lvl1pPr>
-          </a:lstStyle>
+          <a:bodyPr/>
+          <a:lstStyle/>
           <a:p>
             <a:r>
               <a:rPr lang="en-US" smtClean="0"/>
               <a:t>Click to edit Master title style</a:t>
             </a:r>
-            <a:endParaRPr lang="en-US" dirty="0"/>
+            <a:endParaRPr lang="en-US"/>
           </a:p>
         </p:txBody>
       </p:sp>
@@ -3702,7 +1668,7 @@
               <a:rPr lang="en-US" smtClean="0"/>
               <a:t>Fifth level</a:t>
             </a:r>
-            <a:endParaRPr lang="en-US" dirty="0"/>
+            <a:endParaRPr lang="en-US"/>
           </a:p>
         </p:txBody>
       </p:sp>
@@ -3723,7 +1689,7 @@
           <a:p>
             <a:fld id="{5BCAD085-E8A6-8845-BD4E-CB4CCA059FC4}" type="datetimeFigureOut">
               <a:rPr lang="en-US" smtClean="0"/>
-              <a:t>31-Aug-26</a:t>
+              <a:t>1/27/13</a:t>
             </a:fld>
             <a:endParaRPr lang="en-US"/>
           </a:p>
@@ -3774,7 +1740,7 @@
     </p:spTree>
     <p:extLst>
       <p:ext uri="{BB962C8B-B14F-4D97-AF65-F5344CB8AC3E}">
-        <p14:creationId xmlns:p14="http://schemas.microsoft.com/office/powerpoint/2010/main" val="2301645283"/>
+        <p14:creationId xmlns:p14="http://schemas.microsoft.com/office/powerpoint/2010/main" val="2614314258"/>
       </p:ext>
     </p:extLst>
   </p:cSld>
@@ -3813,52 +1779,51 @@
         </p:nvSpPr>
         <p:spPr>
           <a:xfrm>
-            <a:off x="677335" y="2700867"/>
-            <a:ext cx="8596668" cy="1826581"/>
+            <a:off x="722313" y="4406900"/>
+            <a:ext cx="7772400" cy="1362075"/>
           </a:xfrm>
         </p:spPr>
         <p:txBody>
+          <a:bodyPr anchor="t"/>
+          <a:lstStyle>
+            <a:lvl1pPr algn="l">
+              <a:defRPr sz="4000" b="1" cap="all"/>
+            </a:lvl1pPr>
+          </a:lstStyle>
+          <a:p>
+            <a:r>
+              <a:rPr lang="en-US" smtClean="0"/>
+              <a:t>Click to edit Master title style</a:t>
+            </a:r>
+            <a:endParaRPr lang="en-US"/>
+          </a:p>
+        </p:txBody>
+      </p:sp>
+      <p:sp>
+        <p:nvSpPr>
+          <p:cNvPr id="3" name="Text Placeholder 2"/>
+          <p:cNvSpPr>
+            <a:spLocks noGrp="1"/>
+          </p:cNvSpPr>
+          <p:nvPr>
+            <p:ph type="body" idx="1"/>
+          </p:nvPr>
+        </p:nvSpPr>
+        <p:spPr>
+          <a:xfrm>
+            <a:off x="722313" y="2906713"/>
+            <a:ext cx="7772400" cy="1500187"/>
+          </a:xfrm>
+        </p:spPr>
+        <p:txBody>
           <a:bodyPr anchor="b"/>
           <a:lstStyle>
-            <a:lvl1pPr algn="l">
-              <a:defRPr sz="4000" b="0" cap="none"/>
-            </a:lvl1pPr>
-          </a:lstStyle>
-          <a:p>
-            <a:r>
-              <a:rPr lang="en-US" smtClean="0"/>
-              <a:t>Click to edit Master title style</a:t>
-            </a:r>
-            <a:endParaRPr lang="en-US" dirty="0"/>
-          </a:p>
-        </p:txBody>
-      </p:sp>
-      <p:sp>
-        <p:nvSpPr>
-          <p:cNvPr id="3" name="Text Placeholder 2"/>
-          <p:cNvSpPr>
-            <a:spLocks noGrp="1"/>
-          </p:cNvSpPr>
-          <p:nvPr>
-            <p:ph type="body" idx="1"/>
-          </p:nvPr>
-        </p:nvSpPr>
-        <p:spPr>
-          <a:xfrm>
-            <a:off x="677335" y="4527448"/>
-            <a:ext cx="8596668" cy="860400"/>
-          </a:xfrm>
-        </p:spPr>
-        <p:txBody>
-          <a:bodyPr anchor="t"/>
-          <a:lstStyle>
-            <a:lvl1pPr marL="0" indent="0" algn="l">
+            <a:lvl1pPr marL="0" indent="0">
               <a:buNone/>
               <a:defRPr sz="2000">
                 <a:solidFill>
                   <a:schemeClr val="tx1">
-                    <a:lumMod val="50000"/>
-                    <a:lumOff val="50000"/>
+                    <a:tint val="75000"/>
                   </a:schemeClr>
                 </a:solidFill>
               </a:defRPr>
@@ -3970,7 +1935,7 @@
           <a:p>
             <a:fld id="{5BCAD085-E8A6-8845-BD4E-CB4CCA059FC4}" type="datetimeFigureOut">
               <a:rPr lang="en-US" smtClean="0"/>
-              <a:t>31-Aug-26</a:t>
+              <a:t>1/27/13</a:t>
             </a:fld>
             <a:endParaRPr lang="en-US"/>
           </a:p>
@@ -4021,7 +1986,7 @@
     </p:spTree>
     <p:extLst>
       <p:ext uri="{BB962C8B-B14F-4D97-AF65-F5344CB8AC3E}">
-        <p14:creationId xmlns:p14="http://schemas.microsoft.com/office/powerpoint/2010/main" val="423087614"/>
+        <p14:creationId xmlns:p14="http://schemas.microsoft.com/office/powerpoint/2010/main" val="960648375"/>
       </p:ext>
     </p:extLst>
   </p:cSld>
@@ -4067,7 +2032,7 @@
               <a:rPr lang="en-US" smtClean="0"/>
               <a:t>Click to edit Master title style</a:t>
             </a:r>
-            <a:endParaRPr lang="en-US" dirty="0"/>
+            <a:endParaRPr lang="en-US"/>
           </a:p>
         </p:txBody>
       </p:sp>
@@ -4083,13 +2048,41 @@
         </p:nvSpPr>
         <p:spPr>
           <a:xfrm>
-            <a:off x="677334" y="2160589"/>
-            <a:ext cx="4184035" cy="3880772"/>
+            <a:off x="457200" y="1600200"/>
+            <a:ext cx="4038600" cy="4525963"/>
           </a:xfrm>
         </p:spPr>
         <p:txBody>
           <a:bodyPr/>
-          <a:lstStyle/>
+          <a:lstStyle>
+            <a:lvl1pPr>
+              <a:defRPr sz="2800"/>
+            </a:lvl1pPr>
+            <a:lvl2pPr>
+              <a:defRPr sz="2400"/>
+            </a:lvl2pPr>
+            <a:lvl3pPr>
+              <a:defRPr sz="2000"/>
+            </a:lvl3pPr>
+            <a:lvl4pPr>
+              <a:defRPr sz="1800"/>
+            </a:lvl4pPr>
+            <a:lvl5pPr>
+              <a:defRPr sz="1800"/>
+            </a:lvl5pPr>
+            <a:lvl6pPr>
+              <a:defRPr sz="1800"/>
+            </a:lvl6pPr>
+            <a:lvl7pPr>
+              <a:defRPr sz="1800"/>
+            </a:lvl7pPr>
+            <a:lvl8pPr>
+              <a:defRPr sz="1800"/>
+            </a:lvl8pPr>
+            <a:lvl9pPr>
+              <a:defRPr sz="1800"/>
+            </a:lvl9pPr>
+          </a:lstStyle>
           <a:p>
             <a:pPr lvl="0"/>
             <a:r>
@@ -4124,7 +2117,7 @@
               <a:rPr lang="en-US" smtClean="0"/>
               <a:t>Fifth level</a:t>
             </a:r>
-            <a:endParaRPr lang="en-US" dirty="0"/>
+            <a:endParaRPr lang="en-US"/>
           </a:p>
         </p:txBody>
       </p:sp>
@@ -4140,13 +2133,41 @@
         </p:nvSpPr>
         <p:spPr>
           <a:xfrm>
-            <a:off x="5089970" y="2160589"/>
-            <a:ext cx="4184034" cy="3880773"/>
+            <a:off x="4648200" y="1600200"/>
+            <a:ext cx="4038600" cy="4525963"/>
           </a:xfrm>
         </p:spPr>
         <p:txBody>
           <a:bodyPr/>
-          <a:lstStyle/>
+          <a:lstStyle>
+            <a:lvl1pPr>
+              <a:defRPr sz="2800"/>
+            </a:lvl1pPr>
+            <a:lvl2pPr>
+              <a:defRPr sz="2400"/>
+            </a:lvl2pPr>
+            <a:lvl3pPr>
+              <a:defRPr sz="2000"/>
+            </a:lvl3pPr>
+            <a:lvl4pPr>
+              <a:defRPr sz="1800"/>
+            </a:lvl4pPr>
+            <a:lvl5pPr>
+              <a:defRPr sz="1800"/>
+            </a:lvl5pPr>
+            <a:lvl6pPr>
+              <a:defRPr sz="1800"/>
+            </a:lvl6pPr>
+            <a:lvl7pPr>
+              <a:defRPr sz="1800"/>
+            </a:lvl7pPr>
+            <a:lvl8pPr>
+              <a:defRPr sz="1800"/>
+            </a:lvl8pPr>
+            <a:lvl9pPr>
+              <a:defRPr sz="1800"/>
+            </a:lvl9pPr>
+          </a:lstStyle>
           <a:p>
             <a:pPr lvl="0"/>
             <a:r>
@@ -4181,7 +2202,7 @@
               <a:rPr lang="en-US" smtClean="0"/>
               <a:t>Fifth level</a:t>
             </a:r>
-            <a:endParaRPr lang="en-US" dirty="0"/>
+            <a:endParaRPr lang="en-US"/>
           </a:p>
         </p:txBody>
       </p:sp>
@@ -4202,7 +2223,7 @@
           <a:p>
             <a:fld id="{5BCAD085-E8A6-8845-BD4E-CB4CCA059FC4}" type="datetimeFigureOut">
               <a:rPr lang="en-US" smtClean="0"/>
-              <a:t>31-Aug-26</a:t>
+              <a:t>1/27/13</a:t>
             </a:fld>
             <a:endParaRPr lang="en-US"/>
           </a:p>
@@ -4253,7 +2274,7 @@
     </p:spTree>
     <p:extLst>
       <p:ext uri="{BB962C8B-B14F-4D97-AF65-F5344CB8AC3E}">
-        <p14:creationId xmlns:p14="http://schemas.microsoft.com/office/powerpoint/2010/main" val="1425523206"/>
+        <p14:creationId xmlns:p14="http://schemas.microsoft.com/office/powerpoint/2010/main" val="2782244947"/>
       </p:ext>
     </p:extLst>
   </p:cSld>
@@ -4303,7 +2324,7 @@
               <a:rPr lang="en-US" smtClean="0"/>
               <a:t>Click to edit Master title style</a:t>
             </a:r>
-            <a:endParaRPr lang="en-US" dirty="0"/>
+            <a:endParaRPr lang="en-US"/>
           </a:p>
         </p:txBody>
       </p:sp>
@@ -4319,18 +2340,16 @@
         </p:nvSpPr>
         <p:spPr>
           <a:xfrm>
-            <a:off x="675745" y="2160983"/>
-            <a:ext cx="4185623" cy="576262"/>
+            <a:off x="457200" y="1535113"/>
+            <a:ext cx="4040188" cy="639762"/>
           </a:xfrm>
         </p:spPr>
         <p:txBody>
-          <a:bodyPr anchor="b">
-            <a:noAutofit/>
-          </a:bodyPr>
+          <a:bodyPr anchor="b"/>
           <a:lstStyle>
             <a:lvl1pPr marL="0" indent="0">
               <a:buNone/>
-              <a:defRPr sz="2400" b="0"/>
+              <a:defRPr sz="2400" b="1"/>
             </a:lvl1pPr>
             <a:lvl2pPr marL="457200" indent="0">
               <a:buNone/>
@@ -4386,15 +2405,41 @@
         </p:nvSpPr>
         <p:spPr>
           <a:xfrm>
-            <a:off x="675745" y="2737245"/>
-            <a:ext cx="4185623" cy="3304117"/>
+            <a:off x="457200" y="2174875"/>
+            <a:ext cx="4040188" cy="3951288"/>
           </a:xfrm>
         </p:spPr>
         <p:txBody>
-          <a:bodyPr>
-            <a:normAutofit/>
-          </a:bodyPr>
-          <a:lstStyle/>
+          <a:bodyPr/>
+          <a:lstStyle>
+            <a:lvl1pPr>
+              <a:defRPr sz="2400"/>
+            </a:lvl1pPr>
+            <a:lvl2pPr>
+              <a:defRPr sz="2000"/>
+            </a:lvl2pPr>
+            <a:lvl3pPr>
+              <a:defRPr sz="1800"/>
+            </a:lvl3pPr>
+            <a:lvl4pPr>
+              <a:defRPr sz="1600"/>
+            </a:lvl4pPr>
+            <a:lvl5pPr>
+              <a:defRPr sz="1600"/>
+            </a:lvl5pPr>
+            <a:lvl6pPr>
+              <a:defRPr sz="1600"/>
+            </a:lvl6pPr>
+            <a:lvl7pPr>
+              <a:defRPr sz="1600"/>
+            </a:lvl7pPr>
+            <a:lvl8pPr>
+              <a:defRPr sz="1600"/>
+            </a:lvl8pPr>
+            <a:lvl9pPr>
+              <a:defRPr sz="1600"/>
+            </a:lvl9pPr>
+          </a:lstStyle>
           <a:p>
             <a:pPr lvl="0"/>
             <a:r>
@@ -4429,7 +2474,7 @@
               <a:rPr lang="en-US" smtClean="0"/>
               <a:t>Fifth level</a:t>
             </a:r>
-            <a:endParaRPr lang="en-US" dirty="0"/>
+            <a:endParaRPr lang="en-US"/>
           </a:p>
         </p:txBody>
       </p:sp>
@@ -4445,18 +2490,16 @@
         </p:nvSpPr>
         <p:spPr>
           <a:xfrm>
-            <a:off x="5088383" y="2160983"/>
-            <a:ext cx="4185618" cy="576262"/>
+            <a:off x="4645025" y="1535113"/>
+            <a:ext cx="4041775" cy="639762"/>
           </a:xfrm>
         </p:spPr>
         <p:txBody>
-          <a:bodyPr anchor="b">
-            <a:noAutofit/>
-          </a:bodyPr>
+          <a:bodyPr anchor="b"/>
           <a:lstStyle>
             <a:lvl1pPr marL="0" indent="0">
               <a:buNone/>
-              <a:defRPr sz="2400" b="0"/>
+              <a:defRPr sz="2400" b="1"/>
             </a:lvl1pPr>
             <a:lvl2pPr marL="457200" indent="0">
               <a:buNone/>
@@ -4512,15 +2555,41 @@
         </p:nvSpPr>
         <p:spPr>
           <a:xfrm>
-            <a:off x="5088384" y="2737245"/>
-            <a:ext cx="4185617" cy="3304117"/>
+            <a:off x="4645025" y="2174875"/>
+            <a:ext cx="4041775" cy="3951288"/>
           </a:xfrm>
         </p:spPr>
         <p:txBody>
-          <a:bodyPr>
-            <a:normAutofit/>
-          </a:bodyPr>
-          <a:lstStyle/>
+          <a:bodyPr/>
+          <a:lstStyle>
+            <a:lvl1pPr>
+              <a:defRPr sz="2400"/>
+            </a:lvl1pPr>
+            <a:lvl2pPr>
+              <a:defRPr sz="2000"/>
+            </a:lvl2pPr>
+            <a:lvl3pPr>
+              <a:defRPr sz="1800"/>
+            </a:lvl3pPr>
+            <a:lvl4pPr>
+              <a:defRPr sz="1600"/>
+            </a:lvl4pPr>
+            <a:lvl5pPr>
+              <a:defRPr sz="1600"/>
+            </a:lvl5pPr>
+            <a:lvl6pPr>
+              <a:defRPr sz="1600"/>
+            </a:lvl6pPr>
+            <a:lvl7pPr>
+              <a:defRPr sz="1600"/>
+            </a:lvl7pPr>
+            <a:lvl8pPr>
+              <a:defRPr sz="1600"/>
+            </a:lvl8pPr>
+            <a:lvl9pPr>
+              <a:defRPr sz="1600"/>
+            </a:lvl9pPr>
+          </a:lstStyle>
           <a:p>
             <a:pPr lvl="0"/>
             <a:r>
@@ -4555,7 +2624,7 @@
               <a:rPr lang="en-US" smtClean="0"/>
               <a:t>Fifth level</a:t>
             </a:r>
-            <a:endParaRPr lang="en-US" dirty="0"/>
+            <a:endParaRPr lang="en-US"/>
           </a:p>
         </p:txBody>
       </p:sp>
@@ -4576,7 +2645,7 @@
           <a:p>
             <a:fld id="{5BCAD085-E8A6-8845-BD4E-CB4CCA059FC4}" type="datetimeFigureOut">
               <a:rPr lang="en-US" smtClean="0"/>
-              <a:t>31-Aug-26</a:t>
+              <a:t>1/27/13</a:t>
             </a:fld>
             <a:endParaRPr lang="en-US"/>
           </a:p>
@@ -4627,7 +2696,7 @@
     </p:spTree>
     <p:extLst>
       <p:ext uri="{BB962C8B-B14F-4D97-AF65-F5344CB8AC3E}">
-        <p14:creationId xmlns:p14="http://schemas.microsoft.com/office/powerpoint/2010/main" val="940127180"/>
+        <p14:creationId xmlns:p14="http://schemas.microsoft.com/office/powerpoint/2010/main" val="990158736"/>
       </p:ext>
     </p:extLst>
   </p:cSld>
@@ -4664,12 +2733,7 @@
             <p:ph type="title"/>
           </p:nvPr>
         </p:nvSpPr>
-        <p:spPr>
-          <a:xfrm>
-            <a:off x="677334" y="609600"/>
-            <a:ext cx="8596668" cy="1320800"/>
-          </a:xfrm>
-        </p:spPr>
+        <p:spPr/>
         <p:txBody>
           <a:bodyPr/>
           <a:lstStyle/>
@@ -4678,7 +2742,7 @@
               <a:rPr lang="en-US" smtClean="0"/>
               <a:t>Click to edit Master title style</a:t>
             </a:r>
-            <a:endParaRPr lang="en-US" dirty="0"/>
+            <a:endParaRPr lang="en-US"/>
           </a:p>
         </p:txBody>
       </p:sp>
@@ -4699,7 +2763,7 @@
           <a:p>
             <a:fld id="{5BCAD085-E8A6-8845-BD4E-CB4CCA059FC4}" type="datetimeFigureOut">
               <a:rPr lang="en-US" smtClean="0"/>
-              <a:t>31-Aug-26</a:t>
+              <a:t>1/27/13</a:t>
             </a:fld>
             <a:endParaRPr lang="en-US"/>
           </a:p>
@@ -4750,7 +2814,7 @@
     </p:spTree>
     <p:extLst>
       <p:ext uri="{BB962C8B-B14F-4D97-AF65-F5344CB8AC3E}">
-        <p14:creationId xmlns:p14="http://schemas.microsoft.com/office/powerpoint/2010/main" val="1947862363"/>
+        <p14:creationId xmlns:p14="http://schemas.microsoft.com/office/powerpoint/2010/main" val="727027711"/>
       </p:ext>
     </p:extLst>
   </p:cSld>
@@ -4794,7 +2858,7 @@
           <a:p>
             <a:fld id="{5BCAD085-E8A6-8845-BD4E-CB4CCA059FC4}" type="datetimeFigureOut">
               <a:rPr lang="en-US" smtClean="0"/>
-              <a:t>31-Aug-26</a:t>
+              <a:t>1/27/13</a:t>
             </a:fld>
             <a:endParaRPr lang="en-US"/>
           </a:p>
@@ -4845,7 +2909,7 @@
     </p:spTree>
     <p:extLst>
       <p:ext uri="{BB962C8B-B14F-4D97-AF65-F5344CB8AC3E}">
-        <p14:creationId xmlns:p14="http://schemas.microsoft.com/office/powerpoint/2010/main" val="1177351838"/>
+        <p14:creationId xmlns:p14="http://schemas.microsoft.com/office/powerpoint/2010/main" val="1212999818"/>
       </p:ext>
     </p:extLst>
   </p:cSld>
@@ -4884,143 +2948,165 @@
         </p:nvSpPr>
         <p:spPr>
           <a:xfrm>
-            <a:off x="677334" y="1498604"/>
-            <a:ext cx="3854528" cy="1278466"/>
+            <a:off x="457200" y="273050"/>
+            <a:ext cx="3008313" cy="1162050"/>
           </a:xfrm>
         </p:spPr>
         <p:txBody>
-          <a:bodyPr anchor="b">
-            <a:normAutofit/>
-          </a:bodyPr>
+          <a:bodyPr anchor="b"/>
+          <a:lstStyle>
+            <a:lvl1pPr algn="l">
+              <a:defRPr sz="2000" b="1"/>
+            </a:lvl1pPr>
+          </a:lstStyle>
+          <a:p>
+            <a:r>
+              <a:rPr lang="en-US" smtClean="0"/>
+              <a:t>Click to edit Master title style</a:t>
+            </a:r>
+            <a:endParaRPr lang="en-US"/>
+          </a:p>
+        </p:txBody>
+      </p:sp>
+      <p:sp>
+        <p:nvSpPr>
+          <p:cNvPr id="3" name="Content Placeholder 2"/>
+          <p:cNvSpPr>
+            <a:spLocks noGrp="1"/>
+          </p:cNvSpPr>
+          <p:nvPr>
+            <p:ph idx="1"/>
+          </p:nvPr>
+        </p:nvSpPr>
+        <p:spPr>
+          <a:xfrm>
+            <a:off x="3575050" y="273050"/>
+            <a:ext cx="5111750" cy="5853113"/>
+          </a:xfrm>
+        </p:spPr>
+        <p:txBody>
+          <a:bodyPr/>
           <a:lstStyle>
             <a:lvl1pPr>
+              <a:defRPr sz="3200"/>
+            </a:lvl1pPr>
+            <a:lvl2pPr>
+              <a:defRPr sz="2800"/>
+            </a:lvl2pPr>
+            <a:lvl3pPr>
+              <a:defRPr sz="2400"/>
+            </a:lvl3pPr>
+            <a:lvl4pPr>
               <a:defRPr sz="2000"/>
-            </a:lvl1pPr>
+            </a:lvl4pPr>
+            <a:lvl5pPr>
+              <a:defRPr sz="2000"/>
+            </a:lvl5pPr>
+            <a:lvl6pPr>
+              <a:defRPr sz="2000"/>
+            </a:lvl6pPr>
+            <a:lvl7pPr>
+              <a:defRPr sz="2000"/>
+            </a:lvl7pPr>
+            <a:lvl8pPr>
+              <a:defRPr sz="2000"/>
+            </a:lvl8pPr>
+            <a:lvl9pPr>
+              <a:defRPr sz="2000"/>
+            </a:lvl9pPr>
           </a:lstStyle>
           <a:p>
-            <a:r>
-              <a:rPr lang="en-US" smtClean="0"/>
-              <a:t>Click to edit Master title style</a:t>
-            </a:r>
-            <a:endParaRPr lang="en-US" dirty="0"/>
-          </a:p>
-        </p:txBody>
-      </p:sp>
-      <p:sp>
-        <p:nvSpPr>
-          <p:cNvPr id="3" name="Content Placeholder 2"/>
-          <p:cNvSpPr>
-            <a:spLocks noGrp="1"/>
-          </p:cNvSpPr>
-          <p:nvPr>
-            <p:ph idx="1"/>
+            <a:pPr lvl="0"/>
+            <a:r>
+              <a:rPr lang="en-US" smtClean="0"/>
+              <a:t>Click to edit Master text styles</a:t>
+            </a:r>
+          </a:p>
+          <a:p>
+            <a:pPr lvl="1"/>
+            <a:r>
+              <a:rPr lang="en-US" smtClean="0"/>
+              <a:t>Second level</a:t>
+            </a:r>
+          </a:p>
+          <a:p>
+            <a:pPr lvl="2"/>
+            <a:r>
+              <a:rPr lang="en-US" smtClean="0"/>
+              <a:t>Third level</a:t>
+            </a:r>
+          </a:p>
+          <a:p>
+            <a:pPr lvl="3"/>
+            <a:r>
+              <a:rPr lang="en-US" smtClean="0"/>
+              <a:t>Fourth level</a:t>
+            </a:r>
+          </a:p>
+          <a:p>
+            <a:pPr lvl="4"/>
+            <a:r>
+              <a:rPr lang="en-US" smtClean="0"/>
+              <a:t>Fifth level</a:t>
+            </a:r>
+            <a:endParaRPr lang="en-US"/>
+          </a:p>
+        </p:txBody>
+      </p:sp>
+      <p:sp>
+        <p:nvSpPr>
+          <p:cNvPr id="4" name="Text Placeholder 3"/>
+          <p:cNvSpPr>
+            <a:spLocks noGrp="1"/>
+          </p:cNvSpPr>
+          <p:nvPr>
+            <p:ph type="body" sz="half" idx="2"/>
           </p:nvPr>
         </p:nvSpPr>
         <p:spPr>
           <a:xfrm>
-            <a:off x="4760461" y="514924"/>
-            <a:ext cx="4513541" cy="5526437"/>
+            <a:off x="457200" y="1435100"/>
+            <a:ext cx="3008313" cy="4691063"/>
           </a:xfrm>
         </p:spPr>
         <p:txBody>
-          <a:bodyPr>
-            <a:normAutofit/>
-          </a:bodyPr>
-          <a:lstStyle/>
-          <a:p>
-            <a:pPr lvl="0"/>
-            <a:r>
-              <a:rPr lang="en-US" smtClean="0"/>
-              <a:t>Click to edit Master text styles</a:t>
-            </a:r>
-          </a:p>
-          <a:p>
-            <a:pPr lvl="1"/>
-            <a:r>
-              <a:rPr lang="en-US" smtClean="0"/>
-              <a:t>Second level</a:t>
-            </a:r>
-          </a:p>
-          <a:p>
-            <a:pPr lvl="2"/>
-            <a:r>
-              <a:rPr lang="en-US" smtClean="0"/>
-              <a:t>Third level</a:t>
-            </a:r>
-          </a:p>
-          <a:p>
-            <a:pPr lvl="3"/>
-            <a:r>
-              <a:rPr lang="en-US" smtClean="0"/>
-              <a:t>Fourth level</a:t>
-            </a:r>
-          </a:p>
-          <a:p>
-            <a:pPr lvl="4"/>
-            <a:r>
-              <a:rPr lang="en-US" smtClean="0"/>
-              <a:t>Fifth level</a:t>
-            </a:r>
-            <a:endParaRPr lang="en-US" dirty="0"/>
-          </a:p>
-        </p:txBody>
-      </p:sp>
-      <p:sp>
-        <p:nvSpPr>
-          <p:cNvPr id="4" name="Text Placeholder 3"/>
-          <p:cNvSpPr>
-            <a:spLocks noGrp="1"/>
-          </p:cNvSpPr>
-          <p:nvPr>
-            <p:ph type="body" sz="half" idx="2"/>
-          </p:nvPr>
-        </p:nvSpPr>
-        <p:spPr>
-          <a:xfrm>
-            <a:off x="677334" y="2777069"/>
-            <a:ext cx="3854528" cy="2584449"/>
-          </a:xfrm>
-        </p:spPr>
-        <p:txBody>
-          <a:bodyPr>
-            <a:normAutofit/>
-          </a:bodyPr>
+          <a:bodyPr/>
           <a:lstStyle>
             <a:lvl1pPr marL="0" indent="0">
               <a:buNone/>
               <a:defRPr sz="1400"/>
             </a:lvl1pPr>
-            <a:lvl2pPr marL="457063" indent="0">
-              <a:buNone/>
-              <a:defRPr sz="1400"/>
+            <a:lvl2pPr marL="457200" indent="0">
+              <a:buNone/>
+              <a:defRPr sz="1200"/>
             </a:lvl2pPr>
-            <a:lvl3pPr marL="914126" indent="0">
-              <a:buNone/>
-              <a:defRPr sz="1200"/>
+            <a:lvl3pPr marL="914400" indent="0">
+              <a:buNone/>
+              <a:defRPr sz="1000"/>
             </a:lvl3pPr>
-            <a:lvl4pPr marL="1371189" indent="0">
-              <a:buNone/>
-              <a:defRPr sz="1000"/>
+            <a:lvl4pPr marL="1371600" indent="0">
+              <a:buNone/>
+              <a:defRPr sz="900"/>
             </a:lvl4pPr>
-            <a:lvl5pPr marL="1828251" indent="0">
-              <a:buNone/>
-              <a:defRPr sz="1000"/>
+            <a:lvl5pPr marL="1828800" indent="0">
+              <a:buNone/>
+              <a:defRPr sz="900"/>
             </a:lvl5pPr>
-            <a:lvl6pPr marL="2285314" indent="0">
-              <a:buNone/>
-              <a:defRPr sz="1000"/>
+            <a:lvl6pPr marL="2286000" indent="0">
+              <a:buNone/>
+              <a:defRPr sz="900"/>
             </a:lvl6pPr>
-            <a:lvl7pPr marL="2742377" indent="0">
-              <a:buNone/>
-              <a:defRPr sz="1000"/>
+            <a:lvl7pPr marL="2743200" indent="0">
+              <a:buNone/>
+              <a:defRPr sz="900"/>
             </a:lvl7pPr>
-            <a:lvl8pPr marL="3199440" indent="0">
-              <a:buNone/>
-              <a:defRPr sz="1000"/>
+            <a:lvl8pPr marL="3200400" indent="0">
+              <a:buNone/>
+              <a:defRPr sz="900"/>
             </a:lvl8pPr>
-            <a:lvl9pPr marL="3656503" indent="0">
-              <a:buNone/>
-              <a:defRPr sz="1000"/>
+            <a:lvl9pPr marL="3657600" indent="0">
+              <a:buNone/>
+              <a:defRPr sz="900"/>
             </a:lvl9pPr>
           </a:lstStyle>
           <a:p>
@@ -5049,7 +3135,7 @@
           <a:p>
             <a:fld id="{5BCAD085-E8A6-8845-BD4E-CB4CCA059FC4}" type="datetimeFigureOut">
               <a:rPr lang="en-US" smtClean="0"/>
-              <a:t>31-Aug-26</a:t>
+              <a:t>1/27/13</a:t>
             </a:fld>
             <a:endParaRPr lang="en-US"/>
           </a:p>
@@ -5100,7 +3186,7 @@
     </p:spTree>
     <p:extLst>
       <p:ext uri="{BB962C8B-B14F-4D97-AF65-F5344CB8AC3E}">
-        <p14:creationId xmlns:p14="http://schemas.microsoft.com/office/powerpoint/2010/main" val="1598914964"/>
+        <p14:creationId xmlns:p14="http://schemas.microsoft.com/office/powerpoint/2010/main" val="1840726560"/>
       </p:ext>
     </p:extLst>
   </p:cSld>
@@ -5139,17 +3225,15 @@
         </p:nvSpPr>
         <p:spPr>
           <a:xfrm>
-            <a:off x="677334" y="4800600"/>
-            <a:ext cx="8596667" cy="566738"/>
+            <a:off x="1792288" y="4800600"/>
+            <a:ext cx="5486400" cy="566738"/>
           </a:xfrm>
         </p:spPr>
         <p:txBody>
-          <a:bodyPr anchor="b">
-            <a:normAutofit/>
-          </a:bodyPr>
+          <a:bodyPr anchor="b"/>
           <a:lstStyle>
             <a:lvl1pPr algn="l">
-              <a:defRPr sz="2400" b="0"/>
+              <a:defRPr sz="2000" b="1"/>
             </a:lvl1pPr>
           </a:lstStyle>
           <a:p>
@@ -5157,7 +3241,7 @@
               <a:rPr lang="en-US" smtClean="0"/>
               <a:t>Click to edit Master title style</a:t>
             </a:r>
-            <a:endParaRPr lang="en-US" dirty="0"/>
+            <a:endParaRPr lang="en-US"/>
           </a:p>
         </p:txBody>
       </p:sp>
@@ -5165,7 +3249,7 @@
         <p:nvSpPr>
           <p:cNvPr id="3" name="Picture Placeholder 2"/>
           <p:cNvSpPr>
-            <a:spLocks noGrp="1" noChangeAspect="1"/>
+            <a:spLocks noGrp="1"/>
           </p:cNvSpPr>
           <p:nvPr>
             <p:ph type="pic" idx="1"/>
@@ -5173,58 +3257,52 @@
         </p:nvSpPr>
         <p:spPr>
           <a:xfrm>
-            <a:off x="677334" y="609600"/>
-            <a:ext cx="8596668" cy="3845718"/>
+            <a:off x="1792288" y="612775"/>
+            <a:ext cx="5486400" cy="4114800"/>
           </a:xfrm>
         </p:spPr>
         <p:txBody>
-          <a:bodyPr anchor="t">
-            <a:normAutofit/>
-          </a:bodyPr>
+          <a:bodyPr/>
           <a:lstStyle>
-            <a:lvl1pPr marL="0" indent="0" algn="ctr">
-              <a:buNone/>
-              <a:defRPr sz="1600"/>
+            <a:lvl1pPr marL="0" indent="0">
+              <a:buNone/>
+              <a:defRPr sz="3200"/>
             </a:lvl1pPr>
             <a:lvl2pPr marL="457200" indent="0">
               <a:buNone/>
-              <a:defRPr sz="1600"/>
+              <a:defRPr sz="2800"/>
             </a:lvl2pPr>
             <a:lvl3pPr marL="914400" indent="0">
               <a:buNone/>
-              <a:defRPr sz="1600"/>
+              <a:defRPr sz="2400"/>
             </a:lvl3pPr>
             <a:lvl4pPr marL="1371600" indent="0">
               <a:buNone/>
-              <a:defRPr sz="1600"/>
+              <a:defRPr sz="2000"/>
             </a:lvl4pPr>
             <a:lvl5pPr marL="1828800" indent="0">
               <a:buNone/>
-              <a:defRPr sz="1600"/>
+              <a:defRPr sz="2000"/>
             </a:lvl5pPr>
             <a:lvl6pPr marL="2286000" indent="0">
               <a:buNone/>
-              <a:defRPr sz="1600"/>
+              <a:defRPr sz="2000"/>
             </a:lvl6pPr>
             <a:lvl7pPr marL="2743200" indent="0">
               <a:buNone/>
-              <a:defRPr sz="1600"/>
+              <a:defRPr sz="2000"/>
             </a:lvl7pPr>
             <a:lvl8pPr marL="3200400" indent="0">
               <a:buNone/>
-              <a:defRPr sz="1600"/>
+              <a:defRPr sz="2000"/>
             </a:lvl8pPr>
             <a:lvl9pPr marL="3657600" indent="0">
               <a:buNone/>
-              <a:defRPr sz="1600"/>
+              <a:defRPr sz="2000"/>
             </a:lvl9pPr>
           </a:lstStyle>
           <a:p>
-            <a:r>
-              <a:rPr lang="en-US" smtClean="0"/>
-              <a:t>Click icon to add picture</a:t>
-            </a:r>
-            <a:endParaRPr lang="en-US" dirty="0"/>
+            <a:endParaRPr lang="en-US"/>
           </a:p>
         </p:txBody>
       </p:sp>
@@ -5240,18 +3318,16 @@
         </p:nvSpPr>
         <p:spPr>
           <a:xfrm>
-            <a:off x="677334" y="5367338"/>
-            <a:ext cx="8596667" cy="674024"/>
+            <a:off x="1792288" y="5367338"/>
+            <a:ext cx="5486400" cy="804862"/>
           </a:xfrm>
         </p:spPr>
         <p:txBody>
-          <a:bodyPr>
-            <a:normAutofit/>
-          </a:bodyPr>
+          <a:bodyPr/>
           <a:lstStyle>
             <a:lvl1pPr marL="0" indent="0">
               <a:buNone/>
-              <a:defRPr sz="1200"/>
+              <a:defRPr sz="1400"/>
             </a:lvl1pPr>
             <a:lvl2pPr marL="457200" indent="0">
               <a:buNone/>
@@ -5312,7 +3388,7 @@
           <a:p>
             <a:fld id="{5BCAD085-E8A6-8845-BD4E-CB4CCA059FC4}" type="datetimeFigureOut">
               <a:rPr lang="en-US" smtClean="0"/>
-              <a:t>31-Aug-26</a:t>
+              <a:t>1/27/13</a:t>
             </a:fld>
             <a:endParaRPr lang="en-US"/>
           </a:p>
@@ -5363,7 +3439,7 @@
     </p:spTree>
     <p:extLst>
       <p:ext uri="{BB962C8B-B14F-4D97-AF65-F5344CB8AC3E}">
-        <p14:creationId xmlns:p14="http://schemas.microsoft.com/office/powerpoint/2010/main" val="3289508216"/>
+        <p14:creationId xmlns:p14="http://schemas.microsoft.com/office/powerpoint/2010/main" val="3889236939"/>
       </p:ext>
     </p:extLst>
   </p:cSld>
@@ -5395,536 +3471,6 @@
           <a:chExt cx="0" cy="0"/>
         </a:xfrm>
       </p:grpSpPr>
-      <p:grpSp>
-        <p:nvGrpSpPr>
-          <p:cNvPr id="7" name="Group 6"/>
-          <p:cNvGrpSpPr/>
-          <p:nvPr/>
-        </p:nvGrpSpPr>
-        <p:grpSpPr>
-          <a:xfrm>
-            <a:off x="0" y="-8467"/>
-            <a:ext cx="12192000" cy="6866467"/>
-            <a:chOff x="0" y="-8467"/>
-            <a:chExt cx="12192000" cy="6866467"/>
-          </a:xfrm>
-        </p:grpSpPr>
-        <p:cxnSp>
-          <p:nvCxnSpPr>
-            <p:cNvPr id="20" name="Straight Connector 19"/>
-            <p:cNvCxnSpPr/>
-            <p:nvPr/>
-          </p:nvCxnSpPr>
-          <p:spPr>
-            <a:xfrm>
-              <a:off x="9371012" y="0"/>
-              <a:ext cx="1219200" cy="6858000"/>
-            </a:xfrm>
-            <a:prstGeom prst="line">
-              <a:avLst/>
-            </a:prstGeom>
-            <a:ln w="9525">
-              <a:solidFill>
-                <a:schemeClr val="bg1">
-                  <a:lumMod val="75000"/>
-                </a:schemeClr>
-              </a:solidFill>
-            </a:ln>
-          </p:spPr>
-          <p:style>
-            <a:lnRef idx="2">
-              <a:schemeClr val="accent1"/>
-            </a:lnRef>
-            <a:fillRef idx="0">
-              <a:schemeClr val="accent1"/>
-            </a:fillRef>
-            <a:effectRef idx="1">
-              <a:schemeClr val="accent1"/>
-            </a:effectRef>
-            <a:fontRef idx="minor">
-              <a:schemeClr val="tx1"/>
-            </a:fontRef>
-          </p:style>
-        </p:cxnSp>
-        <p:cxnSp>
-          <p:nvCxnSpPr>
-            <p:cNvPr id="21" name="Straight Connector 20"/>
-            <p:cNvCxnSpPr/>
-            <p:nvPr/>
-          </p:nvCxnSpPr>
-          <p:spPr>
-            <a:xfrm flipH="1">
-              <a:off x="7425267" y="3681413"/>
-              <a:ext cx="4763558" cy="3176587"/>
-            </a:xfrm>
-            <a:prstGeom prst="line">
-              <a:avLst/>
-            </a:prstGeom>
-            <a:ln w="9525">
-              <a:solidFill>
-                <a:schemeClr val="bg1">
-                  <a:lumMod val="85000"/>
-                </a:schemeClr>
-              </a:solidFill>
-            </a:ln>
-          </p:spPr>
-          <p:style>
-            <a:lnRef idx="2">
-              <a:schemeClr val="accent1"/>
-            </a:lnRef>
-            <a:fillRef idx="0">
-              <a:schemeClr val="accent1"/>
-            </a:fillRef>
-            <a:effectRef idx="1">
-              <a:schemeClr val="accent1"/>
-            </a:effectRef>
-            <a:fontRef idx="minor">
-              <a:schemeClr val="tx1"/>
-            </a:fontRef>
-          </p:style>
-        </p:cxnSp>
-        <p:sp>
-          <p:nvSpPr>
-            <p:cNvPr id="22" name="Rectangle 23"/>
-            <p:cNvSpPr/>
-            <p:nvPr/>
-          </p:nvSpPr>
-          <p:spPr>
-            <a:xfrm>
-              <a:off x="9181476" y="-8467"/>
-              <a:ext cx="3007349" cy="6866467"/>
-            </a:xfrm>
-            <a:custGeom>
-              <a:avLst/>
-              <a:gdLst/>
-              <a:ahLst/>
-              <a:cxnLst/>
-              <a:rect l="l" t="t" r="r" b="b"/>
-              <a:pathLst>
-                <a:path w="3007349" h="6866467">
-                  <a:moveTo>
-                    <a:pt x="2045532" y="0"/>
-                  </a:moveTo>
-                  <a:lnTo>
-                    <a:pt x="3007349" y="0"/>
-                  </a:lnTo>
-                  <a:lnTo>
-                    <a:pt x="3007349" y="6866467"/>
-                  </a:lnTo>
-                  <a:lnTo>
-                    <a:pt x="0" y="6866467"/>
-                  </a:lnTo>
-                  <a:lnTo>
-                    <a:pt x="2045532" y="0"/>
-                  </a:lnTo>
-                  <a:close/>
-                </a:path>
-              </a:pathLst>
-            </a:custGeom>
-            <a:solidFill>
-              <a:schemeClr val="accent1">
-                <a:alpha val="30000"/>
-              </a:schemeClr>
-            </a:solidFill>
-            <a:ln>
-              <a:noFill/>
-            </a:ln>
-            <a:effectLst/>
-          </p:spPr>
-          <p:style>
-            <a:lnRef idx="1">
-              <a:schemeClr val="accent1"/>
-            </a:lnRef>
-            <a:fillRef idx="3">
-              <a:schemeClr val="accent1"/>
-            </a:fillRef>
-            <a:effectRef idx="2">
-              <a:schemeClr val="accent1"/>
-            </a:effectRef>
-            <a:fontRef idx="minor">
-              <a:schemeClr val="lt1"/>
-            </a:fontRef>
-          </p:style>
-        </p:sp>
-        <p:sp>
-          <p:nvSpPr>
-            <p:cNvPr id="23" name="Rectangle 25"/>
-            <p:cNvSpPr/>
-            <p:nvPr/>
-          </p:nvSpPr>
-          <p:spPr>
-            <a:xfrm>
-              <a:off x="9603442" y="-8467"/>
-              <a:ext cx="2588558" cy="6866467"/>
-            </a:xfrm>
-            <a:custGeom>
-              <a:avLst/>
-              <a:gdLst/>
-              <a:ahLst/>
-              <a:cxnLst/>
-              <a:rect l="l" t="t" r="r" b="b"/>
-              <a:pathLst>
-                <a:path w="2573311" h="6866467">
-                  <a:moveTo>
-                    <a:pt x="0" y="0"/>
-                  </a:moveTo>
-                  <a:lnTo>
-                    <a:pt x="2573311" y="0"/>
-                  </a:lnTo>
-                  <a:lnTo>
-                    <a:pt x="2573311" y="6866467"/>
-                  </a:lnTo>
-                  <a:lnTo>
-                    <a:pt x="1202336" y="6866467"/>
-                  </a:lnTo>
-                  <a:lnTo>
-                    <a:pt x="0" y="0"/>
-                  </a:lnTo>
-                  <a:close/>
-                </a:path>
-              </a:pathLst>
-            </a:custGeom>
-            <a:solidFill>
-              <a:schemeClr val="accent1">
-                <a:alpha val="20000"/>
-              </a:schemeClr>
-            </a:solidFill>
-            <a:ln>
-              <a:noFill/>
-            </a:ln>
-            <a:effectLst/>
-          </p:spPr>
-          <p:style>
-            <a:lnRef idx="1">
-              <a:schemeClr val="accent1"/>
-            </a:lnRef>
-            <a:fillRef idx="3">
-              <a:schemeClr val="accent1"/>
-            </a:fillRef>
-            <a:effectRef idx="2">
-              <a:schemeClr val="accent1"/>
-            </a:effectRef>
-            <a:fontRef idx="minor">
-              <a:schemeClr val="lt1"/>
-            </a:fontRef>
-          </p:style>
-        </p:sp>
-        <p:sp>
-          <p:nvSpPr>
-            <p:cNvPr id="24" name="Isosceles Triangle 23"/>
-            <p:cNvSpPr/>
-            <p:nvPr/>
-          </p:nvSpPr>
-          <p:spPr>
-            <a:xfrm>
-              <a:off x="8932333" y="3048000"/>
-              <a:ext cx="3259667" cy="3810000"/>
-            </a:xfrm>
-            <a:prstGeom prst="triangle">
-              <a:avLst>
-                <a:gd name="adj" fmla="val 100000"/>
-              </a:avLst>
-            </a:prstGeom>
-            <a:solidFill>
-              <a:schemeClr val="accent2">
-                <a:alpha val="72000"/>
-              </a:schemeClr>
-            </a:solidFill>
-            <a:ln>
-              <a:noFill/>
-            </a:ln>
-            <a:effectLst/>
-          </p:spPr>
-          <p:style>
-            <a:lnRef idx="1">
-              <a:schemeClr val="accent1"/>
-            </a:lnRef>
-            <a:fillRef idx="3">
-              <a:schemeClr val="accent1"/>
-            </a:fillRef>
-            <a:effectRef idx="2">
-              <a:schemeClr val="accent1"/>
-            </a:effectRef>
-            <a:fontRef idx="minor">
-              <a:schemeClr val="lt1"/>
-            </a:fontRef>
-          </p:style>
-        </p:sp>
-        <p:sp>
-          <p:nvSpPr>
-            <p:cNvPr id="25" name="Rectangle 27"/>
-            <p:cNvSpPr/>
-            <p:nvPr/>
-          </p:nvSpPr>
-          <p:spPr>
-            <a:xfrm>
-              <a:off x="9334500" y="-8467"/>
-              <a:ext cx="2854326" cy="6866467"/>
-            </a:xfrm>
-            <a:custGeom>
-              <a:avLst/>
-              <a:gdLst/>
-              <a:ahLst/>
-              <a:cxnLst/>
-              <a:rect l="l" t="t" r="r" b="b"/>
-              <a:pathLst>
-                <a:path w="2858013" h="6866467">
-                  <a:moveTo>
-                    <a:pt x="0" y="0"/>
-                  </a:moveTo>
-                  <a:lnTo>
-                    <a:pt x="2858013" y="0"/>
-                  </a:lnTo>
-                  <a:lnTo>
-                    <a:pt x="2858013" y="6866467"/>
-                  </a:lnTo>
-                  <a:lnTo>
-                    <a:pt x="2473942" y="6866467"/>
-                  </a:lnTo>
-                  <a:lnTo>
-                    <a:pt x="0" y="0"/>
-                  </a:lnTo>
-                  <a:close/>
-                </a:path>
-              </a:pathLst>
-            </a:custGeom>
-            <a:solidFill>
-              <a:schemeClr val="accent2">
-                <a:lumMod val="75000"/>
-                <a:alpha val="70000"/>
-              </a:schemeClr>
-            </a:solidFill>
-            <a:ln>
-              <a:noFill/>
-            </a:ln>
-            <a:effectLst/>
-          </p:spPr>
-          <p:style>
-            <a:lnRef idx="1">
-              <a:schemeClr val="accent1"/>
-            </a:lnRef>
-            <a:fillRef idx="3">
-              <a:schemeClr val="accent1"/>
-            </a:fillRef>
-            <a:effectRef idx="2">
-              <a:schemeClr val="accent1"/>
-            </a:effectRef>
-            <a:fontRef idx="minor">
-              <a:schemeClr val="lt1"/>
-            </a:fontRef>
-          </p:style>
-        </p:sp>
-        <p:sp>
-          <p:nvSpPr>
-            <p:cNvPr id="26" name="Rectangle 28"/>
-            <p:cNvSpPr/>
-            <p:nvPr/>
-          </p:nvSpPr>
-          <p:spPr>
-            <a:xfrm>
-              <a:off x="10898730" y="-8467"/>
-              <a:ext cx="1290094" cy="6866467"/>
-            </a:xfrm>
-            <a:custGeom>
-              <a:avLst/>
-              <a:gdLst/>
-              <a:ahLst/>
-              <a:cxnLst/>
-              <a:rect l="l" t="t" r="r" b="b"/>
-              <a:pathLst>
-                <a:path w="1290094" h="6858000">
-                  <a:moveTo>
-                    <a:pt x="1019735" y="0"/>
-                  </a:moveTo>
-                  <a:lnTo>
-                    <a:pt x="1290094" y="0"/>
-                  </a:lnTo>
-                  <a:lnTo>
-                    <a:pt x="1290094" y="6858000"/>
-                  </a:lnTo>
-                  <a:lnTo>
-                    <a:pt x="0" y="6858000"/>
-                  </a:lnTo>
-                  <a:lnTo>
-                    <a:pt x="1019735" y="0"/>
-                  </a:lnTo>
-                  <a:close/>
-                </a:path>
-              </a:pathLst>
-            </a:custGeom>
-            <a:solidFill>
-              <a:schemeClr val="accent1">
-                <a:lumMod val="60000"/>
-                <a:lumOff val="40000"/>
-                <a:alpha val="70000"/>
-              </a:schemeClr>
-            </a:solidFill>
-            <a:ln>
-              <a:noFill/>
-            </a:ln>
-            <a:effectLst/>
-          </p:spPr>
-          <p:style>
-            <a:lnRef idx="1">
-              <a:schemeClr val="accent1"/>
-            </a:lnRef>
-            <a:fillRef idx="3">
-              <a:schemeClr val="accent1"/>
-            </a:fillRef>
-            <a:effectRef idx="2">
-              <a:schemeClr val="accent1"/>
-            </a:effectRef>
-            <a:fontRef idx="minor">
-              <a:schemeClr val="lt1"/>
-            </a:fontRef>
-          </p:style>
-        </p:sp>
-        <p:sp>
-          <p:nvSpPr>
-            <p:cNvPr id="27" name="Rectangle 29"/>
-            <p:cNvSpPr/>
-            <p:nvPr/>
-          </p:nvSpPr>
-          <p:spPr>
-            <a:xfrm>
-              <a:off x="10938999" y="-8467"/>
-              <a:ext cx="1249825" cy="6866467"/>
-            </a:xfrm>
-            <a:custGeom>
-              <a:avLst/>
-              <a:gdLst/>
-              <a:ahLst/>
-              <a:cxnLst/>
-              <a:rect l="l" t="t" r="r" b="b"/>
-              <a:pathLst>
-                <a:path w="1249825" h="6858000">
-                  <a:moveTo>
-                    <a:pt x="0" y="0"/>
-                  </a:moveTo>
-                  <a:lnTo>
-                    <a:pt x="1249825" y="0"/>
-                  </a:lnTo>
-                  <a:lnTo>
-                    <a:pt x="1249825" y="6858000"/>
-                  </a:lnTo>
-                  <a:lnTo>
-                    <a:pt x="1109382" y="6858000"/>
-                  </a:lnTo>
-                  <a:lnTo>
-                    <a:pt x="0" y="0"/>
-                  </a:lnTo>
-                  <a:close/>
-                </a:path>
-              </a:pathLst>
-            </a:custGeom>
-            <a:solidFill>
-              <a:schemeClr val="accent1">
-                <a:alpha val="65000"/>
-              </a:schemeClr>
-            </a:solidFill>
-            <a:ln>
-              <a:noFill/>
-            </a:ln>
-            <a:effectLst/>
-          </p:spPr>
-          <p:style>
-            <a:lnRef idx="1">
-              <a:schemeClr val="accent1"/>
-            </a:lnRef>
-            <a:fillRef idx="3">
-              <a:schemeClr val="accent1"/>
-            </a:fillRef>
-            <a:effectRef idx="2">
-              <a:schemeClr val="accent1"/>
-            </a:effectRef>
-            <a:fontRef idx="minor">
-              <a:schemeClr val="lt1"/>
-            </a:fontRef>
-          </p:style>
-        </p:sp>
-        <p:sp>
-          <p:nvSpPr>
-            <p:cNvPr id="28" name="Isosceles Triangle 27"/>
-            <p:cNvSpPr/>
-            <p:nvPr/>
-          </p:nvSpPr>
-          <p:spPr>
-            <a:xfrm>
-              <a:off x="10371666" y="3589867"/>
-              <a:ext cx="1817159" cy="3268133"/>
-            </a:xfrm>
-            <a:prstGeom prst="triangle">
-              <a:avLst>
-                <a:gd name="adj" fmla="val 100000"/>
-              </a:avLst>
-            </a:prstGeom>
-            <a:solidFill>
-              <a:schemeClr val="accent1">
-                <a:alpha val="80000"/>
-              </a:schemeClr>
-            </a:solidFill>
-            <a:ln>
-              <a:noFill/>
-            </a:ln>
-            <a:effectLst/>
-          </p:spPr>
-          <p:style>
-            <a:lnRef idx="1">
-              <a:schemeClr val="accent1"/>
-            </a:lnRef>
-            <a:fillRef idx="3">
-              <a:schemeClr val="accent1"/>
-            </a:fillRef>
-            <a:effectRef idx="2">
-              <a:schemeClr val="accent1"/>
-            </a:effectRef>
-            <a:fontRef idx="minor">
-              <a:schemeClr val="lt1"/>
-            </a:fontRef>
-          </p:style>
-        </p:sp>
-        <p:sp>
-          <p:nvSpPr>
-            <p:cNvPr id="29" name="Isosceles Triangle 28"/>
-            <p:cNvSpPr/>
-            <p:nvPr/>
-          </p:nvSpPr>
-          <p:spPr>
-            <a:xfrm>
-              <a:off x="0" y="4013200"/>
-              <a:ext cx="448733" cy="2844800"/>
-            </a:xfrm>
-            <a:prstGeom prst="triangle">
-              <a:avLst>
-                <a:gd name="adj" fmla="val 0"/>
-              </a:avLst>
-            </a:prstGeom>
-            <a:solidFill>
-              <a:schemeClr val="accent1">
-                <a:alpha val="85000"/>
-              </a:schemeClr>
-            </a:solidFill>
-            <a:ln>
-              <a:noFill/>
-            </a:ln>
-            <a:effectLst/>
-          </p:spPr>
-          <p:style>
-            <a:lnRef idx="1">
-              <a:schemeClr val="accent1"/>
-            </a:lnRef>
-            <a:fillRef idx="3">
-              <a:schemeClr val="accent1"/>
-            </a:fillRef>
-            <a:effectRef idx="2">
-              <a:schemeClr val="accent1"/>
-            </a:effectRef>
-            <a:fontRef idx="minor">
-              <a:schemeClr val="lt1"/>
-            </a:fontRef>
-          </p:style>
-        </p:sp>
-      </p:grpSp>
       <p:sp>
         <p:nvSpPr>
           <p:cNvPr id="2" name="Title Placeholder 1"/>
@@ -5937,15 +3483,15 @@
         </p:nvSpPr>
         <p:spPr>
           <a:xfrm>
-            <a:off x="677334" y="609600"/>
-            <a:ext cx="8596668" cy="1320800"/>
+            <a:off x="457200" y="274638"/>
+            <a:ext cx="8229600" cy="1143000"/>
           </a:xfrm>
           <a:prstGeom prst="rect">
             <a:avLst/>
           </a:prstGeom>
         </p:spPr>
         <p:txBody>
-          <a:bodyPr vert="horz" lIns="91440" tIns="45720" rIns="91440" bIns="45720" rtlCol="0" anchor="t">
+          <a:bodyPr vert="horz" lIns="91440" tIns="45720" rIns="91440" bIns="45720" rtlCol="0" anchor="ctr">
             <a:normAutofit/>
           </a:bodyPr>
           <a:lstStyle/>
@@ -5954,7 +3500,7 @@
               <a:rPr lang="en-US" smtClean="0"/>
               <a:t>Click to edit Master title style</a:t>
             </a:r>
-            <a:endParaRPr lang="en-US" dirty="0"/>
+            <a:endParaRPr lang="en-US"/>
           </a:p>
         </p:txBody>
       </p:sp>
@@ -5970,8 +3516,8 @@
         </p:nvSpPr>
         <p:spPr>
           <a:xfrm>
-            <a:off x="677334" y="2160589"/>
-            <a:ext cx="8596668" cy="3880773"/>
+            <a:off x="457200" y="1600200"/>
+            <a:ext cx="8229600" cy="4525963"/>
           </a:xfrm>
           <a:prstGeom prst="rect">
             <a:avLst/>
@@ -6016,7 +3562,7 @@
               <a:rPr lang="en-US" smtClean="0"/>
               <a:t>Fifth level</a:t>
             </a:r>
-            <a:endParaRPr lang="en-US" dirty="0"/>
+            <a:endParaRPr lang="en-US"/>
           </a:p>
         </p:txBody>
       </p:sp>
@@ -6032,8 +3578,8 @@
         </p:nvSpPr>
         <p:spPr>
           <a:xfrm>
-            <a:off x="7205133" y="6041362"/>
-            <a:ext cx="911939" cy="365125"/>
+            <a:off x="457200" y="6356350"/>
+            <a:ext cx="2133600" cy="365125"/>
           </a:xfrm>
           <a:prstGeom prst="rect">
             <a:avLst/>
@@ -6042,8 +3588,8 @@
         <p:txBody>
           <a:bodyPr vert="horz" lIns="91440" tIns="45720" rIns="91440" bIns="45720" rtlCol="0" anchor="ctr"/>
           <a:lstStyle>
-            <a:lvl1pPr algn="r">
-              <a:defRPr sz="900">
+            <a:lvl1pPr algn="l">
+              <a:defRPr sz="1200">
                 <a:solidFill>
                   <a:schemeClr val="tx1">
                     <a:tint val="75000"/>
@@ -6055,7 +3601,7 @@
           <a:p>
             <a:fld id="{5BCAD085-E8A6-8845-BD4E-CB4CCA059FC4}" type="datetimeFigureOut">
               <a:rPr lang="en-US" smtClean="0"/>
-              <a:t>31-Aug-26</a:t>
+              <a:t>1/27/13</a:t>
             </a:fld>
             <a:endParaRPr lang="en-US"/>
           </a:p>
@@ -6073,8 +3619,8 @@
         </p:nvSpPr>
         <p:spPr>
           <a:xfrm>
-            <a:off x="677334" y="6041362"/>
-            <a:ext cx="6297612" cy="365125"/>
+            <a:off x="3124200" y="6356350"/>
+            <a:ext cx="2895600" cy="365125"/>
           </a:xfrm>
           <a:prstGeom prst="rect">
             <a:avLst/>
@@ -6083,8 +3629,8 @@
         <p:txBody>
           <a:bodyPr vert="horz" lIns="91440" tIns="45720" rIns="91440" bIns="45720" rtlCol="0" anchor="ctr"/>
           <a:lstStyle>
-            <a:lvl1pPr algn="l">
-              <a:defRPr sz="900">
+            <a:lvl1pPr algn="ctr">
+              <a:defRPr sz="1200">
                 <a:solidFill>
                   <a:schemeClr val="tx1">
                     <a:tint val="75000"/>
@@ -6110,8 +3656,8 @@
         </p:nvSpPr>
         <p:spPr>
           <a:xfrm>
-            <a:off x="8590663" y="6041362"/>
-            <a:ext cx="683339" cy="365125"/>
+            <a:off x="6553200" y="6356350"/>
+            <a:ext cx="2133600" cy="365125"/>
           </a:xfrm>
           <a:prstGeom prst="rect">
             <a:avLst/>
@@ -6121,9 +3667,11 @@
           <a:bodyPr vert="horz" lIns="91440" tIns="45720" rIns="91440" bIns="45720" rtlCol="0" anchor="ctr"/>
           <a:lstStyle>
             <a:lvl1pPr algn="r">
-              <a:defRPr sz="900">
+              <a:defRPr sz="1200">
                 <a:solidFill>
-                  <a:schemeClr val="accent1"/>
+                  <a:schemeClr val="tx1">
+                    <a:tint val="75000"/>
+                  </a:schemeClr>
                 </a:solidFill>
               </a:defRPr>
             </a:lvl1pPr>
@@ -6140,122 +3688,51 @@
     </p:spTree>
     <p:extLst>
       <p:ext uri="{BB962C8B-B14F-4D97-AF65-F5344CB8AC3E}">
-        <p14:creationId xmlns:p14="http://schemas.microsoft.com/office/powerpoint/2010/main" val="682577449"/>
+        <p14:creationId xmlns:p14="http://schemas.microsoft.com/office/powerpoint/2010/main" val="2209977519"/>
       </p:ext>
     </p:extLst>
   </p:cSld>
   <p:clrMap bg1="lt1" tx1="dk1" bg2="lt2" tx2="dk2" accent1="accent1" accent2="accent2" accent3="accent3" accent4="accent4" accent5="accent5" accent6="accent6" hlink="hlink" folHlink="folHlink"/>
   <p:sldLayoutIdLst>
-    <p:sldLayoutId id="2147483661" r:id="rId1"/>
-    <p:sldLayoutId id="2147483662" r:id="rId2"/>
-    <p:sldLayoutId id="2147483663" r:id="rId3"/>
-    <p:sldLayoutId id="2147483664" r:id="rId4"/>
-    <p:sldLayoutId id="2147483665" r:id="rId5"/>
-    <p:sldLayoutId id="2147483666" r:id="rId6"/>
-    <p:sldLayoutId id="2147483667" r:id="rId7"/>
-    <p:sldLayoutId id="2147483668" r:id="rId8"/>
-    <p:sldLayoutId id="2147483669" r:id="rId9"/>
-    <p:sldLayoutId id="2147483670" r:id="rId10"/>
-    <p:sldLayoutId id="2147483671" r:id="rId11"/>
-    <p:sldLayoutId id="2147483672" r:id="rId12"/>
-    <p:sldLayoutId id="2147483673" r:id="rId13"/>
-    <p:sldLayoutId id="2147483674" r:id="rId14"/>
-    <p:sldLayoutId id="2147483675" r:id="rId15"/>
-    <p:sldLayoutId id="2147483676" r:id="rId16"/>
+    <p:sldLayoutId id="2147483649" r:id="rId1"/>
+    <p:sldLayoutId id="2147483650" r:id="rId2"/>
+    <p:sldLayoutId id="2147483651" r:id="rId3"/>
+    <p:sldLayoutId id="2147483652" r:id="rId4"/>
+    <p:sldLayoutId id="2147483653" r:id="rId5"/>
+    <p:sldLayoutId id="2147483654" r:id="rId6"/>
+    <p:sldLayoutId id="2147483655" r:id="rId7"/>
+    <p:sldLayoutId id="2147483656" r:id="rId8"/>
+    <p:sldLayoutId id="2147483657" r:id="rId9"/>
+    <p:sldLayoutId id="2147483658" r:id="rId10"/>
+    <p:sldLayoutId id="2147483659" r:id="rId11"/>
   </p:sldLayoutIdLst>
   <p:txStyles>
     <p:titleStyle>
-      <a:lvl1pPr algn="l" defTabSz="457200" rtl="0" eaLnBrk="1" latinLnBrk="0" hangingPunct="1">
+      <a:lvl1pPr algn="ctr" defTabSz="457200" rtl="0" eaLnBrk="1" latinLnBrk="0" hangingPunct="1">
         <a:spcBef>
           <a:spcPct val="0"/>
         </a:spcBef>
         <a:buNone/>
-        <a:defRPr sz="3600" kern="1200">
+        <a:defRPr sz="4400" kern="1200">
           <a:solidFill>
-            <a:schemeClr val="accent1"/>
+            <a:schemeClr val="tx1"/>
           </a:solidFill>
           <a:latin typeface="+mj-lt"/>
           <a:ea typeface="+mj-ea"/>
           <a:cs typeface="+mj-cs"/>
         </a:defRPr>
       </a:lvl1pPr>
-      <a:lvl2pPr eaLnBrk="1" hangingPunct="1">
-        <a:defRPr>
-          <a:solidFill>
-            <a:schemeClr val="tx2"/>
-          </a:solidFill>
-        </a:defRPr>
-      </a:lvl2pPr>
-      <a:lvl3pPr eaLnBrk="1" hangingPunct="1">
-        <a:defRPr>
-          <a:solidFill>
-            <a:schemeClr val="tx2"/>
-          </a:solidFill>
-        </a:defRPr>
-      </a:lvl3pPr>
-      <a:lvl4pPr eaLnBrk="1" hangingPunct="1">
-        <a:defRPr>
-          <a:solidFill>
-            <a:schemeClr val="tx2"/>
-          </a:solidFill>
-        </a:defRPr>
-      </a:lvl4pPr>
-      <a:lvl5pPr eaLnBrk="1" hangingPunct="1">
-        <a:defRPr>
-          <a:solidFill>
-            <a:schemeClr val="tx2"/>
-          </a:solidFill>
-        </a:defRPr>
-      </a:lvl5pPr>
-      <a:lvl6pPr eaLnBrk="1" hangingPunct="1">
-        <a:defRPr>
-          <a:solidFill>
-            <a:schemeClr val="tx2"/>
-          </a:solidFill>
-        </a:defRPr>
-      </a:lvl6pPr>
-      <a:lvl7pPr eaLnBrk="1" hangingPunct="1">
-        <a:defRPr>
-          <a:solidFill>
-            <a:schemeClr val="tx2"/>
-          </a:solidFill>
-        </a:defRPr>
-      </a:lvl7pPr>
-      <a:lvl8pPr eaLnBrk="1" hangingPunct="1">
-        <a:defRPr>
-          <a:solidFill>
-            <a:schemeClr val="tx2"/>
-          </a:solidFill>
-        </a:defRPr>
-      </a:lvl8pPr>
-      <a:lvl9pPr eaLnBrk="1" hangingPunct="1">
-        <a:defRPr>
-          <a:solidFill>
-            <a:schemeClr val="tx2"/>
-          </a:solidFill>
-        </a:defRPr>
-      </a:lvl9pPr>
     </p:titleStyle>
     <p:bodyStyle>
       <a:lvl1pPr marL="342900" indent="-342900" algn="l" defTabSz="457200" rtl="0" eaLnBrk="1" latinLnBrk="0" hangingPunct="1">
         <a:spcBef>
-          <a:spcPts val="1000"/>
+          <a:spcPct val="20000"/>
         </a:spcBef>
-        <a:spcAft>
-          <a:spcPts val="0"/>
-        </a:spcAft>
-        <a:buClr>
-          <a:schemeClr val="accent1"/>
-        </a:buClr>
-        <a:buSzPct val="80000"/>
-        <a:buFont typeface="Wingdings 3" charset="2"/>
-        <a:buChar char=""/>
-        <a:defRPr sz="1800" kern="1200">
+        <a:buFont typeface="Arial"/>
+        <a:buChar char="•"/>
+        <a:defRPr sz="3200" kern="1200">
           <a:solidFill>
-            <a:schemeClr val="tx1">
-              <a:lumMod val="75000"/>
-              <a:lumOff val="25000"/>
-            </a:schemeClr>
+            <a:schemeClr val="tx1"/>
           </a:solidFill>
           <a:latin typeface="+mn-lt"/>
           <a:ea typeface="+mn-ea"/>
@@ -6264,23 +3741,13 @@
       </a:lvl1pPr>
       <a:lvl2pPr marL="742950" indent="-285750" algn="l" defTabSz="457200" rtl="0" eaLnBrk="1" latinLnBrk="0" hangingPunct="1">
         <a:spcBef>
-          <a:spcPts val="1000"/>
+          <a:spcPct val="20000"/>
         </a:spcBef>
-        <a:spcAft>
-          <a:spcPts val="0"/>
-        </a:spcAft>
-        <a:buClr>
-          <a:schemeClr val="accent1"/>
-        </a:buClr>
-        <a:buSzPct val="80000"/>
-        <a:buFont typeface="Wingdings 3" charset="2"/>
-        <a:buChar char=""/>
-        <a:defRPr sz="1600" kern="1200">
+        <a:buFont typeface="Arial"/>
+        <a:buChar char="–"/>
+        <a:defRPr sz="2800" kern="1200">
           <a:solidFill>
-            <a:schemeClr val="tx1">
-              <a:lumMod val="75000"/>
-              <a:lumOff val="25000"/>
-            </a:schemeClr>
+            <a:schemeClr val="tx1"/>
           </a:solidFill>
           <a:latin typeface="+mn-lt"/>
           <a:ea typeface="+mn-ea"/>
@@ -6289,23 +3756,13 @@
       </a:lvl2pPr>
       <a:lvl3pPr marL="1143000" indent="-228600" algn="l" defTabSz="457200" rtl="0" eaLnBrk="1" latinLnBrk="0" hangingPunct="1">
         <a:spcBef>
-          <a:spcPts val="1000"/>
+          <a:spcPct val="20000"/>
         </a:spcBef>
-        <a:spcAft>
-          <a:spcPts val="0"/>
-        </a:spcAft>
-        <a:buClr>
-          <a:schemeClr val="accent1"/>
-        </a:buClr>
-        <a:buSzPct val="80000"/>
-        <a:buFont typeface="Wingdings 3" charset="2"/>
-        <a:buChar char=""/>
-        <a:defRPr sz="1400" kern="1200">
+        <a:buFont typeface="Arial"/>
+        <a:buChar char="•"/>
+        <a:defRPr sz="2400" kern="1200">
           <a:solidFill>
-            <a:schemeClr val="tx1">
-              <a:lumMod val="75000"/>
-              <a:lumOff val="25000"/>
-            </a:schemeClr>
+            <a:schemeClr val="tx1"/>
           </a:solidFill>
           <a:latin typeface="+mn-lt"/>
           <a:ea typeface="+mn-ea"/>
@@ -6314,23 +3771,13 @@
       </a:lvl3pPr>
       <a:lvl4pPr marL="1600200" indent="-228600" algn="l" defTabSz="457200" rtl="0" eaLnBrk="1" latinLnBrk="0" hangingPunct="1">
         <a:spcBef>
-          <a:spcPts val="1000"/>
+          <a:spcPct val="20000"/>
         </a:spcBef>
-        <a:spcAft>
-          <a:spcPts val="0"/>
-        </a:spcAft>
-        <a:buClr>
-          <a:schemeClr val="accent1"/>
-        </a:buClr>
-        <a:buSzPct val="80000"/>
-        <a:buFont typeface="Wingdings 3" charset="2"/>
-        <a:buChar char=""/>
-        <a:defRPr sz="1200" kern="1200">
+        <a:buFont typeface="Arial"/>
+        <a:buChar char="–"/>
+        <a:defRPr sz="2000" kern="1200">
           <a:solidFill>
-            <a:schemeClr val="tx1">
-              <a:lumMod val="75000"/>
-              <a:lumOff val="25000"/>
-            </a:schemeClr>
+            <a:schemeClr val="tx1"/>
           </a:solidFill>
           <a:latin typeface="+mn-lt"/>
           <a:ea typeface="+mn-ea"/>
@@ -6339,23 +3786,13 @@
       </a:lvl4pPr>
       <a:lvl5pPr marL="2057400" indent="-228600" algn="l" defTabSz="457200" rtl="0" eaLnBrk="1" latinLnBrk="0" hangingPunct="1">
         <a:spcBef>
-          <a:spcPts val="1000"/>
+          <a:spcPct val="20000"/>
         </a:spcBef>
-        <a:spcAft>
-          <a:spcPts val="0"/>
-        </a:spcAft>
-        <a:buClr>
-          <a:schemeClr val="accent1"/>
-        </a:buClr>
-        <a:buSzPct val="80000"/>
-        <a:buFont typeface="Wingdings 3" charset="2"/>
-        <a:buChar char=""/>
-        <a:defRPr sz="1200" kern="1200">
+        <a:buFont typeface="Arial"/>
+        <a:buChar char="»"/>
+        <a:defRPr sz="2000" kern="1200">
           <a:solidFill>
-            <a:schemeClr val="tx1">
-              <a:lumMod val="75000"/>
-              <a:lumOff val="25000"/>
-            </a:schemeClr>
+            <a:schemeClr val="tx1"/>
           </a:solidFill>
           <a:latin typeface="+mn-lt"/>
           <a:ea typeface="+mn-ea"/>
@@ -6364,23 +3801,13 @@
       </a:lvl5pPr>
       <a:lvl6pPr marL="2514600" indent="-228600" algn="l" defTabSz="457200" rtl="0" eaLnBrk="1" latinLnBrk="0" hangingPunct="1">
         <a:spcBef>
-          <a:spcPts val="1000"/>
+          <a:spcPct val="20000"/>
         </a:spcBef>
-        <a:spcAft>
-          <a:spcPts val="0"/>
-        </a:spcAft>
-        <a:buClr>
-          <a:schemeClr val="accent1"/>
-        </a:buClr>
-        <a:buSzPct val="80000"/>
-        <a:buFont typeface="Wingdings 3" charset="2"/>
-        <a:buChar char=""/>
-        <a:defRPr sz="1200" kern="1200">
+        <a:buFont typeface="Arial"/>
+        <a:buChar char="•"/>
+        <a:defRPr sz="2000" kern="1200">
           <a:solidFill>
-            <a:schemeClr val="tx1">
-              <a:lumMod val="75000"/>
-              <a:lumOff val="25000"/>
-            </a:schemeClr>
+            <a:schemeClr val="tx1"/>
           </a:solidFill>
           <a:latin typeface="+mn-lt"/>
           <a:ea typeface="+mn-ea"/>
@@ -6389,23 +3816,13 @@
       </a:lvl6pPr>
       <a:lvl7pPr marL="2971800" indent="-228600" algn="l" defTabSz="457200" rtl="0" eaLnBrk="1" latinLnBrk="0" hangingPunct="1">
         <a:spcBef>
-          <a:spcPts val="1000"/>
+          <a:spcPct val="20000"/>
         </a:spcBef>
-        <a:spcAft>
-          <a:spcPts val="0"/>
-        </a:spcAft>
-        <a:buClr>
-          <a:schemeClr val="accent1"/>
-        </a:buClr>
-        <a:buSzPct val="80000"/>
-        <a:buFont typeface="Wingdings 3" charset="2"/>
-        <a:buChar char=""/>
-        <a:defRPr sz="1200" kern="1200">
+        <a:buFont typeface="Arial"/>
+        <a:buChar char="•"/>
+        <a:defRPr sz="2000" kern="1200">
           <a:solidFill>
-            <a:schemeClr val="tx1">
-              <a:lumMod val="75000"/>
-              <a:lumOff val="25000"/>
-            </a:schemeClr>
+            <a:schemeClr val="tx1"/>
           </a:solidFill>
           <a:latin typeface="+mn-lt"/>
           <a:ea typeface="+mn-ea"/>
@@ -6414,23 +3831,13 @@
       </a:lvl7pPr>
       <a:lvl8pPr marL="3429000" indent="-228600" algn="l" defTabSz="457200" rtl="0" eaLnBrk="1" latinLnBrk="0" hangingPunct="1">
         <a:spcBef>
-          <a:spcPts val="1000"/>
+          <a:spcPct val="20000"/>
         </a:spcBef>
-        <a:spcAft>
-          <a:spcPts val="0"/>
-        </a:spcAft>
-        <a:buClr>
-          <a:schemeClr val="accent1"/>
-        </a:buClr>
-        <a:buSzPct val="80000"/>
-        <a:buFont typeface="Wingdings 3" charset="2"/>
-        <a:buChar char=""/>
-        <a:defRPr sz="1200" kern="1200">
+        <a:buFont typeface="Arial"/>
+        <a:buChar char="•"/>
+        <a:defRPr sz="2000" kern="1200">
           <a:solidFill>
-            <a:schemeClr val="tx1">
-              <a:lumMod val="75000"/>
-              <a:lumOff val="25000"/>
-            </a:schemeClr>
+            <a:schemeClr val="tx1"/>
           </a:solidFill>
           <a:latin typeface="+mn-lt"/>
           <a:ea typeface="+mn-ea"/>
@@ -6439,23 +3846,13 @@
       </a:lvl8pPr>
       <a:lvl9pPr marL="3886200" indent="-228600" algn="l" defTabSz="457200" rtl="0" eaLnBrk="1" latinLnBrk="0" hangingPunct="1">
         <a:spcBef>
-          <a:spcPts val="1000"/>
+          <a:spcPct val="20000"/>
         </a:spcBef>
-        <a:spcAft>
-          <a:spcPts val="0"/>
-        </a:spcAft>
-        <a:buClr>
-          <a:schemeClr val="accent1"/>
-        </a:buClr>
-        <a:buSzPct val="80000"/>
-        <a:buFont typeface="Wingdings 3" charset="2"/>
-        <a:buChar char=""/>
-        <a:defRPr sz="1200" kern="1200">
+        <a:buFont typeface="Arial"/>
+        <a:buChar char="•"/>
+        <a:defRPr sz="2000" kern="1200">
           <a:solidFill>
-            <a:schemeClr val="tx1">
-              <a:lumMod val="75000"/>
-              <a:lumOff val="25000"/>
-            </a:schemeClr>
+            <a:schemeClr val="tx1"/>
           </a:solidFill>
           <a:latin typeface="+mn-lt"/>
           <a:ea typeface="+mn-ea"/>
@@ -6563,7 +3960,7 @@
 </file>
 
 <file path=ppt/slides/slide1.xml><?xml version="1.0" encoding="utf-8"?>
-<p:sld xmlns:a="http://schemas.openxmlformats.org/drawingml/2006/main" xmlns:r="http://schemas.openxmlformats.org/officeDocument/2006/relationships" xmlns:p="http://schemas.openxmlformats.org/presentationml/2006/main">
+<p:sld xmlns:a="http://schemas.openxmlformats.org/drawingml/2006/main" xmlns:p="http://schemas.openxmlformats.org/presentationml/2006/main" xmlns:r="http://schemas.openxmlformats.org/officeDocument/2006/relationships">
   <p:cSld>
     <p:spTree>
       <p:nvGrpSpPr>
@@ -6571,127 +3968,7 @@
         <p:cNvGrpSpPr/>
         <p:nvPr/>
       </p:nvGrpSpPr>
-      <p:grpSpPr>
-        <a:xfrm>
-          <a:off x="0" y="0"/>
-          <a:ext cx="0" cy="0"/>
-          <a:chOff x="0" y="0"/>
-          <a:chExt cx="0" cy="0"/>
-        </a:xfrm>
-      </p:grpSpPr>
-      <p:sp>
-        <p:nvSpPr>
-          <p:cNvPr id="2" name="TextBox 1"/>
-          <p:cNvSpPr txBox="1"/>
-          <p:nvPr/>
-        </p:nvSpPr>
-        <p:spPr>
-          <a:xfrm>
-            <a:off x="3117273" y="1667102"/>
-            <a:ext cx="6352309" cy="954107"/>
-          </a:xfrm>
-          <a:prstGeom prst="rect">
-            <a:avLst/>
-          </a:prstGeom>
-          <a:noFill/>
-        </p:spPr>
-        <p:txBody>
-          <a:bodyPr wrap="square" rtlCol="0">
-            <a:spAutoFit/>
-          </a:bodyPr>
-          <a:lstStyle/>
-          <a:p>
-            <a:r>
-              <a:rPr lang="en-US" sz="2800" b="1" dirty="0" smtClean="0">
-                <a:latin typeface="Arial Black" panose="020B0A04020102020204" pitchFamily="34" charset="0"/>
-              </a:rPr>
-              <a:t>End-to-End Ride-Hailing ETA Prediction</a:t>
-            </a:r>
-            <a:endParaRPr lang="en-US" sz="2800" b="1" dirty="0">
-              <a:latin typeface="Arial Black" panose="020B0A04020102020204" pitchFamily="34" charset="0"/>
-            </a:endParaRPr>
-          </a:p>
-        </p:txBody>
-      </p:sp>
-      <p:sp>
-        <p:nvSpPr>
-          <p:cNvPr id="3" name="TextBox 2"/>
-          <p:cNvSpPr txBox="1"/>
-          <p:nvPr/>
-        </p:nvSpPr>
-        <p:spPr>
-          <a:xfrm>
-            <a:off x="3532909" y="3345873"/>
-            <a:ext cx="3581400" cy="369332"/>
-          </a:xfrm>
-          <a:prstGeom prst="rect">
-            <a:avLst/>
-          </a:prstGeom>
-          <a:noFill/>
-        </p:spPr>
-        <p:txBody>
-          <a:bodyPr wrap="square" rtlCol="0">
-            <a:spAutoFit/>
-          </a:bodyPr>
-          <a:lstStyle/>
-          <a:p>
-            <a:r>
-              <a:rPr lang="en-US" dirty="0" smtClean="0"/>
-              <a:t>BY – </a:t>
-            </a:r>
-            <a:r>
-              <a:rPr lang="en-US" dirty="0" err="1" smtClean="0"/>
-              <a:t>Abhijith</a:t>
-            </a:r>
-            <a:r>
-              <a:rPr lang="en-US" dirty="0" smtClean="0"/>
-              <a:t> and </a:t>
-            </a:r>
-            <a:r>
-              <a:rPr lang="en-US" dirty="0" err="1" smtClean="0"/>
-              <a:t>Shubhra</a:t>
-            </a:r>
-            <a:endParaRPr lang="en-US" dirty="0"/>
-          </a:p>
-        </p:txBody>
-      </p:sp>
-    </p:spTree>
-    <p:extLst>
-      <p:ext uri="{BB962C8B-B14F-4D97-AF65-F5344CB8AC3E}">
-        <p14:creationId xmlns:p14="http://schemas.microsoft.com/office/powerpoint/2010/main" val="1253379057"/>
-      </p:ext>
-    </p:extLst>
-  </p:cSld>
-  <p:clrMapOvr>
-    <a:masterClrMapping/>
-  </p:clrMapOvr>
-  <p:timing>
-    <p:tnLst>
-      <p:par>
-        <p:cTn id="1" dur="indefinite" restart="never" nodeType="tmRoot"/>
-      </p:par>
-    </p:tnLst>
-  </p:timing>
-</p:sld>
-</file>
-
-<file path=ppt/slides/slide2.xml><?xml version="1.0" encoding="utf-8"?>
-<p:sld xmlns:a="http://schemas.openxmlformats.org/drawingml/2006/main" xmlns:r="http://schemas.openxmlformats.org/officeDocument/2006/relationships" xmlns:p="http://schemas.openxmlformats.org/presentationml/2006/main">
-  <p:cSld>
-    <p:spTree>
-      <p:nvGrpSpPr>
-        <p:cNvPr id="1" name=""/>
-        <p:cNvGrpSpPr/>
-        <p:nvPr/>
-      </p:nvGrpSpPr>
-      <p:grpSpPr>
-        <a:xfrm>
-          <a:off x="0" y="0"/>
-          <a:ext cx="0" cy="0"/>
-          <a:chOff x="0" y="0"/>
-          <a:chExt cx="0" cy="0"/>
-        </a:xfrm>
-      </p:grpSpPr>
+      <p:grpSpPr/>
       <p:sp>
         <p:nvSpPr>
           <p:cNvPr id="2" name="TextBox 1"/>
@@ -6735,7 +4012,7 @@
         </p:nvSpPr>
         <p:spPr>
           <a:xfrm>
-            <a:off x="731520" y="1382550"/>
+            <a:off x="731520" y="1371600"/>
             <a:ext cx="10698480" cy="4754880"/>
           </a:xfrm>
           <a:prstGeom prst="rect">
@@ -6760,7 +4037,6 @@
               </a:defRPr>
             </a:pPr>
             <a:r>
-              <a:rPr dirty="0"/>
               <a:t>• Objective: Predict NYC Taxi trip duration and ETA using spatial, temporal, and vendor attributes.</a:t>
             </a:r>
           </a:p>
@@ -6776,7 +4052,6 @@
               </a:defRPr>
             </a:pPr>
             <a:r>
-              <a:rPr dirty="0"/>
               <a:t>• System Focus: Schema validation, DVC pipeline tracking, containerized serving, automated testing, and statistical drift detection.</a:t>
             </a:r>
           </a:p>
@@ -6792,56 +4067,7 @@
               </a:defRPr>
             </a:pPr>
             <a:r>
-              <a:rPr dirty="0"/>
-              <a:t>• Core Tech Stack: Python, </a:t>
-            </a:r>
-            <a:r>
-              <a:rPr dirty="0" err="1"/>
-              <a:t>Pandera</a:t>
-            </a:r>
-            <a:r>
-              <a:rPr dirty="0"/>
-              <a:t>, DVC, </a:t>
-            </a:r>
-            <a:r>
-              <a:rPr dirty="0" err="1"/>
-              <a:t>Scikit</a:t>
-            </a:r>
-            <a:r>
-              <a:rPr dirty="0"/>
-              <a:t>-Learn, </a:t>
-            </a:r>
-            <a:r>
-              <a:rPr dirty="0" err="1"/>
-              <a:t>XGBoost</a:t>
-            </a:r>
-            <a:r>
-              <a:rPr dirty="0"/>
-              <a:t>, </a:t>
-            </a:r>
-            <a:r>
-              <a:rPr dirty="0" err="1"/>
-              <a:t>MLflow</a:t>
-            </a:r>
-            <a:r>
-              <a:rPr dirty="0"/>
-              <a:t>, </a:t>
-            </a:r>
-            <a:r>
-              <a:rPr dirty="0" err="1"/>
-              <a:t>FastAPI</a:t>
-            </a:r>
-            <a:r>
-              <a:rPr dirty="0"/>
-              <a:t>, Docker, </a:t>
-            </a:r>
-            <a:r>
-              <a:rPr dirty="0" err="1"/>
-              <a:t>Pytest</a:t>
-            </a:r>
-            <a:r>
-              <a:rPr dirty="0"/>
-              <a:t>, Playwright.</a:t>
+              <a:t>• Core Tech Stack: Python, Pandera, DVC, Scikit-Learn, XGBoost, MLflow, FastAPI, Docker, Pytest, Playwright.</a:t>
             </a:r>
           </a:p>
           <a:p>
@@ -6856,32 +4082,7 @@
               </a:defRPr>
             </a:pPr>
             <a:r>
-              <a:rPr dirty="0"/>
-              <a:t>• Data Flow: Raw Data (NYC.csv) → </a:t>
-            </a:r>
-            <a:r>
-              <a:rPr dirty="0" err="1"/>
-              <a:t>Pandera</a:t>
-            </a:r>
-            <a:r>
-              <a:rPr dirty="0"/>
-              <a:t> Validation → DVC Feature Store → </a:t>
-            </a:r>
-            <a:r>
-              <a:rPr dirty="0" err="1"/>
-              <a:t>MLflow</a:t>
-            </a:r>
-            <a:r>
-              <a:rPr dirty="0"/>
-              <a:t> Engine → Docker/</a:t>
-            </a:r>
-            <a:r>
-              <a:rPr dirty="0" err="1"/>
-              <a:t>FastAPI</a:t>
-            </a:r>
-            <a:r>
-              <a:rPr dirty="0"/>
-              <a:t> Container → Playwright Tests → Drift Monitor.</a:t>
+              <a:t>• Data Flow: Raw Data (NYC.csv) → Pandera Validation → DVC Feature Store → MLflow Engine → Docker/FastAPI Container → Playwright Tests → Drift Monitor.</a:t>
             </a:r>
           </a:p>
         </p:txBody>
@@ -6891,18 +4092,11 @@
   <p:clrMapOvr>
     <a:masterClrMapping/>
   </p:clrMapOvr>
-  <p:timing>
-    <p:tnLst>
-      <p:par>
-        <p:cTn id="1" dur="indefinite" restart="never" nodeType="tmRoot"/>
-      </p:par>
-    </p:tnLst>
-  </p:timing>
 </p:sld>
 </file>
 
-<file path=ppt/slides/slide3.xml><?xml version="1.0" encoding="utf-8"?>
-<p:sld xmlns:a="http://schemas.openxmlformats.org/drawingml/2006/main" xmlns:r="http://schemas.openxmlformats.org/officeDocument/2006/relationships" xmlns:p="http://schemas.openxmlformats.org/presentationml/2006/main">
+<file path=ppt/slides/slide2.xml><?xml version="1.0" encoding="utf-8"?>
+<p:sld xmlns:a="http://schemas.openxmlformats.org/drawingml/2006/main" xmlns:p="http://schemas.openxmlformats.org/presentationml/2006/main" xmlns:r="http://schemas.openxmlformats.org/officeDocument/2006/relationships">
   <p:cSld>
     <p:spTree>
       <p:nvGrpSpPr>
@@ -6910,14 +4104,7 @@
         <p:cNvGrpSpPr/>
         <p:nvPr/>
       </p:nvGrpSpPr>
-      <p:grpSpPr>
-        <a:xfrm>
-          <a:off x="0" y="0"/>
-          <a:ext cx="0" cy="0"/>
-          <a:chOff x="0" y="0"/>
-          <a:chExt cx="0" cy="0"/>
-        </a:xfrm>
-      </p:grpSpPr>
+      <p:grpSpPr/>
       <p:sp>
         <p:nvSpPr>
           <p:cNvPr id="2" name="TextBox 1"/>
@@ -7041,18 +4228,11 @@
   <p:clrMapOvr>
     <a:masterClrMapping/>
   </p:clrMapOvr>
-  <p:timing>
-    <p:tnLst>
-      <p:par>
-        <p:cTn id="1" dur="indefinite" restart="never" nodeType="tmRoot"/>
-      </p:par>
-    </p:tnLst>
-  </p:timing>
 </p:sld>
 </file>
 
-<file path=ppt/slides/slide4.xml><?xml version="1.0" encoding="utf-8"?>
-<p:sld xmlns:a="http://schemas.openxmlformats.org/drawingml/2006/main" xmlns:r="http://schemas.openxmlformats.org/officeDocument/2006/relationships" xmlns:p="http://schemas.openxmlformats.org/presentationml/2006/main">
+<file path=ppt/slides/slide3.xml><?xml version="1.0" encoding="utf-8"?>
+<p:sld xmlns:a="http://schemas.openxmlformats.org/drawingml/2006/main" xmlns:p="http://schemas.openxmlformats.org/presentationml/2006/main" xmlns:r="http://schemas.openxmlformats.org/officeDocument/2006/relationships">
   <p:cSld>
     <p:spTree>
       <p:nvGrpSpPr>
@@ -7060,14 +4240,7 @@
         <p:cNvGrpSpPr/>
         <p:nvPr/>
       </p:nvGrpSpPr>
-      <p:grpSpPr>
-        <a:xfrm>
-          <a:off x="0" y="0"/>
-          <a:ext cx="0" cy="0"/>
-          <a:chOff x="0" y="0"/>
-          <a:chExt cx="0" cy="0"/>
-        </a:xfrm>
-      </p:grpSpPr>
+      <p:grpSpPr/>
       <p:sp>
         <p:nvSpPr>
           <p:cNvPr id="2" name="TextBox 1"/>
@@ -7191,18 +4364,11 @@
   <p:clrMapOvr>
     <a:masterClrMapping/>
   </p:clrMapOvr>
-  <p:timing>
-    <p:tnLst>
-      <p:par>
-        <p:cTn id="1" dur="indefinite" restart="never" nodeType="tmRoot"/>
-      </p:par>
-    </p:tnLst>
-  </p:timing>
 </p:sld>
 </file>
 
-<file path=ppt/slides/slide5.xml><?xml version="1.0" encoding="utf-8"?>
-<p:sld xmlns:a="http://schemas.openxmlformats.org/drawingml/2006/main" xmlns:r="http://schemas.openxmlformats.org/officeDocument/2006/relationships" xmlns:p="http://schemas.openxmlformats.org/presentationml/2006/main">
+<file path=ppt/slides/slide4.xml><?xml version="1.0" encoding="utf-8"?>
+<p:sld xmlns:a="http://schemas.openxmlformats.org/drawingml/2006/main" xmlns:p="http://schemas.openxmlformats.org/presentationml/2006/main" xmlns:r="http://schemas.openxmlformats.org/officeDocument/2006/relationships">
   <p:cSld>
     <p:spTree>
       <p:nvGrpSpPr>
@@ -7210,14 +4376,7 @@
         <p:cNvGrpSpPr/>
         <p:nvPr/>
       </p:nvGrpSpPr>
-      <p:grpSpPr>
-        <a:xfrm>
-          <a:off x="0" y="0"/>
-          <a:ext cx="0" cy="0"/>
-          <a:chOff x="0" y="0"/>
-          <a:chExt cx="0" cy="0"/>
-        </a:xfrm>
-      </p:grpSpPr>
+      <p:grpSpPr/>
       <p:sp>
         <p:nvSpPr>
           <p:cNvPr id="2" name="TextBox 1"/>
@@ -7341,18 +4500,11 @@
   <p:clrMapOvr>
     <a:masterClrMapping/>
   </p:clrMapOvr>
-  <p:timing>
-    <p:tnLst>
-      <p:par>
-        <p:cTn id="1" dur="indefinite" restart="never" nodeType="tmRoot"/>
-      </p:par>
-    </p:tnLst>
-  </p:timing>
 </p:sld>
 </file>
 
-<file path=ppt/slides/slide6.xml><?xml version="1.0" encoding="utf-8"?>
-<p:sld xmlns:a="http://schemas.openxmlformats.org/drawingml/2006/main" xmlns:r="http://schemas.openxmlformats.org/officeDocument/2006/relationships" xmlns:p="http://schemas.openxmlformats.org/presentationml/2006/main">
+<file path=ppt/slides/slide5.xml><?xml version="1.0" encoding="utf-8"?>
+<p:sld xmlns:a="http://schemas.openxmlformats.org/drawingml/2006/main" xmlns:p="http://schemas.openxmlformats.org/presentationml/2006/main" xmlns:r="http://schemas.openxmlformats.org/officeDocument/2006/relationships">
   <p:cSld>
     <p:spTree>
       <p:nvGrpSpPr>
@@ -7360,14 +4512,7 @@
         <p:cNvGrpSpPr/>
         <p:nvPr/>
       </p:nvGrpSpPr>
-      <p:grpSpPr>
-        <a:xfrm>
-          <a:off x="0" y="0"/>
-          <a:ext cx="0" cy="0"/>
-          <a:chOff x="0" y="0"/>
-          <a:chExt cx="0" cy="0"/>
-        </a:xfrm>
-      </p:grpSpPr>
+      <p:grpSpPr/>
       <p:sp>
         <p:nvSpPr>
           <p:cNvPr id="2" name="TextBox 1"/>
@@ -7491,18 +4636,11 @@
   <p:clrMapOvr>
     <a:masterClrMapping/>
   </p:clrMapOvr>
-  <p:timing>
-    <p:tnLst>
-      <p:par>
-        <p:cTn id="1" dur="indefinite" restart="never" nodeType="tmRoot"/>
-      </p:par>
-    </p:tnLst>
-  </p:timing>
 </p:sld>
 </file>
 
-<file path=ppt/slides/slide7.xml><?xml version="1.0" encoding="utf-8"?>
-<p:sld xmlns:a="http://schemas.openxmlformats.org/drawingml/2006/main" xmlns:r="http://schemas.openxmlformats.org/officeDocument/2006/relationships" xmlns:p="http://schemas.openxmlformats.org/presentationml/2006/main">
+<file path=ppt/slides/slide6.xml><?xml version="1.0" encoding="utf-8"?>
+<p:sld xmlns:a="http://schemas.openxmlformats.org/drawingml/2006/main" xmlns:p="http://schemas.openxmlformats.org/presentationml/2006/main" xmlns:r="http://schemas.openxmlformats.org/officeDocument/2006/relationships">
   <p:cSld>
     <p:spTree>
       <p:nvGrpSpPr>
@@ -7510,14 +4648,7 @@
         <p:cNvGrpSpPr/>
         <p:nvPr/>
       </p:nvGrpSpPr>
-      <p:grpSpPr>
-        <a:xfrm>
-          <a:off x="0" y="0"/>
-          <a:ext cx="0" cy="0"/>
-          <a:chOff x="0" y="0"/>
-          <a:chExt cx="0" cy="0"/>
-        </a:xfrm>
-      </p:grpSpPr>
+      <p:grpSpPr/>
       <p:sp>
         <p:nvSpPr>
           <p:cNvPr id="2" name="TextBox 1"/>
@@ -7641,18 +4772,11 @@
   <p:clrMapOvr>
     <a:masterClrMapping/>
   </p:clrMapOvr>
-  <p:timing>
-    <p:tnLst>
-      <p:par>
-        <p:cTn id="1" dur="indefinite" restart="never" nodeType="tmRoot"/>
-      </p:par>
-    </p:tnLst>
-  </p:timing>
 </p:sld>
 </file>
 
-<file path=ppt/slides/slide8.xml><?xml version="1.0" encoding="utf-8"?>
-<p:sld xmlns:a="http://schemas.openxmlformats.org/drawingml/2006/main" xmlns:r="http://schemas.openxmlformats.org/officeDocument/2006/relationships" xmlns:p="http://schemas.openxmlformats.org/presentationml/2006/main">
+<file path=ppt/slides/slide7.xml><?xml version="1.0" encoding="utf-8"?>
+<p:sld xmlns:a="http://schemas.openxmlformats.org/drawingml/2006/main" xmlns:p="http://schemas.openxmlformats.org/presentationml/2006/main" xmlns:r="http://schemas.openxmlformats.org/officeDocument/2006/relationships">
   <p:cSld>
     <p:spTree>
       <p:nvGrpSpPr>
@@ -7660,14 +4784,7 @@
         <p:cNvGrpSpPr/>
         <p:nvPr/>
       </p:nvGrpSpPr>
-      <p:grpSpPr>
-        <a:xfrm>
-          <a:off x="0" y="0"/>
-          <a:ext cx="0" cy="0"/>
-          <a:chOff x="0" y="0"/>
-          <a:chExt cx="0" cy="0"/>
-        </a:xfrm>
-      </p:grpSpPr>
+      <p:grpSpPr/>
       <p:sp>
         <p:nvSpPr>
           <p:cNvPr id="2" name="TextBox 1"/>
@@ -7791,274 +4908,10 @@
   <p:clrMapOvr>
     <a:masterClrMapping/>
   </p:clrMapOvr>
-  <p:timing>
-    <p:tnLst>
-      <p:par>
-        <p:cTn id="1" dur="indefinite" restart="never" nodeType="tmRoot"/>
-      </p:par>
-    </p:tnLst>
-  </p:timing>
 </p:sld>
 </file>
 
 <file path=ppt/theme/theme1.xml><?xml version="1.0" encoding="utf-8"?>
-<a:theme xmlns:a="http://schemas.openxmlformats.org/drawingml/2006/main" name="Facet">
-  <a:themeElements>
-    <a:clrScheme name="Facet">
-      <a:dk1>
-        <a:sysClr val="windowText" lastClr="000000"/>
-      </a:dk1>
-      <a:lt1>
-        <a:sysClr val="window" lastClr="FFFFFF"/>
-      </a:lt1>
-      <a:dk2>
-        <a:srgbClr val="2C3C43"/>
-      </a:dk2>
-      <a:lt2>
-        <a:srgbClr val="EBEBEB"/>
-      </a:lt2>
-      <a:accent1>
-        <a:srgbClr val="90C226"/>
-      </a:accent1>
-      <a:accent2>
-        <a:srgbClr val="54A021"/>
-      </a:accent2>
-      <a:accent3>
-        <a:srgbClr val="E6B91E"/>
-      </a:accent3>
-      <a:accent4>
-        <a:srgbClr val="E76618"/>
-      </a:accent4>
-      <a:accent5>
-        <a:srgbClr val="C42F1A"/>
-      </a:accent5>
-      <a:accent6>
-        <a:srgbClr val="918655"/>
-      </a:accent6>
-      <a:hlink>
-        <a:srgbClr val="99CA3C"/>
-      </a:hlink>
-      <a:folHlink>
-        <a:srgbClr val="B9D181"/>
-      </a:folHlink>
-    </a:clrScheme>
-    <a:fontScheme name="Facet">
-      <a:majorFont>
-        <a:latin typeface="Trebuchet MS" panose="020B0603020202020204"/>
-        <a:ea typeface=""/>
-        <a:cs typeface=""/>
-        <a:font script="Jpan" typeface="メイリオ"/>
-        <a:font script="Hang" typeface="맑은 고딕"/>
-        <a:font script="Hans" typeface="方正姚体"/>
-        <a:font script="Hant" typeface="微軟正黑體"/>
-        <a:font script="Arab" typeface="Tahoma"/>
-        <a:font script="Hebr" typeface="Arial"/>
-        <a:font script="Thai" typeface="Cordia New"/>
-        <a:font script="Ethi" typeface="Nyala"/>
-        <a:font script="Beng" typeface="Vrinda"/>
-        <a:font script="Gujr" typeface="Shruti"/>
-        <a:font script="Khmr" typeface="DaunPenh"/>
-        <a:font script="Knda" typeface="Tunga"/>
-        <a:font script="Guru" typeface="Raavi"/>
-        <a:font script="Cans" typeface="Euphemia"/>
-        <a:font script="Cher" typeface="Plantagenet Cherokee"/>
-        <a:font script="Yiii" typeface="Microsoft Yi Baiti"/>
-        <a:font script="Tibt" typeface="Microsoft Himalaya"/>
-        <a:font script="Thaa" typeface="MV Boli"/>
-        <a:font script="Deva" typeface="Mangal"/>
-        <a:font script="Telu" typeface="Gautami"/>
-        <a:font script="Taml" typeface="Latha"/>
-        <a:font script="Syrc" typeface="Estrangelo Edessa"/>
-        <a:font script="Orya" typeface="Kalinga"/>
-        <a:font script="Mlym" typeface="Kartika"/>
-        <a:font script="Laoo" typeface="DokChampa"/>
-        <a:font script="Sinh" typeface="Iskoola Pota"/>
-        <a:font script="Mong" typeface="Mongolian Baiti"/>
-        <a:font script="Viet" typeface="Tahoma"/>
-        <a:font script="Uigh" typeface="Microsoft Uighur"/>
-        <a:font script="Geor" typeface="Sylfaen"/>
-      </a:majorFont>
-      <a:minorFont>
-        <a:latin typeface="Trebuchet MS" panose="020B0603020202020204"/>
-        <a:ea typeface=""/>
-        <a:cs typeface=""/>
-        <a:font script="Jpan" typeface="メイリオ"/>
-        <a:font script="Hang" typeface="HY그래픽M"/>
-        <a:font script="Hans" typeface="华文新魏"/>
-        <a:font script="Hant" typeface="微軟正黑體"/>
-        <a:font script="Arab" typeface="Tahoma"/>
-        <a:font script="Hebr" typeface="Gisha"/>
-        <a:font script="Thai" typeface="IrisUPC"/>
-        <a:font script="Ethi" typeface="Nyala"/>
-        <a:font script="Beng" typeface="Vrinda"/>
-        <a:font script="Gujr" typeface="Shruti"/>
-        <a:font script="Khmr" typeface="DaunPenh"/>
-        <a:font script="Knda" typeface="Tunga"/>
-        <a:font script="Guru" typeface="Raavi"/>
-        <a:font script="Cans" typeface="Euphemia"/>
-        <a:font script="Cher" typeface="Plantagenet Cherokee"/>
-        <a:font script="Yiii" typeface="Microsoft Yi Baiti"/>
-        <a:font script="Tibt" typeface="Microsoft Himalaya"/>
-        <a:font script="Thaa" typeface="MV Boli"/>
-        <a:font script="Deva" typeface="Mangal"/>
-        <a:font script="Telu" typeface="Gautami"/>
-        <a:font script="Taml" typeface="Latha"/>
-        <a:font script="Syrc" typeface="Estrangelo Edessa"/>
-        <a:font script="Orya" typeface="Kalinga"/>
-        <a:font script="Mlym" typeface="Kartika"/>
-        <a:font script="Laoo" typeface="DokChampa"/>
-        <a:font script="Sinh" typeface="Iskoola Pota"/>
-        <a:font script="Mong" typeface="Mongolian Baiti"/>
-        <a:font script="Viet" typeface="Arial"/>
-        <a:font script="Uigh" typeface="Microsoft Uighur"/>
-        <a:font script="Geor" typeface="Sylfaen"/>
-      </a:minorFont>
-    </a:fontScheme>
-    <a:fmtScheme name="Facet">
-      <a:fillStyleLst>
-        <a:solidFill>
-          <a:schemeClr val="phClr"/>
-        </a:solidFill>
-        <a:gradFill rotWithShape="1">
-          <a:gsLst>
-            <a:gs pos="0">
-              <a:schemeClr val="phClr">
-                <a:tint val="65000"/>
-                <a:lumMod val="110000"/>
-              </a:schemeClr>
-            </a:gs>
-            <a:gs pos="88000">
-              <a:schemeClr val="phClr">
-                <a:tint val="90000"/>
-              </a:schemeClr>
-            </a:gs>
-          </a:gsLst>
-          <a:lin ang="5400000" scaled="0"/>
-        </a:gradFill>
-        <a:gradFill rotWithShape="1">
-          <a:gsLst>
-            <a:gs pos="0">
-              <a:schemeClr val="phClr">
-                <a:tint val="96000"/>
-                <a:lumMod val="100000"/>
-              </a:schemeClr>
-            </a:gs>
-            <a:gs pos="78000">
-              <a:schemeClr val="phClr">
-                <a:shade val="94000"/>
-                <a:lumMod val="94000"/>
-              </a:schemeClr>
-            </a:gs>
-          </a:gsLst>
-          <a:lin ang="5400000" scaled="0"/>
-        </a:gradFill>
-      </a:fillStyleLst>
-      <a:lnStyleLst>
-        <a:ln w="12700" cap="rnd" cmpd="sng" algn="ctr">
-          <a:solidFill>
-            <a:schemeClr val="phClr"/>
-          </a:solidFill>
-          <a:prstDash val="solid"/>
-        </a:ln>
-        <a:ln w="19050" cap="rnd" cmpd="sng" algn="ctr">
-          <a:solidFill>
-            <a:schemeClr val="phClr"/>
-          </a:solidFill>
-          <a:prstDash val="solid"/>
-        </a:ln>
-        <a:ln w="25400" cap="rnd" cmpd="sng" algn="ctr">
-          <a:solidFill>
-            <a:schemeClr val="phClr"/>
-          </a:solidFill>
-          <a:prstDash val="solid"/>
-        </a:ln>
-      </a:lnStyleLst>
-      <a:effectStyleLst>
-        <a:effectStyle>
-          <a:effectLst/>
-        </a:effectStyle>
-        <a:effectStyle>
-          <a:effectLst>
-            <a:outerShdw blurRad="38100" dist="25400" dir="5400000" rotWithShape="0">
-              <a:srgbClr val="000000">
-                <a:alpha val="35000"/>
-              </a:srgbClr>
-            </a:outerShdw>
-          </a:effectLst>
-        </a:effectStyle>
-        <a:effectStyle>
-          <a:effectLst>
-            <a:outerShdw blurRad="50800" dist="38100" dir="5400000" rotWithShape="0">
-              <a:srgbClr val="000000">
-                <a:alpha val="35000"/>
-              </a:srgbClr>
-            </a:outerShdw>
-          </a:effectLst>
-          <a:scene3d>
-            <a:camera prst="orthographicFront">
-              <a:rot lat="0" lon="0" rev="0"/>
-            </a:camera>
-            <a:lightRig rig="threePt" dir="tl"/>
-          </a:scene3d>
-          <a:sp3d prstMaterial="plastic">
-            <a:bevelT w="0" h="0"/>
-          </a:sp3d>
-        </a:effectStyle>
-      </a:effectStyleLst>
-      <a:bgFillStyleLst>
-        <a:solidFill>
-          <a:schemeClr val="phClr"/>
-        </a:solidFill>
-        <a:gradFill rotWithShape="1">
-          <a:gsLst>
-            <a:gs pos="0">
-              <a:schemeClr val="phClr">
-                <a:tint val="90000"/>
-                <a:lumMod val="104000"/>
-              </a:schemeClr>
-            </a:gs>
-            <a:gs pos="94000">
-              <a:schemeClr val="phClr">
-                <a:shade val="96000"/>
-                <a:lumMod val="82000"/>
-              </a:schemeClr>
-            </a:gs>
-          </a:gsLst>
-          <a:lin ang="5400000" scaled="0"/>
-        </a:gradFill>
-        <a:gradFill rotWithShape="1">
-          <a:gsLst>
-            <a:gs pos="0">
-              <a:schemeClr val="phClr">
-                <a:tint val="90000"/>
-                <a:lumMod val="110000"/>
-              </a:schemeClr>
-            </a:gs>
-            <a:gs pos="100000">
-              <a:schemeClr val="phClr">
-                <a:shade val="94000"/>
-                <a:lumMod val="96000"/>
-              </a:schemeClr>
-            </a:gs>
-          </a:gsLst>
-          <a:path path="circle">
-            <a:fillToRect l="50000" t="50000" r="100000" b="100000"/>
-          </a:path>
-        </a:gradFill>
-      </a:bgFillStyleLst>
-    </a:fmtScheme>
-  </a:themeElements>
-  <a:objectDefaults/>
-  <a:extraClrSchemeLst/>
-  <a:extLst>
-    <a:ext uri="{05A4C25C-085E-4340-85A3-A5531E510DB2}">
-      <thm15:themeFamily xmlns:thm15="http://schemas.microsoft.com/office/thememl/2012/main" name="Facet" id="{C0C680CD-088A-49FC-A102-D699147F32B2}" vid="{CFBC31BA-B70F-4F30-BCAA-4F3011E16C4D}"/>
-    </a:ext>
-  </a:extLst>
-</a:theme>
-</file>
-
-<file path=ppt/theme/theme2.xml><?xml version="1.0" encoding="utf-8"?>
 <a:theme xmlns:a="http://schemas.openxmlformats.org/drawingml/2006/main" name="Office Theme">
   <a:themeElements>
     <a:clrScheme name="Office">
@@ -8069,39 +4922,39 @@
         <a:sysClr val="window" lastClr="FFFFFF"/>
       </a:lt1>
       <a:dk2>
-        <a:srgbClr val="44546A"/>
+        <a:srgbClr val="1F497D"/>
       </a:dk2>
       <a:lt2>
-        <a:srgbClr val="E7E6E6"/>
+        <a:srgbClr val="EEECE1"/>
       </a:lt2>
       <a:accent1>
-        <a:srgbClr val="5B9BD5"/>
+        <a:srgbClr val="4F81BD"/>
       </a:accent1>
       <a:accent2>
-        <a:srgbClr val="ED7D31"/>
+        <a:srgbClr val="C0504D"/>
       </a:accent2>
       <a:accent3>
-        <a:srgbClr val="A5A5A5"/>
+        <a:srgbClr val="9BBB59"/>
       </a:accent3>
       <a:accent4>
-        <a:srgbClr val="FFC000"/>
+        <a:srgbClr val="8064A2"/>
       </a:accent4>
       <a:accent5>
-        <a:srgbClr val="4472C4"/>
+        <a:srgbClr val="4BACC6"/>
       </a:accent5>
       <a:accent6>
-        <a:srgbClr val="70AD47"/>
+        <a:srgbClr val="F79646"/>
       </a:accent6>
       <a:hlink>
-        <a:srgbClr val="0563C1"/>
+        <a:srgbClr val="0000FF"/>
       </a:hlink>
       <a:folHlink>
-        <a:srgbClr val="954F72"/>
+        <a:srgbClr val="800080"/>
       </a:folHlink>
     </a:clrScheme>
     <a:fontScheme name="Office">
       <a:majorFont>
-        <a:latin typeface="Calibri Light" panose="020F0302020204030204"/>
+        <a:latin typeface="Calibri"/>
         <a:ea typeface=""/>
         <a:cs typeface=""/>
         <a:font script="Jpan" typeface="ＭＳ Ｐゴシック"/>
@@ -8136,7 +4989,7 @@
         <a:font script="Geor" typeface="Sylfaen"/>
       </a:majorFont>
       <a:minorFont>
-        <a:latin typeface="Calibri" panose="020F0502020204030204"/>
+        <a:latin typeface="Calibri"/>
         <a:ea typeface=""/>
         <a:cs typeface=""/>
         <a:font script="Jpan" typeface="ＭＳ Ｐゴシック"/>
@@ -8180,141 +5033,520 @@
           <a:gsLst>
             <a:gs pos="0">
               <a:schemeClr val="phClr">
-                <a:lumMod val="110000"/>
-                <a:satMod val="105000"/>
-                <a:tint val="67000"/>
+                <a:tint val="50000"/>
+                <a:satMod val="300000"/>
               </a:schemeClr>
             </a:gs>
-            <a:gs pos="50000">
+            <a:gs pos="35000">
               <a:schemeClr val="phClr">
-                <a:lumMod val="105000"/>
-                <a:satMod val="103000"/>
-                <a:tint val="73000"/>
+                <a:tint val="37000"/>
+                <a:satMod val="300000"/>
               </a:schemeClr>
             </a:gs>
             <a:gs pos="100000">
               <a:schemeClr val="phClr">
-                <a:lumMod val="105000"/>
-                <a:satMod val="109000"/>
-                <a:tint val="81000"/>
+                <a:tint val="15000"/>
+                <a:satMod val="350000"/>
               </a:schemeClr>
             </a:gs>
           </a:gsLst>
-          <a:lin ang="5400000" scaled="0"/>
+          <a:lin ang="16200000" scaled="1"/>
         </a:gradFill>
         <a:gradFill rotWithShape="1">
           <a:gsLst>
             <a:gs pos="0">
               <a:schemeClr val="phClr">
-                <a:satMod val="103000"/>
-                <a:lumMod val="102000"/>
-                <a:tint val="94000"/>
-              </a:schemeClr>
-            </a:gs>
-            <a:gs pos="50000">
-              <a:schemeClr val="phClr">
-                <a:satMod val="110000"/>
-                <a:lumMod val="100000"/>
+                <a:tint val="100000"/>
                 <a:shade val="100000"/>
+                <a:satMod val="130000"/>
               </a:schemeClr>
             </a:gs>
             <a:gs pos="100000">
               <a:schemeClr val="phClr">
-                <a:lumMod val="99000"/>
-                <a:satMod val="120000"/>
-                <a:shade val="78000"/>
+                <a:tint val="50000"/>
+                <a:shade val="100000"/>
+                <a:satMod val="350000"/>
               </a:schemeClr>
             </a:gs>
           </a:gsLst>
-          <a:lin ang="5400000" scaled="0"/>
+          <a:lin ang="16200000" scaled="0"/>
         </a:gradFill>
       </a:fillStyleLst>
       <a:lnStyleLst>
-        <a:ln w="6350" cap="flat" cmpd="sng" algn="ctr">
+        <a:ln w="9525" cap="flat" cmpd="sng" algn="ctr">
+          <a:solidFill>
+            <a:schemeClr val="phClr">
+              <a:shade val="95000"/>
+              <a:satMod val="105000"/>
+            </a:schemeClr>
+          </a:solidFill>
+          <a:prstDash val="solid"/>
+        </a:ln>
+        <a:ln w="25400" cap="flat" cmpd="sng" algn="ctr">
           <a:solidFill>
             <a:schemeClr val="phClr"/>
           </a:solidFill>
           <a:prstDash val="solid"/>
-          <a:miter lim="800000"/>
         </a:ln>
-        <a:ln w="12700" cap="flat" cmpd="sng" algn="ctr">
+        <a:ln w="38100" cap="flat" cmpd="sng" algn="ctr">
           <a:solidFill>
             <a:schemeClr val="phClr"/>
           </a:solidFill>
           <a:prstDash val="solid"/>
-          <a:miter lim="800000"/>
-        </a:ln>
-        <a:ln w="19050" cap="flat" cmpd="sng" algn="ctr">
-          <a:solidFill>
-            <a:schemeClr val="phClr"/>
-          </a:solidFill>
-          <a:prstDash val="solid"/>
-          <a:miter lim="800000"/>
         </a:ln>
       </a:lnStyleLst>
       <a:effectStyleLst>
         <a:effectStyle>
-          <a:effectLst/>
-        </a:effectStyle>
-        <a:effectStyle>
-          <a:effectLst/>
+          <a:effectLst>
+            <a:outerShdw blurRad="40000" dist="20000" dir="5400000" rotWithShape="0">
+              <a:srgbClr val="000000">
+                <a:alpha val="38000"/>
+              </a:srgbClr>
+            </a:outerShdw>
+          </a:effectLst>
         </a:effectStyle>
         <a:effectStyle>
           <a:effectLst>
-            <a:outerShdw blurRad="57150" dist="19050" dir="5400000" algn="ctr" rotWithShape="0">
+            <a:outerShdw blurRad="40000" dist="23000" dir="5400000" rotWithShape="0">
               <a:srgbClr val="000000">
-                <a:alpha val="63000"/>
+                <a:alpha val="35000"/>
               </a:srgbClr>
             </a:outerShdw>
           </a:effectLst>
+        </a:effectStyle>
+        <a:effectStyle>
+          <a:effectLst>
+            <a:outerShdw blurRad="40000" dist="23000" dir="5400000" rotWithShape="0">
+              <a:srgbClr val="000000">
+                <a:alpha val="35000"/>
+              </a:srgbClr>
+            </a:outerShdw>
+          </a:effectLst>
+          <a:scene3d>
+            <a:camera prst="orthographicFront">
+              <a:rot lat="0" lon="0" rev="0"/>
+            </a:camera>
+            <a:lightRig rig="threePt" dir="t">
+              <a:rot lat="0" lon="0" rev="1200000"/>
+            </a:lightRig>
+          </a:scene3d>
+          <a:sp3d>
+            <a:bevelT w="63500" h="25400"/>
+          </a:sp3d>
         </a:effectStyle>
       </a:effectStyleLst>
       <a:bgFillStyleLst>
         <a:solidFill>
           <a:schemeClr val="phClr"/>
         </a:solidFill>
+        <a:gradFill rotWithShape="1">
+          <a:gsLst>
+            <a:gs pos="0">
+              <a:schemeClr val="phClr">
+                <a:tint val="40000"/>
+                <a:satMod val="350000"/>
+              </a:schemeClr>
+            </a:gs>
+            <a:gs pos="40000">
+              <a:schemeClr val="phClr">
+                <a:tint val="45000"/>
+                <a:shade val="99000"/>
+                <a:satMod val="350000"/>
+              </a:schemeClr>
+            </a:gs>
+            <a:gs pos="100000">
+              <a:schemeClr val="phClr">
+                <a:shade val="20000"/>
+                <a:satMod val="255000"/>
+              </a:schemeClr>
+            </a:gs>
+          </a:gsLst>
+          <a:path path="circle">
+            <a:fillToRect l="50000" t="-80000" r="50000" b="180000"/>
+          </a:path>
+        </a:gradFill>
+        <a:gradFill rotWithShape="1">
+          <a:gsLst>
+            <a:gs pos="0">
+              <a:schemeClr val="phClr">
+                <a:tint val="80000"/>
+                <a:satMod val="300000"/>
+              </a:schemeClr>
+            </a:gs>
+            <a:gs pos="100000">
+              <a:schemeClr val="phClr">
+                <a:shade val="30000"/>
+                <a:satMod val="200000"/>
+              </a:schemeClr>
+            </a:gs>
+          </a:gsLst>
+          <a:path path="circle">
+            <a:fillToRect l="50000" t="50000" r="50000" b="50000"/>
+          </a:path>
+        </a:gradFill>
+      </a:bgFillStyleLst>
+    </a:fmtScheme>
+  </a:themeElements>
+  <a:objectDefaults>
+    <a:spDef>
+      <a:spPr/>
+      <a:bodyPr/>
+      <a:lstStyle/>
+      <a:style>
+        <a:lnRef idx="1">
+          <a:schemeClr val="accent1"/>
+        </a:lnRef>
+        <a:fillRef idx="3">
+          <a:schemeClr val="accent1"/>
+        </a:fillRef>
+        <a:effectRef idx="2">
+          <a:schemeClr val="accent1"/>
+        </a:effectRef>
+        <a:fontRef idx="minor">
+          <a:schemeClr val="lt1"/>
+        </a:fontRef>
+      </a:style>
+    </a:spDef>
+    <a:lnDef>
+      <a:spPr/>
+      <a:bodyPr/>
+      <a:lstStyle/>
+      <a:style>
+        <a:lnRef idx="2">
+          <a:schemeClr val="accent1"/>
+        </a:lnRef>
+        <a:fillRef idx="0">
+          <a:schemeClr val="accent1"/>
+        </a:fillRef>
+        <a:effectRef idx="1">
+          <a:schemeClr val="accent1"/>
+        </a:effectRef>
+        <a:fontRef idx="minor">
+          <a:schemeClr val="tx1"/>
+        </a:fontRef>
+      </a:style>
+    </a:lnDef>
+  </a:objectDefaults>
+  <a:extraClrSchemeLst/>
+</a:theme>
+</file>
+
+<file path=ppt/theme/theme2.xml><?xml version="1.0" encoding="utf-8"?>
+<a:theme xmlns:a="http://schemas.openxmlformats.org/drawingml/2006/main" name="Office Theme">
+  <a:themeElements>
+    <a:clrScheme name="Office">
+      <a:dk1>
+        <a:sysClr val="windowText" lastClr="000000"/>
+      </a:dk1>
+      <a:lt1>
+        <a:sysClr val="window" lastClr="FFFFFF"/>
+      </a:lt1>
+      <a:dk2>
+        <a:srgbClr val="1F497D"/>
+      </a:dk2>
+      <a:lt2>
+        <a:srgbClr val="EEECE1"/>
+      </a:lt2>
+      <a:accent1>
+        <a:srgbClr val="4F81BD"/>
+      </a:accent1>
+      <a:accent2>
+        <a:srgbClr val="C0504D"/>
+      </a:accent2>
+      <a:accent3>
+        <a:srgbClr val="9BBB59"/>
+      </a:accent3>
+      <a:accent4>
+        <a:srgbClr val="8064A2"/>
+      </a:accent4>
+      <a:accent5>
+        <a:srgbClr val="4BACC6"/>
+      </a:accent5>
+      <a:accent6>
+        <a:srgbClr val="F79646"/>
+      </a:accent6>
+      <a:hlink>
+        <a:srgbClr val="0000FF"/>
+      </a:hlink>
+      <a:folHlink>
+        <a:srgbClr val="800080"/>
+      </a:folHlink>
+    </a:clrScheme>
+    <a:fontScheme name="Office">
+      <a:majorFont>
+        <a:latin typeface="Calibri"/>
+        <a:ea typeface=""/>
+        <a:cs typeface=""/>
+        <a:font script="Jpan" typeface="ＭＳ Ｐゴシック"/>
+        <a:font script="Hang" typeface="맑은 고딕"/>
+        <a:font script="Hans" typeface="宋体"/>
+        <a:font script="Hant" typeface="新細明體"/>
+        <a:font script="Arab" typeface="Times New Roman"/>
+        <a:font script="Hebr" typeface="Times New Roman"/>
+        <a:font script="Thai" typeface="Angsana New"/>
+        <a:font script="Ethi" typeface="Nyala"/>
+        <a:font script="Beng" typeface="Vrinda"/>
+        <a:font script="Gujr" typeface="Shruti"/>
+        <a:font script="Khmr" typeface="MoolBoran"/>
+        <a:font script="Knda" typeface="Tunga"/>
+        <a:font script="Guru" typeface="Raavi"/>
+        <a:font script="Cans" typeface="Euphemia"/>
+        <a:font script="Cher" typeface="Plantagenet Cherokee"/>
+        <a:font script="Yiii" typeface="Microsoft Yi Baiti"/>
+        <a:font script="Tibt" typeface="Microsoft Himalaya"/>
+        <a:font script="Thaa" typeface="MV Boli"/>
+        <a:font script="Deva" typeface="Mangal"/>
+        <a:font script="Telu" typeface="Gautami"/>
+        <a:font script="Taml" typeface="Latha"/>
+        <a:font script="Syrc" typeface="Estrangelo Edessa"/>
+        <a:font script="Orya" typeface="Kalinga"/>
+        <a:font script="Mlym" typeface="Kartika"/>
+        <a:font script="Laoo" typeface="DokChampa"/>
+        <a:font script="Sinh" typeface="Iskoola Pota"/>
+        <a:font script="Mong" typeface="Mongolian Baiti"/>
+        <a:font script="Viet" typeface="Times New Roman"/>
+        <a:font script="Uigh" typeface="Microsoft Uighur"/>
+        <a:font script="Geor" typeface="Sylfaen"/>
+      </a:majorFont>
+      <a:minorFont>
+        <a:latin typeface="Calibri"/>
+        <a:ea typeface=""/>
+        <a:cs typeface=""/>
+        <a:font script="Jpan" typeface="ＭＳ Ｐゴシック"/>
+        <a:font script="Hang" typeface="맑은 고딕"/>
+        <a:font script="Hans" typeface="宋体"/>
+        <a:font script="Hant" typeface="新細明體"/>
+        <a:font script="Arab" typeface="Arial"/>
+        <a:font script="Hebr" typeface="Arial"/>
+        <a:font script="Thai" typeface="Cordia New"/>
+        <a:font script="Ethi" typeface="Nyala"/>
+        <a:font script="Beng" typeface="Vrinda"/>
+        <a:font script="Gujr" typeface="Shruti"/>
+        <a:font script="Khmr" typeface="DaunPenh"/>
+        <a:font script="Knda" typeface="Tunga"/>
+        <a:font script="Guru" typeface="Raavi"/>
+        <a:font script="Cans" typeface="Euphemia"/>
+        <a:font script="Cher" typeface="Plantagenet Cherokee"/>
+        <a:font script="Yiii" typeface="Microsoft Yi Baiti"/>
+        <a:font script="Tibt" typeface="Microsoft Himalaya"/>
+        <a:font script="Thaa" typeface="MV Boli"/>
+        <a:font script="Deva" typeface="Mangal"/>
+        <a:font script="Telu" typeface="Gautami"/>
+        <a:font script="Taml" typeface="Latha"/>
+        <a:font script="Syrc" typeface="Estrangelo Edessa"/>
+        <a:font script="Orya" typeface="Kalinga"/>
+        <a:font script="Mlym" typeface="Kartika"/>
+        <a:font script="Laoo" typeface="DokChampa"/>
+        <a:font script="Sinh" typeface="Iskoola Pota"/>
+        <a:font script="Mong" typeface="Mongolian Baiti"/>
+        <a:font script="Viet" typeface="Arial"/>
+        <a:font script="Uigh" typeface="Microsoft Uighur"/>
+        <a:font script="Geor" typeface="Sylfaen"/>
+      </a:minorFont>
+    </a:fontScheme>
+    <a:fmtScheme name="Office">
+      <a:fillStyleLst>
         <a:solidFill>
-          <a:schemeClr val="phClr">
-            <a:tint val="95000"/>
-            <a:satMod val="170000"/>
-          </a:schemeClr>
+          <a:schemeClr val="phClr"/>
         </a:solidFill>
         <a:gradFill rotWithShape="1">
           <a:gsLst>
             <a:gs pos="0">
               <a:schemeClr val="phClr">
-                <a:tint val="93000"/>
-                <a:satMod val="150000"/>
-                <a:shade val="98000"/>
-                <a:lumMod val="102000"/>
+                <a:tint val="50000"/>
+                <a:satMod val="300000"/>
               </a:schemeClr>
             </a:gs>
-            <a:gs pos="50000">
+            <a:gs pos="35000">
               <a:schemeClr val="phClr">
-                <a:tint val="98000"/>
-                <a:satMod val="130000"/>
-                <a:shade val="90000"/>
-                <a:lumMod val="103000"/>
+                <a:tint val="37000"/>
+                <a:satMod val="300000"/>
               </a:schemeClr>
             </a:gs>
             <a:gs pos="100000">
               <a:schemeClr val="phClr">
-                <a:shade val="63000"/>
-                <a:satMod val="120000"/>
+                <a:tint val="15000"/>
+                <a:satMod val="350000"/>
               </a:schemeClr>
             </a:gs>
           </a:gsLst>
-          <a:lin ang="5400000" scaled="0"/>
+          <a:lin ang="16200000" scaled="1"/>
+        </a:gradFill>
+        <a:gradFill rotWithShape="1">
+          <a:gsLst>
+            <a:gs pos="0">
+              <a:schemeClr val="phClr">
+                <a:tint val="100000"/>
+                <a:shade val="100000"/>
+                <a:satMod val="130000"/>
+              </a:schemeClr>
+            </a:gs>
+            <a:gs pos="100000">
+              <a:schemeClr val="phClr">
+                <a:tint val="50000"/>
+                <a:shade val="100000"/>
+                <a:satMod val="350000"/>
+              </a:schemeClr>
+            </a:gs>
+          </a:gsLst>
+          <a:lin ang="16200000" scaled="0"/>
+        </a:gradFill>
+      </a:fillStyleLst>
+      <a:lnStyleLst>
+        <a:ln w="9525" cap="flat" cmpd="sng" algn="ctr">
+          <a:solidFill>
+            <a:schemeClr val="phClr">
+              <a:shade val="95000"/>
+              <a:satMod val="105000"/>
+            </a:schemeClr>
+          </a:solidFill>
+          <a:prstDash val="solid"/>
+        </a:ln>
+        <a:ln w="25400" cap="flat" cmpd="sng" algn="ctr">
+          <a:solidFill>
+            <a:schemeClr val="phClr"/>
+          </a:solidFill>
+          <a:prstDash val="solid"/>
+        </a:ln>
+        <a:ln w="38100" cap="flat" cmpd="sng" algn="ctr">
+          <a:solidFill>
+            <a:schemeClr val="phClr"/>
+          </a:solidFill>
+          <a:prstDash val="solid"/>
+        </a:ln>
+      </a:lnStyleLst>
+      <a:effectStyleLst>
+        <a:effectStyle>
+          <a:effectLst>
+            <a:outerShdw blurRad="40000" dist="20000" dir="5400000" rotWithShape="0">
+              <a:srgbClr val="000000">
+                <a:alpha val="38000"/>
+              </a:srgbClr>
+            </a:outerShdw>
+          </a:effectLst>
+        </a:effectStyle>
+        <a:effectStyle>
+          <a:effectLst>
+            <a:outerShdw blurRad="40000" dist="23000" dir="5400000" rotWithShape="0">
+              <a:srgbClr val="000000">
+                <a:alpha val="35000"/>
+              </a:srgbClr>
+            </a:outerShdw>
+          </a:effectLst>
+        </a:effectStyle>
+        <a:effectStyle>
+          <a:effectLst>
+            <a:outerShdw blurRad="40000" dist="23000" dir="5400000" rotWithShape="0">
+              <a:srgbClr val="000000">
+                <a:alpha val="35000"/>
+              </a:srgbClr>
+            </a:outerShdw>
+          </a:effectLst>
+          <a:scene3d>
+            <a:camera prst="orthographicFront">
+              <a:rot lat="0" lon="0" rev="0"/>
+            </a:camera>
+            <a:lightRig rig="threePt" dir="t">
+              <a:rot lat="0" lon="0" rev="1200000"/>
+            </a:lightRig>
+          </a:scene3d>
+          <a:sp3d>
+            <a:bevelT w="63500" h="25400"/>
+          </a:sp3d>
+        </a:effectStyle>
+      </a:effectStyleLst>
+      <a:bgFillStyleLst>
+        <a:solidFill>
+          <a:schemeClr val="phClr"/>
+        </a:solidFill>
+        <a:gradFill rotWithShape="1">
+          <a:gsLst>
+            <a:gs pos="0">
+              <a:schemeClr val="phClr">
+                <a:tint val="40000"/>
+                <a:satMod val="350000"/>
+              </a:schemeClr>
+            </a:gs>
+            <a:gs pos="40000">
+              <a:schemeClr val="phClr">
+                <a:tint val="45000"/>
+                <a:shade val="99000"/>
+                <a:satMod val="350000"/>
+              </a:schemeClr>
+            </a:gs>
+            <a:gs pos="100000">
+              <a:schemeClr val="phClr">
+                <a:shade val="20000"/>
+                <a:satMod val="255000"/>
+              </a:schemeClr>
+            </a:gs>
+          </a:gsLst>
+          <a:path path="circle">
+            <a:fillToRect l="50000" t="-80000" r="50000" b="180000"/>
+          </a:path>
+        </a:gradFill>
+        <a:gradFill rotWithShape="1">
+          <a:gsLst>
+            <a:gs pos="0">
+              <a:schemeClr val="phClr">
+                <a:tint val="80000"/>
+                <a:satMod val="300000"/>
+              </a:schemeClr>
+            </a:gs>
+            <a:gs pos="100000">
+              <a:schemeClr val="phClr">
+                <a:shade val="30000"/>
+                <a:satMod val="200000"/>
+              </a:schemeClr>
+            </a:gs>
+          </a:gsLst>
+          <a:path path="circle">
+            <a:fillToRect l="50000" t="50000" r="50000" b="50000"/>
+          </a:path>
         </a:gradFill>
       </a:bgFillStyleLst>
     </a:fmtScheme>
   </a:themeElements>
-  <a:objectDefaults/>
+  <a:objectDefaults>
+    <a:spDef>
+      <a:spPr/>
+      <a:bodyPr/>
+      <a:lstStyle/>
+      <a:style>
+        <a:lnRef idx="1">
+          <a:schemeClr val="accent1"/>
+        </a:lnRef>
+        <a:fillRef idx="3">
+          <a:schemeClr val="accent1"/>
+        </a:fillRef>
+        <a:effectRef idx="2">
+          <a:schemeClr val="accent1"/>
+        </a:effectRef>
+        <a:fontRef idx="minor">
+          <a:schemeClr val="lt1"/>
+        </a:fontRef>
+      </a:style>
+    </a:spDef>
+    <a:lnDef>
+      <a:spPr/>
+      <a:bodyPr/>
+      <a:lstStyle/>
+      <a:style>
+        <a:lnRef idx="2">
+          <a:schemeClr val="accent1"/>
+        </a:lnRef>
+        <a:fillRef idx="0">
+          <a:schemeClr val="accent1"/>
+        </a:fillRef>
+        <a:effectRef idx="1">
+          <a:schemeClr val="accent1"/>
+        </a:effectRef>
+        <a:fontRef idx="minor">
+          <a:schemeClr val="tx1"/>
+        </a:fontRef>
+      </a:style>
+    </a:lnDef>
+  </a:objectDefaults>
   <a:extraClrSchemeLst/>
-  <a:extLst>
-    <a:ext uri="{05A4C25C-085E-4340-85A3-A5531E510DB2}">
-      <thm15:themeFamily xmlns:thm15="http://schemas.microsoft.com/office/thememl/2012/main" name="Office Theme" id="{62F939B6-93AF-4DB8-9C6B-D6C7DFDC589F}" vid="{4A3C46E8-61CC-4603-A589-7422A47A8E4A}"/>
-    </a:ext>
-  </a:extLst>
 </a:theme>
 </file>